--- a/modules/08-service-enterprise-deployment/assets/service-enterprise-deployment.pptx
+++ b/modules/08-service-enterprise-deployment/assets/service-enterprise-deployment.pptx
@@ -119,6 +119,1841 @@
     </a:lvl9pPr>
   </p:defaultTextStyle>
 </p:presentation>
+</file>
+
+<file path=ppt/notesMasters/notesMaster1.xml><?xml version="1.0" encoding="utf-8"?>
+<p:notesMaster xmlns:a="http://schemas.openxmlformats.org/drawingml/2006/main" xmlns:p="http://schemas.openxmlformats.org/presentationml/2006/main" xmlns:r="http://schemas.openxmlformats.org/officeDocument/2006/relationships">
+  <p:cSld>
+    <p:bg>
+      <p:bgRef idx="1001">
+        <a:schemeClr val="bg1"/>
+      </p:bgRef>
+    </p:bg>
+    <p:spTree>
+      <p:nvGrpSpPr>
+        <p:cNvPr id="1" name=""/>
+        <p:cNvGrpSpPr/>
+        <p:nvPr/>
+      </p:nvGrpSpPr>
+      <p:grpSpPr>
+        <a:xfrm>
+          <a:off x="0" y="0"/>
+          <a:ext cx="0" cy="0"/>
+          <a:chOff x="0" y="0"/>
+          <a:chExt cx="0" cy="0"/>
+        </a:xfrm>
+      </p:grpSpPr>
+      <p:sp>
+        <p:nvSpPr>
+          <p:cNvPr id="2" name="Header Placeholder 1"/>
+          <p:cNvSpPr>
+            <a:spLocks noGrp="1"/>
+          </p:cNvSpPr>
+          <p:nvPr>
+            <p:ph type="hdr" sz="quarter"/>
+          </p:nvPr>
+        </p:nvSpPr>
+        <p:spPr>
+          <a:xfrm>
+            <a:off x="0" y="0"/>
+            <a:ext cx="2971800" cy="457200"/>
+          </a:xfrm>
+          <a:prstGeom prst="rect">
+            <a:avLst/>
+          </a:prstGeom>
+        </p:spPr>
+        <p:txBody>
+          <a:bodyPr vert="horz" lIns="91440" tIns="45720" rIns="91440" bIns="45720" rtlCol="0"/>
+          <a:lstStyle>
+            <a:lvl1pPr algn="l">
+              <a:defRPr sz="1200"/>
+            </a:lvl1pPr>
+          </a:lstStyle>
+          <a:p>
+            <a:endParaRPr lang="en-US"/>
+          </a:p>
+        </p:txBody>
+      </p:sp>
+      <p:sp>
+        <p:nvSpPr>
+          <p:cNvPr id="3" name="Date Placeholder 2"/>
+          <p:cNvSpPr>
+            <a:spLocks noGrp="1"/>
+          </p:cNvSpPr>
+          <p:nvPr>
+            <p:ph type="dt" idx="1"/>
+          </p:nvPr>
+        </p:nvSpPr>
+        <p:spPr>
+          <a:xfrm>
+            <a:off x="3884613" y="0"/>
+            <a:ext cx="2971800" cy="457200"/>
+          </a:xfrm>
+          <a:prstGeom prst="rect">
+            <a:avLst/>
+          </a:prstGeom>
+        </p:spPr>
+        <p:txBody>
+          <a:bodyPr vert="horz" lIns="91440" tIns="45720" rIns="91440" bIns="45720" rtlCol="0"/>
+          <a:lstStyle>
+            <a:lvl1pPr algn="r">
+              <a:defRPr sz="1200"/>
+            </a:lvl1pPr>
+          </a:lstStyle>
+          <a:p>
+            <a:fld id="{0F89C1C7-3DCD-1040-A9CF-14679D8B5DDD}" type="datetimeFigureOut">
+              <a:rPr lang="en-US" smtClean="0"/>
+              <a:t>10/17/16</a:t>
+            </a:fld>
+            <a:endParaRPr lang="en-US"/>
+          </a:p>
+        </p:txBody>
+      </p:sp>
+      <p:sp>
+        <p:nvSpPr>
+          <p:cNvPr id="4" name="Slide Image Placeholder 3"/>
+          <p:cNvSpPr>
+            <a:spLocks noGrp="1" noRot="1" noChangeAspect="1"/>
+          </p:cNvSpPr>
+          <p:nvPr>
+            <p:ph type="sldImg" idx="2"/>
+          </p:nvPr>
+        </p:nvSpPr>
+        <p:spPr>
+          <a:xfrm>
+            <a:off x="1143000" y="685800"/>
+            <a:ext cx="4572000" cy="3429000"/>
+          </a:xfrm>
+          <a:prstGeom prst="rect">
+            <a:avLst/>
+          </a:prstGeom>
+          <a:noFill/>
+          <a:ln w="12700">
+            <a:solidFill>
+              <a:prstClr val="black"/>
+            </a:solidFill>
+          </a:ln>
+        </p:spPr>
+        <p:txBody>
+          <a:bodyPr vert="horz" lIns="91440" tIns="45720" rIns="91440" bIns="45720" rtlCol="0" anchor="ctr"/>
+          <a:lstStyle/>
+          <a:p>
+            <a:endParaRPr lang="en-US"/>
+          </a:p>
+        </p:txBody>
+      </p:sp>
+      <p:sp>
+        <p:nvSpPr>
+          <p:cNvPr id="5" name="Notes Placeholder 4"/>
+          <p:cNvSpPr>
+            <a:spLocks noGrp="1"/>
+          </p:cNvSpPr>
+          <p:nvPr>
+            <p:ph type="body" sz="quarter" idx="3"/>
+          </p:nvPr>
+        </p:nvSpPr>
+        <p:spPr>
+          <a:xfrm>
+            <a:off x="685800" y="4343400"/>
+            <a:ext cx="5486400" cy="4114800"/>
+          </a:xfrm>
+          <a:prstGeom prst="rect">
+            <a:avLst/>
+          </a:prstGeom>
+        </p:spPr>
+        <p:txBody>
+          <a:bodyPr vert="horz" lIns="91440" tIns="45720" rIns="91440" bIns="45720" rtlCol="0"/>
+          <a:lstStyle/>
+          <a:p>
+            <a:pPr lvl="0"/>
+            <a:r>
+              <a:rPr lang="en-US" smtClean="0"/>
+              <a:t>Click to edit Master text styles</a:t>
+            </a:r>
+          </a:p>
+          <a:p>
+            <a:pPr lvl="1"/>
+            <a:r>
+              <a:rPr lang="en-US" smtClean="0"/>
+              <a:t>Second level</a:t>
+            </a:r>
+          </a:p>
+          <a:p>
+            <a:pPr lvl="2"/>
+            <a:r>
+              <a:rPr lang="en-US" smtClean="0"/>
+              <a:t>Third level</a:t>
+            </a:r>
+          </a:p>
+          <a:p>
+            <a:pPr lvl="3"/>
+            <a:r>
+              <a:rPr lang="en-US" smtClean="0"/>
+              <a:t>Fourth level</a:t>
+            </a:r>
+          </a:p>
+          <a:p>
+            <a:pPr lvl="4"/>
+            <a:r>
+              <a:rPr lang="en-US" smtClean="0"/>
+              <a:t>Fifth level</a:t>
+            </a:r>
+            <a:endParaRPr lang="en-US"/>
+          </a:p>
+        </p:txBody>
+      </p:sp>
+      <p:sp>
+        <p:nvSpPr>
+          <p:cNvPr id="6" name="Footer Placeholder 5"/>
+          <p:cNvSpPr>
+            <a:spLocks noGrp="1"/>
+          </p:cNvSpPr>
+          <p:nvPr>
+            <p:ph type="ftr" sz="quarter" idx="4"/>
+          </p:nvPr>
+        </p:nvSpPr>
+        <p:spPr>
+          <a:xfrm>
+            <a:off x="0" y="8685213"/>
+            <a:ext cx="2971800" cy="457200"/>
+          </a:xfrm>
+          <a:prstGeom prst="rect">
+            <a:avLst/>
+          </a:prstGeom>
+        </p:spPr>
+        <p:txBody>
+          <a:bodyPr vert="horz" lIns="91440" tIns="45720" rIns="91440" bIns="45720" rtlCol="0" anchor="b"/>
+          <a:lstStyle>
+            <a:lvl1pPr algn="l">
+              <a:defRPr sz="1200"/>
+            </a:lvl1pPr>
+          </a:lstStyle>
+          <a:p>
+            <a:endParaRPr lang="en-US"/>
+          </a:p>
+        </p:txBody>
+      </p:sp>
+      <p:sp>
+        <p:nvSpPr>
+          <p:cNvPr id="7" name="Slide Number Placeholder 6"/>
+          <p:cNvSpPr>
+            <a:spLocks noGrp="1"/>
+          </p:cNvSpPr>
+          <p:nvPr>
+            <p:ph type="sldNum" sz="quarter" idx="5"/>
+          </p:nvPr>
+        </p:nvSpPr>
+        <p:spPr>
+          <a:xfrm>
+            <a:off x="3884613" y="8685213"/>
+            <a:ext cx="2971800" cy="457200"/>
+          </a:xfrm>
+          <a:prstGeom prst="rect">
+            <a:avLst/>
+          </a:prstGeom>
+        </p:spPr>
+        <p:txBody>
+          <a:bodyPr vert="horz" lIns="91440" tIns="45720" rIns="91440" bIns="45720" rtlCol="0" anchor="b"/>
+          <a:lstStyle>
+            <a:lvl1pPr algn="r">
+              <a:defRPr sz="1200"/>
+            </a:lvl1pPr>
+          </a:lstStyle>
+          <a:p>
+            <a:fld id="{BB5E49A5-4136-284D-997B-48E1D791AD67}" type="slidenum">
+              <a:rPr lang="en-US" smtClean="0"/>
+              <a:t>‹#›</a:t>
+            </a:fld>
+            <a:endParaRPr lang="en-US"/>
+          </a:p>
+        </p:txBody>
+      </p:sp>
+    </p:spTree>
+    <p:extLst>
+      <p:ext uri="{BB962C8B-B14F-4D97-AF65-F5344CB8AC3E}">
+        <p14:creationId xmlns:p14="http://schemas.microsoft.com/office/powerpoint/2010/main" val="2623252185"/>
+      </p:ext>
+    </p:extLst>
+  </p:cSld>
+  <p:clrMap bg1="lt1" tx1="dk1" bg2="lt2" tx2="dk2" accent1="accent1" accent2="accent2" accent3="accent3" accent4="accent4" accent5="accent5" accent6="accent6" hlink="hlink" folHlink="folHlink"/>
+  <p:notesStyle>
+    <a:lvl1pPr marL="0" algn="l" defTabSz="457200" rtl="0" eaLnBrk="1" latinLnBrk="0" hangingPunct="1">
+      <a:defRPr sz="1200" kern="1200">
+        <a:solidFill>
+          <a:schemeClr val="tx1"/>
+        </a:solidFill>
+        <a:latin typeface="+mn-lt"/>
+        <a:ea typeface="+mn-ea"/>
+        <a:cs typeface="+mn-cs"/>
+      </a:defRPr>
+    </a:lvl1pPr>
+    <a:lvl2pPr marL="457200" algn="l" defTabSz="457200" rtl="0" eaLnBrk="1" latinLnBrk="0" hangingPunct="1">
+      <a:defRPr sz="1200" kern="1200">
+        <a:solidFill>
+          <a:schemeClr val="tx1"/>
+        </a:solidFill>
+        <a:latin typeface="+mn-lt"/>
+        <a:ea typeface="+mn-ea"/>
+        <a:cs typeface="+mn-cs"/>
+      </a:defRPr>
+    </a:lvl2pPr>
+    <a:lvl3pPr marL="914400" algn="l" defTabSz="457200" rtl="0" eaLnBrk="1" latinLnBrk="0" hangingPunct="1">
+      <a:defRPr sz="1200" kern="1200">
+        <a:solidFill>
+          <a:schemeClr val="tx1"/>
+        </a:solidFill>
+        <a:latin typeface="+mn-lt"/>
+        <a:ea typeface="+mn-ea"/>
+        <a:cs typeface="+mn-cs"/>
+      </a:defRPr>
+    </a:lvl3pPr>
+    <a:lvl4pPr marL="1371600" algn="l" defTabSz="457200" rtl="0" eaLnBrk="1" latinLnBrk="0" hangingPunct="1">
+      <a:defRPr sz="1200" kern="1200">
+        <a:solidFill>
+          <a:schemeClr val="tx1"/>
+        </a:solidFill>
+        <a:latin typeface="+mn-lt"/>
+        <a:ea typeface="+mn-ea"/>
+        <a:cs typeface="+mn-cs"/>
+      </a:defRPr>
+    </a:lvl4pPr>
+    <a:lvl5pPr marL="1828800" algn="l" defTabSz="457200" rtl="0" eaLnBrk="1" latinLnBrk="0" hangingPunct="1">
+      <a:defRPr sz="1200" kern="1200">
+        <a:solidFill>
+          <a:schemeClr val="tx1"/>
+        </a:solidFill>
+        <a:latin typeface="+mn-lt"/>
+        <a:ea typeface="+mn-ea"/>
+        <a:cs typeface="+mn-cs"/>
+      </a:defRPr>
+    </a:lvl5pPr>
+    <a:lvl6pPr marL="2286000" algn="l" defTabSz="457200" rtl="0" eaLnBrk="1" latinLnBrk="0" hangingPunct="1">
+      <a:defRPr sz="1200" kern="1200">
+        <a:solidFill>
+          <a:schemeClr val="tx1"/>
+        </a:solidFill>
+        <a:latin typeface="+mn-lt"/>
+        <a:ea typeface="+mn-ea"/>
+        <a:cs typeface="+mn-cs"/>
+      </a:defRPr>
+    </a:lvl6pPr>
+    <a:lvl7pPr marL="2743200" algn="l" defTabSz="457200" rtl="0" eaLnBrk="1" latinLnBrk="0" hangingPunct="1">
+      <a:defRPr sz="1200" kern="1200">
+        <a:solidFill>
+          <a:schemeClr val="tx1"/>
+        </a:solidFill>
+        <a:latin typeface="+mn-lt"/>
+        <a:ea typeface="+mn-ea"/>
+        <a:cs typeface="+mn-cs"/>
+      </a:defRPr>
+    </a:lvl7pPr>
+    <a:lvl8pPr marL="3200400" algn="l" defTabSz="457200" rtl="0" eaLnBrk="1" latinLnBrk="0" hangingPunct="1">
+      <a:defRPr sz="1200" kern="1200">
+        <a:solidFill>
+          <a:schemeClr val="tx1"/>
+        </a:solidFill>
+        <a:latin typeface="+mn-lt"/>
+        <a:ea typeface="+mn-ea"/>
+        <a:cs typeface="+mn-cs"/>
+      </a:defRPr>
+    </a:lvl8pPr>
+    <a:lvl9pPr marL="3657600" algn="l" defTabSz="457200" rtl="0" eaLnBrk="1" latinLnBrk="0" hangingPunct="1">
+      <a:defRPr sz="1200" kern="1200">
+        <a:solidFill>
+          <a:schemeClr val="tx1"/>
+        </a:solidFill>
+        <a:latin typeface="+mn-lt"/>
+        <a:ea typeface="+mn-ea"/>
+        <a:cs typeface="+mn-cs"/>
+      </a:defRPr>
+    </a:lvl9pPr>
+  </p:notesStyle>
+</p:notesMaster>
+</file>
+
+<file path=ppt/notesSlides/notesSlide1.xml><?xml version="1.0" encoding="utf-8"?>
+<p:notes xmlns:a="http://schemas.openxmlformats.org/drawingml/2006/main" xmlns:p="http://schemas.openxmlformats.org/presentationml/2006/main" xmlns:r="http://schemas.openxmlformats.org/officeDocument/2006/relationships">
+  <p:cSld>
+    <p:spTree>
+      <p:nvGrpSpPr>
+        <p:cNvPr id="1" name=""/>
+        <p:cNvGrpSpPr/>
+        <p:nvPr/>
+      </p:nvGrpSpPr>
+      <p:grpSpPr>
+        <a:xfrm>
+          <a:off x="0" y="0"/>
+          <a:ext cx="0" cy="0"/>
+          <a:chOff x="0" y="0"/>
+          <a:chExt cx="0" cy="0"/>
+        </a:xfrm>
+      </p:grpSpPr>
+      <p:sp>
+        <p:nvSpPr>
+          <p:cNvPr id="2" name="Slide Image Placeholder 1"/>
+          <p:cNvSpPr>
+            <a:spLocks noGrp="1"/>
+          </p:cNvSpPr>
+          <p:nvPr>
+            <p:ph type="sldImg" idx="2"/>
+          </p:nvPr>
+        </p:nvSpPr>
+        <p:spPr/>
+      </p:sp>
+      <p:sp>
+        <p:nvSpPr>
+          <p:cNvPr id="3" name="Notes Placeholder 2"/>
+          <p:cNvSpPr>
+            <a:spLocks noGrp="1"/>
+          </p:cNvSpPr>
+          <p:nvPr>
+            <p:ph type="body" idx="3" sz="quarter"/>
+          </p:nvPr>
+        </p:nvSpPr>
+        <p:spPr/>
+        <p:txBody>
+          <a:bodyPr/>
+          <a:lstStyle/>
+          <a:p>
+            <a:r>
+              <a:t>Opening talk track: Welcome students to this module and explain that the goal is not to memorize features. The goal is to understand when a pattern helps authors build more trustworthy, maintainable, user-friendly Power BI solutions.</a:t>
+            </a:r>
+          </a:p>
+          <a:p>
+            <a:r>
+              <a:t>Module framing: Frame this module as moving from a working desktop file to governed content users can trust in the Service.</a:t>
+            </a:r>
+          </a:p>
+          <a:p>
+            <a:r>
+              <a:t>Set expectations: presentation will introduce the theme, then the lab will let learners build or evaluate the pattern hands-on. Encourage questions about tradeoffs, not just button clicks.</a:t>
+            </a:r>
+          </a:p>
+          <a:p>
+            <a:r>
+              <a:t>Further learning: Publish from Desktop: https://learn.microsoft.com/power-bi/create-reports/desktop-upload-desktop-files | Power BI Apps: https://learn.microsoft.com/power-bi/collaborate-share/service-create-distribute-apps | Deployment pipelines: https://learn.microsoft.com/power-bi/create-reports/deployment-pipelines-overview</a:t>
+            </a:r>
+          </a:p>
+        </p:txBody>
+      </p:sp>
+      <p:sp>
+        <p:nvSpPr>
+          <p:cNvPr id="4" name="Slide Number Placeholder 3"/>
+          <p:cNvSpPr>
+            <a:spLocks noGrp="1"/>
+          </p:cNvSpPr>
+          <p:nvPr>
+            <p:ph type="sldNum" idx="5" sz="quarter"/>
+          </p:nvPr>
+        </p:nvSpPr>
+        <p:spPr/>
+      </p:sp>
+    </p:spTree>
+  </p:cSld>
+  <p:clrMapOvr>
+    <a:masterClrMapping/>
+  </p:clrMapOvr>
+</p:notes>
+</file>
+
+<file path=ppt/notesSlides/notesSlide10.xml><?xml version="1.0" encoding="utf-8"?>
+<p:notes xmlns:a="http://schemas.openxmlformats.org/drawingml/2006/main" xmlns:p="http://schemas.openxmlformats.org/presentationml/2006/main" xmlns:r="http://schemas.openxmlformats.org/officeDocument/2006/relationships">
+  <p:cSld>
+    <p:spTree>
+      <p:nvGrpSpPr>
+        <p:cNvPr id="1" name=""/>
+        <p:cNvGrpSpPr/>
+        <p:nvPr/>
+      </p:nvGrpSpPr>
+      <p:grpSpPr>
+        <a:xfrm>
+          <a:off x="0" y="0"/>
+          <a:ext cx="0" cy="0"/>
+          <a:chOff x="0" y="0"/>
+          <a:chExt cx="0" cy="0"/>
+        </a:xfrm>
+      </p:grpSpPr>
+      <p:sp>
+        <p:nvSpPr>
+          <p:cNvPr id="2" name="Slide Image Placeholder 1"/>
+          <p:cNvSpPr>
+            <a:spLocks noGrp="1"/>
+          </p:cNvSpPr>
+          <p:nvPr>
+            <p:ph type="sldImg" idx="2"/>
+          </p:nvPr>
+        </p:nvSpPr>
+        <p:spPr/>
+      </p:sp>
+      <p:sp>
+        <p:nvSpPr>
+          <p:cNvPr id="3" name="Notes Placeholder 2"/>
+          <p:cNvSpPr>
+            <a:spLocks noGrp="1"/>
+          </p:cNvSpPr>
+          <p:nvPr>
+            <p:ph type="body" idx="3" sz="quarter"/>
+          </p:nvPr>
+        </p:nvSpPr>
+        <p:spPr/>
+        <p:txBody>
+          <a:bodyPr/>
+          <a:lstStyle/>
+          <a:p>
+            <a:r>
+              <a:t>Core message: 8. Power BI Apps.</a:t>
+            </a:r>
+          </a:p>
+          <a:p>
+            <a:r>
+              <a:t>Talking points to expand: Talking points, learner value, and lab connection Talking points • App packaging • App consumers Why it helps • Update process • Audience targeting Lab connection Coverage: Covered. Use the lab README to demonstrate or discuss this topic. Review terms: packaging, targeting. 10</a:t>
+            </a:r>
+          </a:p>
+          <a:p>
+            <a:r>
+              <a:t>Why it matters: Frame this module as moving from a working desktop file to governed content users can trust in the Service.</a:t>
+            </a:r>
+          </a:p>
+          <a:p>
+            <a:r>
+              <a:t>How it helps users: connect the technical pattern to clearer decisions, fewer confusing report interactions, better trust in results, or easier support.</a:t>
+            </a:r>
+          </a:p>
+          <a:p>
+            <a:r>
+              <a:t>How it builds on prior lessons: reference the previous layer in the workshop, such as prepared data, a clean model, tested measures, or report UX conventions.</a:t>
+            </a:r>
+          </a:p>
+          <a:p>
+            <a:r>
+              <a:t>Lab connection: Show where this concept appears in the module lab. If the lab path is conceptual or Verify for Gov, explain what learners should document instead of building hands-on.</a:t>
+            </a:r>
+          </a:p>
+          <a:p>
+            <a:r>
+              <a:t>Instructor prompt: Ask one learner to describe the risk of skipping this pattern or using it without validation.</a:t>
+            </a:r>
+          </a:p>
+          <a:p>
+            <a:r>
+              <a:t>Further learning: Publish from Desktop: https://learn.microsoft.com/power-bi/create-reports/desktop-upload-desktop-files | Power BI Apps: https://learn.microsoft.com/power-bi/collaborate-share/service-create-distribute-apps | Deployment pipelines: https://learn.microsoft.com/power-bi/create-reports/deployment-pipelines-overview</a:t>
+            </a:r>
+          </a:p>
+        </p:txBody>
+      </p:sp>
+      <p:sp>
+        <p:nvSpPr>
+          <p:cNvPr id="4" name="Slide Number Placeholder 3"/>
+          <p:cNvSpPr>
+            <a:spLocks noGrp="1"/>
+          </p:cNvSpPr>
+          <p:nvPr>
+            <p:ph type="sldNum" idx="5" sz="quarter"/>
+          </p:nvPr>
+        </p:nvSpPr>
+        <p:spPr/>
+      </p:sp>
+    </p:spTree>
+  </p:cSld>
+  <p:clrMapOvr>
+    <a:masterClrMapping/>
+  </p:clrMapOvr>
+</p:notes>
+</file>
+
+<file path=ppt/notesSlides/notesSlide11.xml><?xml version="1.0" encoding="utf-8"?>
+<p:notes xmlns:a="http://schemas.openxmlformats.org/drawingml/2006/main" xmlns:p="http://schemas.openxmlformats.org/presentationml/2006/main" xmlns:r="http://schemas.openxmlformats.org/officeDocument/2006/relationships">
+  <p:cSld>
+    <p:spTree>
+      <p:nvGrpSpPr>
+        <p:cNvPr id="1" name=""/>
+        <p:cNvGrpSpPr/>
+        <p:nvPr/>
+      </p:nvGrpSpPr>
+      <p:grpSpPr>
+        <a:xfrm>
+          <a:off x="0" y="0"/>
+          <a:ext cx="0" cy="0"/>
+          <a:chOff x="0" y="0"/>
+          <a:chExt cx="0" cy="0"/>
+        </a:xfrm>
+      </p:grpSpPr>
+      <p:sp>
+        <p:nvSpPr>
+          <p:cNvPr id="2" name="Slide Image Placeholder 1"/>
+          <p:cNvSpPr>
+            <a:spLocks noGrp="1"/>
+          </p:cNvSpPr>
+          <p:nvPr>
+            <p:ph type="sldImg" idx="2"/>
+          </p:nvPr>
+        </p:nvSpPr>
+        <p:spPr/>
+      </p:sp>
+      <p:sp>
+        <p:nvSpPr>
+          <p:cNvPr id="3" name="Notes Placeholder 2"/>
+          <p:cNvSpPr>
+            <a:spLocks noGrp="1"/>
+          </p:cNvSpPr>
+          <p:nvPr>
+            <p:ph type="body" idx="3" sz="quarter"/>
+          </p:nvPr>
+        </p:nvSpPr>
+        <p:spPr/>
+        <p:txBody>
+          <a:bodyPr/>
+          <a:lstStyle/>
+          <a:p>
+            <a:r>
+              <a:t>Core message: 9. Deployment pipelines.</a:t>
+            </a:r>
+          </a:p>
+          <a:p>
+            <a:r>
+              <a:t>Talking points to expand: Talking points, learner value, and lab connection Talking points • Dev/test/prod stages • Deployment rules Why it helps • Capacity/licensing requirements • Gov validation Lab connection Coverage: Covered. Use the lab README to demonstrate or discuss this topic. Review terms: none. 11</a:t>
+            </a:r>
+          </a:p>
+          <a:p>
+            <a:r>
+              <a:t>Why it matters: Frame this module as moving from a working desktop file to governed content users can trust in the Service.</a:t>
+            </a:r>
+          </a:p>
+          <a:p>
+            <a:r>
+              <a:t>How it helps users: connect the technical pattern to clearer decisions, fewer confusing report interactions, better trust in results, or easier support.</a:t>
+            </a:r>
+          </a:p>
+          <a:p>
+            <a:r>
+              <a:t>How it builds on prior lessons: reference the previous layer in the workshop, such as prepared data, a clean model, tested measures, or report UX conventions.</a:t>
+            </a:r>
+          </a:p>
+          <a:p>
+            <a:r>
+              <a:t>Lab connection: Show where this concept appears in the module lab. If the lab path is conceptual or Verify for Gov, explain what learners should document instead of building hands-on.</a:t>
+            </a:r>
+          </a:p>
+          <a:p>
+            <a:r>
+              <a:t>Instructor prompt: Ask one learner to describe the risk of skipping this pattern or using it without validation.</a:t>
+            </a:r>
+          </a:p>
+          <a:p>
+            <a:r>
+              <a:t>Further learning: Publish from Desktop: https://learn.microsoft.com/power-bi/create-reports/desktop-upload-desktop-files | Power BI Apps: https://learn.microsoft.com/power-bi/collaborate-share/service-create-distribute-apps | Deployment pipelines: https://learn.microsoft.com/power-bi/create-reports/deployment-pipelines-overview</a:t>
+            </a:r>
+          </a:p>
+        </p:txBody>
+      </p:sp>
+      <p:sp>
+        <p:nvSpPr>
+          <p:cNvPr id="4" name="Slide Number Placeholder 3"/>
+          <p:cNvSpPr>
+            <a:spLocks noGrp="1"/>
+          </p:cNvSpPr>
+          <p:nvPr>
+            <p:ph type="sldNum" idx="5" sz="quarter"/>
+          </p:nvPr>
+        </p:nvSpPr>
+        <p:spPr/>
+      </p:sp>
+    </p:spTree>
+  </p:cSld>
+  <p:clrMapOvr>
+    <a:masterClrMapping/>
+  </p:clrMapOvr>
+</p:notes>
+</file>
+
+<file path=ppt/notesSlides/notesSlide12.xml><?xml version="1.0" encoding="utf-8"?>
+<p:notes xmlns:a="http://schemas.openxmlformats.org/drawingml/2006/main" xmlns:p="http://schemas.openxmlformats.org/presentationml/2006/main" xmlns:r="http://schemas.openxmlformats.org/officeDocument/2006/relationships">
+  <p:cSld>
+    <p:spTree>
+      <p:nvGrpSpPr>
+        <p:cNvPr id="1" name=""/>
+        <p:cNvGrpSpPr/>
+        <p:nvPr/>
+      </p:nvGrpSpPr>
+      <p:grpSpPr>
+        <a:xfrm>
+          <a:off x="0" y="0"/>
+          <a:ext cx="0" cy="0"/>
+          <a:chOff x="0" y="0"/>
+          <a:chExt cx="0" cy="0"/>
+        </a:xfrm>
+      </p:grpSpPr>
+      <p:sp>
+        <p:nvSpPr>
+          <p:cNvPr id="2" name="Slide Image Placeholder 1"/>
+          <p:cNvSpPr>
+            <a:spLocks noGrp="1"/>
+          </p:cNvSpPr>
+          <p:nvPr>
+            <p:ph type="sldImg" idx="2"/>
+          </p:nvPr>
+        </p:nvSpPr>
+        <p:spPr/>
+      </p:sp>
+      <p:sp>
+        <p:nvSpPr>
+          <p:cNvPr id="3" name="Notes Placeholder 2"/>
+          <p:cNvSpPr>
+            <a:spLocks noGrp="1"/>
+          </p:cNvSpPr>
+          <p:nvPr>
+            <p:ph type="body" idx="3" sz="quarter"/>
+          </p:nvPr>
+        </p:nvSpPr>
+        <p:spPr/>
+        <p:txBody>
+          <a:bodyPr/>
+          <a:lstStyle/>
+          <a:p>
+            <a:r>
+              <a:t>Core message: 10. Endorsement.</a:t>
+            </a:r>
+          </a:p>
+          <a:p>
+            <a:r>
+              <a:t>Talking points to expand: Talking points, learner value, and lab connection Talking points • Promoted • Certified Why it helps • Governance workflow • Ownership and support Lab connection Coverage: Covered. Use the lab README to demonstrate or discuss this topic. Review terms: workflow. 12</a:t>
+            </a:r>
+          </a:p>
+          <a:p>
+            <a:r>
+              <a:t>Why it matters: Frame this module as moving from a working desktop file to governed content users can trust in the Service.</a:t>
+            </a:r>
+          </a:p>
+          <a:p>
+            <a:r>
+              <a:t>How it helps users: connect the technical pattern to clearer decisions, fewer confusing report interactions, better trust in results, or easier support.</a:t>
+            </a:r>
+          </a:p>
+          <a:p>
+            <a:r>
+              <a:t>How it builds on prior lessons: reference the previous layer in the workshop, such as prepared data, a clean model, tested measures, or report UX conventions.</a:t>
+            </a:r>
+          </a:p>
+          <a:p>
+            <a:r>
+              <a:t>Lab connection: Show where this concept appears in the module lab. If the lab path is conceptual or Verify for Gov, explain what learners should document instead of building hands-on.</a:t>
+            </a:r>
+          </a:p>
+          <a:p>
+            <a:r>
+              <a:t>Instructor prompt: Ask one learner to describe the risk of skipping this pattern or using it without validation.</a:t>
+            </a:r>
+          </a:p>
+          <a:p>
+            <a:r>
+              <a:t>Further learning: Publish from Desktop: https://learn.microsoft.com/power-bi/create-reports/desktop-upload-desktop-files | Power BI Apps: https://learn.microsoft.com/power-bi/collaborate-share/service-create-distribute-apps | Deployment pipelines: https://learn.microsoft.com/power-bi/create-reports/deployment-pipelines-overview</a:t>
+            </a:r>
+          </a:p>
+        </p:txBody>
+      </p:sp>
+      <p:sp>
+        <p:nvSpPr>
+          <p:cNvPr id="4" name="Slide Number Placeholder 3"/>
+          <p:cNvSpPr>
+            <a:spLocks noGrp="1"/>
+          </p:cNvSpPr>
+          <p:nvPr>
+            <p:ph type="sldNum" idx="5" sz="quarter"/>
+          </p:nvPr>
+        </p:nvSpPr>
+        <p:spPr/>
+      </p:sp>
+    </p:spTree>
+  </p:cSld>
+  <p:clrMapOvr>
+    <a:masterClrMapping/>
+  </p:clrMapOvr>
+</p:notes>
+</file>
+
+<file path=ppt/notesSlides/notesSlide13.xml><?xml version="1.0" encoding="utf-8"?>
+<p:notes xmlns:a="http://schemas.openxmlformats.org/drawingml/2006/main" xmlns:p="http://schemas.openxmlformats.org/presentationml/2006/main" xmlns:r="http://schemas.openxmlformats.org/officeDocument/2006/relationships">
+  <p:cSld>
+    <p:spTree>
+      <p:nvGrpSpPr>
+        <p:cNvPr id="1" name=""/>
+        <p:cNvGrpSpPr/>
+        <p:nvPr/>
+      </p:nvGrpSpPr>
+      <p:grpSpPr>
+        <a:xfrm>
+          <a:off x="0" y="0"/>
+          <a:ext cx="0" cy="0"/>
+          <a:chOff x="0" y="0"/>
+          <a:chExt cx="0" cy="0"/>
+        </a:xfrm>
+      </p:grpSpPr>
+      <p:sp>
+        <p:nvSpPr>
+          <p:cNvPr id="2" name="Slide Image Placeholder 1"/>
+          <p:cNvSpPr>
+            <a:spLocks noGrp="1"/>
+          </p:cNvSpPr>
+          <p:nvPr>
+            <p:ph type="sldImg" idx="2"/>
+          </p:nvPr>
+        </p:nvSpPr>
+        <p:spPr/>
+      </p:sp>
+      <p:sp>
+        <p:nvSpPr>
+          <p:cNvPr id="3" name="Notes Placeholder 2"/>
+          <p:cNvSpPr>
+            <a:spLocks noGrp="1"/>
+          </p:cNvSpPr>
+          <p:nvPr>
+            <p:ph type="body" idx="3" sz="quarter"/>
+          </p:nvPr>
+        </p:nvSpPr>
+        <p:spPr/>
+        <p:txBody>
+          <a:bodyPr/>
+          <a:lstStyle/>
+          <a:p>
+            <a:r>
+              <a:t>Core message: 11. Azure Government considerations.</a:t>
+            </a:r>
+          </a:p>
+          <a:p>
+            <a:r>
+              <a:t>Talking points to expand: Talking points, learner value, and lab connection Talking points • Tenant restrictions • Gateways and network • App audiences Why it helps • Deployment pipelines • Cloud connections Lab connection Coverage: Covered. Use the lab README to demonstrate or discuss this topic. Review terms: considerations, restrictions. 13</a:t>
+            </a:r>
+          </a:p>
+          <a:p>
+            <a:r>
+              <a:t>Why it matters: Frame this module as moving from a working desktop file to governed content users can trust in the Service.</a:t>
+            </a:r>
+          </a:p>
+          <a:p>
+            <a:r>
+              <a:t>How it helps users: connect the technical pattern to clearer decisions, fewer confusing report interactions, better trust in results, or easier support.</a:t>
+            </a:r>
+          </a:p>
+          <a:p>
+            <a:r>
+              <a:t>How it builds on prior lessons: reference the previous layer in the workshop, such as prepared data, a clean model, tested measures, or report UX conventions.</a:t>
+            </a:r>
+          </a:p>
+          <a:p>
+            <a:r>
+              <a:t>Lab connection: Show where this concept appears in the module lab. If the lab path is conceptual or Verify for Gov, explain what learners should document instead of building hands-on.</a:t>
+            </a:r>
+          </a:p>
+          <a:p>
+            <a:r>
+              <a:t>Instructor prompt: Ask one learner to describe the risk of skipping this pattern or using it without validation.</a:t>
+            </a:r>
+          </a:p>
+          <a:p>
+            <a:r>
+              <a:t>Further learning: Publish from Desktop: https://learn.microsoft.com/power-bi/create-reports/desktop-upload-desktop-files | Power BI Apps: https://learn.microsoft.com/power-bi/collaborate-share/service-create-distribute-apps | Deployment pipelines: https://learn.microsoft.com/power-bi/create-reports/deployment-pipelines-overview</a:t>
+            </a:r>
+          </a:p>
+        </p:txBody>
+      </p:sp>
+      <p:sp>
+        <p:nvSpPr>
+          <p:cNvPr id="4" name="Slide Number Placeholder 3"/>
+          <p:cNvSpPr>
+            <a:spLocks noGrp="1"/>
+          </p:cNvSpPr>
+          <p:nvPr>
+            <p:ph type="sldNum" idx="5" sz="quarter"/>
+          </p:nvPr>
+        </p:nvSpPr>
+        <p:spPr/>
+      </p:sp>
+    </p:spTree>
+  </p:cSld>
+  <p:clrMapOvr>
+    <a:masterClrMapping/>
+  </p:clrMapOvr>
+</p:notes>
+</file>
+
+<file path=ppt/notesSlides/notesSlide14.xml><?xml version="1.0" encoding="utf-8"?>
+<p:notes xmlns:a="http://schemas.openxmlformats.org/drawingml/2006/main" xmlns:p="http://schemas.openxmlformats.org/presentationml/2006/main" xmlns:r="http://schemas.openxmlformats.org/officeDocument/2006/relationships">
+  <p:cSld>
+    <p:spTree>
+      <p:nvGrpSpPr>
+        <p:cNvPr id="1" name=""/>
+        <p:cNvGrpSpPr/>
+        <p:nvPr/>
+      </p:nvGrpSpPr>
+      <p:grpSpPr>
+        <a:xfrm>
+          <a:off x="0" y="0"/>
+          <a:ext cx="0" cy="0"/>
+          <a:chOff x="0" y="0"/>
+          <a:chExt cx="0" cy="0"/>
+        </a:xfrm>
+      </p:grpSpPr>
+      <p:sp>
+        <p:nvSpPr>
+          <p:cNvPr id="2" name="Slide Image Placeholder 1"/>
+          <p:cNvSpPr>
+            <a:spLocks noGrp="1"/>
+          </p:cNvSpPr>
+          <p:nvPr>
+            <p:ph type="sldImg" idx="2"/>
+          </p:nvPr>
+        </p:nvSpPr>
+        <p:spPr/>
+      </p:sp>
+      <p:sp>
+        <p:nvSpPr>
+          <p:cNvPr id="3" name="Notes Placeholder 2"/>
+          <p:cNvSpPr>
+            <a:spLocks noGrp="1"/>
+          </p:cNvSpPr>
+          <p:nvPr>
+            <p:ph type="body" idx="3" sz="quarter"/>
+          </p:nvPr>
+        </p:nvSpPr>
+        <p:spPr/>
+        <p:txBody>
+          <a:bodyPr/>
+          <a:lstStyle/>
+          <a:p>
+            <a:r>
+              <a:t>Speaker guidance: Treat this as a checkpoint. Ask learners to explain the pattern in their own words and identify where they would use it in a real report.</a:t>
+            </a:r>
+          </a:p>
+          <a:p>
+            <a:r>
+              <a:t>Validation prompt: What would prove this worked? Look for a simple visual, expected filter behavior, or a documented before/after result.</a:t>
+            </a:r>
+          </a:p>
+          <a:p>
+            <a:r>
+              <a:t>Further learning: Publish from Desktop: https://learn.microsoft.com/power-bi/create-reports/desktop-upload-desktop-files | Power BI Apps: https://learn.microsoft.com/power-bi/collaborate-share/service-create-distribute-apps | Deployment pipelines: https://learn.microsoft.com/power-bi/create-reports/deployment-pipelines-overview</a:t>
+            </a:r>
+          </a:p>
+        </p:txBody>
+      </p:sp>
+      <p:sp>
+        <p:nvSpPr>
+          <p:cNvPr id="4" name="Slide Number Placeholder 3"/>
+          <p:cNvSpPr>
+            <a:spLocks noGrp="1"/>
+          </p:cNvSpPr>
+          <p:nvPr>
+            <p:ph type="sldNum" idx="5" sz="quarter"/>
+          </p:nvPr>
+        </p:nvSpPr>
+        <p:spPr/>
+      </p:sp>
+    </p:spTree>
+  </p:cSld>
+  <p:clrMapOvr>
+    <a:masterClrMapping/>
+  </p:clrMapOvr>
+</p:notes>
+</file>
+
+<file path=ppt/notesSlides/notesSlide15.xml><?xml version="1.0" encoding="utf-8"?>
+<p:notes xmlns:a="http://schemas.openxmlformats.org/drawingml/2006/main" xmlns:p="http://schemas.openxmlformats.org/presentationml/2006/main" xmlns:r="http://schemas.openxmlformats.org/officeDocument/2006/relationships">
+  <p:cSld>
+    <p:spTree>
+      <p:nvGrpSpPr>
+        <p:cNvPr id="1" name=""/>
+        <p:cNvGrpSpPr/>
+        <p:nvPr/>
+      </p:nvGrpSpPr>
+      <p:grpSpPr>
+        <a:xfrm>
+          <a:off x="0" y="0"/>
+          <a:ext cx="0" cy="0"/>
+          <a:chOff x="0" y="0"/>
+          <a:chExt cx="0" cy="0"/>
+        </a:xfrm>
+      </p:grpSpPr>
+      <p:sp>
+        <p:nvSpPr>
+          <p:cNvPr id="2" name="Slide Image Placeholder 1"/>
+          <p:cNvSpPr>
+            <a:spLocks noGrp="1"/>
+          </p:cNvSpPr>
+          <p:nvPr>
+            <p:ph type="sldImg" idx="2"/>
+          </p:nvPr>
+        </p:nvSpPr>
+        <p:spPr/>
+      </p:sp>
+      <p:sp>
+        <p:nvSpPr>
+          <p:cNvPr id="3" name="Notes Placeholder 2"/>
+          <p:cNvSpPr>
+            <a:spLocks noGrp="1"/>
+          </p:cNvSpPr>
+          <p:nvPr>
+            <p:ph type="body" idx="3" sz="quarter"/>
+          </p:nvPr>
+        </p:nvSpPr>
+        <p:spPr/>
+        <p:txBody>
+          <a:bodyPr/>
+          <a:lstStyle/>
+          <a:p>
+            <a:r>
+              <a:t>Speaker guidance: Use this slide as the handoff for self-study. Do not read every link aloud. Point out which source is most relevant to the lab just completed and which source helps learners go deeper after class.</a:t>
+            </a:r>
+          </a:p>
+          <a:p>
+            <a:r>
+              <a:t>Suggested prompt: Ask learners to bookmark the source that best matches the skill they want to improve next.</a:t>
+            </a:r>
+          </a:p>
+          <a:p>
+            <a:r>
+              <a:t>Further learning: Publish from Desktop: https://learn.microsoft.com/power-bi/create-reports/desktop-upload-desktop-files | Power BI Apps: https://learn.microsoft.com/power-bi/collaborate-share/service-create-distribute-apps | Deployment pipelines: https://learn.microsoft.com/power-bi/create-reports/deployment-pipelines-overview</a:t>
+            </a:r>
+          </a:p>
+        </p:txBody>
+      </p:sp>
+      <p:sp>
+        <p:nvSpPr>
+          <p:cNvPr id="4" name="Slide Number Placeholder 3"/>
+          <p:cNvSpPr>
+            <a:spLocks noGrp="1"/>
+          </p:cNvSpPr>
+          <p:nvPr>
+            <p:ph type="sldNum" idx="5" sz="quarter"/>
+          </p:nvPr>
+        </p:nvSpPr>
+        <p:spPr/>
+      </p:sp>
+    </p:spTree>
+  </p:cSld>
+  <p:clrMapOvr>
+    <a:masterClrMapping/>
+  </p:clrMapOvr>
+</p:notes>
+</file>
+
+<file path=ppt/notesSlides/notesSlide2.xml><?xml version="1.0" encoding="utf-8"?>
+<p:notes xmlns:a="http://schemas.openxmlformats.org/drawingml/2006/main" xmlns:p="http://schemas.openxmlformats.org/presentationml/2006/main" xmlns:r="http://schemas.openxmlformats.org/officeDocument/2006/relationships">
+  <p:cSld>
+    <p:spTree>
+      <p:nvGrpSpPr>
+        <p:cNvPr id="1" name=""/>
+        <p:cNvGrpSpPr/>
+        <p:nvPr/>
+      </p:nvGrpSpPr>
+      <p:grpSpPr>
+        <a:xfrm>
+          <a:off x="0" y="0"/>
+          <a:ext cx="0" cy="0"/>
+          <a:chOff x="0" y="0"/>
+          <a:chExt cx="0" cy="0"/>
+        </a:xfrm>
+      </p:grpSpPr>
+      <p:sp>
+        <p:nvSpPr>
+          <p:cNvPr id="2" name="Slide Image Placeholder 1"/>
+          <p:cNvSpPr>
+            <a:spLocks noGrp="1"/>
+          </p:cNvSpPr>
+          <p:nvPr>
+            <p:ph type="sldImg" idx="2"/>
+          </p:nvPr>
+        </p:nvSpPr>
+        <p:spPr/>
+      </p:sp>
+      <p:sp>
+        <p:nvSpPr>
+          <p:cNvPr id="3" name="Notes Placeholder 2"/>
+          <p:cNvSpPr>
+            <a:spLocks noGrp="1"/>
+          </p:cNvSpPr>
+          <p:nvPr>
+            <p:ph type="body" idx="3" sz="quarter"/>
+          </p:nvPr>
+        </p:nvSpPr>
+        <p:spPr/>
+        <p:txBody>
+          <a:bodyPr/>
+          <a:lstStyle/>
+          <a:p>
+            <a:r>
+              <a:t>Speaker guidance: Emphasize sequence and dependency. Explain what students should already know from prior modules and what this module adds on top.</a:t>
+            </a:r>
+          </a:p>
+          <a:p>
+            <a:r>
+              <a:t>Module framing: Frame this module as moving from a working desktop file to governed content users can trust in the Service.</a:t>
+            </a:r>
+          </a:p>
+          <a:p>
+            <a:r>
+              <a:t>Transition: After this slide, move from the concept map into the specific pattern or lab activity.</a:t>
+            </a:r>
+          </a:p>
+          <a:p>
+            <a:r>
+              <a:t>Further learning: Publish from Desktop: https://learn.microsoft.com/power-bi/create-reports/desktop-upload-desktop-files | Power BI Apps: https://learn.microsoft.com/power-bi/collaborate-share/service-create-distribute-apps | Deployment pipelines: https://learn.microsoft.com/power-bi/create-reports/deployment-pipelines-overview</a:t>
+            </a:r>
+          </a:p>
+        </p:txBody>
+      </p:sp>
+      <p:sp>
+        <p:nvSpPr>
+          <p:cNvPr id="4" name="Slide Number Placeholder 3"/>
+          <p:cNvSpPr>
+            <a:spLocks noGrp="1"/>
+          </p:cNvSpPr>
+          <p:nvPr>
+            <p:ph type="sldNum" idx="5" sz="quarter"/>
+          </p:nvPr>
+        </p:nvSpPr>
+        <p:spPr/>
+      </p:sp>
+    </p:spTree>
+  </p:cSld>
+  <p:clrMapOvr>
+    <a:masterClrMapping/>
+  </p:clrMapOvr>
+</p:notes>
+</file>
+
+<file path=ppt/notesSlides/notesSlide3.xml><?xml version="1.0" encoding="utf-8"?>
+<p:notes xmlns:a="http://schemas.openxmlformats.org/drawingml/2006/main" xmlns:p="http://schemas.openxmlformats.org/presentationml/2006/main" xmlns:r="http://schemas.openxmlformats.org/officeDocument/2006/relationships">
+  <p:cSld>
+    <p:spTree>
+      <p:nvGrpSpPr>
+        <p:cNvPr id="1" name=""/>
+        <p:cNvGrpSpPr/>
+        <p:nvPr/>
+      </p:nvGrpSpPr>
+      <p:grpSpPr>
+        <a:xfrm>
+          <a:off x="0" y="0"/>
+          <a:ext cx="0" cy="0"/>
+          <a:chOff x="0" y="0"/>
+          <a:chExt cx="0" cy="0"/>
+        </a:xfrm>
+      </p:grpSpPr>
+      <p:sp>
+        <p:nvSpPr>
+          <p:cNvPr id="2" name="Slide Image Placeholder 1"/>
+          <p:cNvSpPr>
+            <a:spLocks noGrp="1"/>
+          </p:cNvSpPr>
+          <p:nvPr>
+            <p:ph type="sldImg" idx="2"/>
+          </p:nvPr>
+        </p:nvSpPr>
+        <p:spPr/>
+      </p:sp>
+      <p:sp>
+        <p:nvSpPr>
+          <p:cNvPr id="3" name="Notes Placeholder 2"/>
+          <p:cNvSpPr>
+            <a:spLocks noGrp="1"/>
+          </p:cNvSpPr>
+          <p:nvPr>
+            <p:ph type="body" idx="3" sz="quarter"/>
+          </p:nvPr>
+        </p:nvSpPr>
+        <p:spPr/>
+        <p:txBody>
+          <a:bodyPr/>
+          <a:lstStyle/>
+          <a:p>
+            <a:r>
+              <a:t>Core message: 1. From authoring to enterprise deployment.</a:t>
+            </a:r>
+          </a:p>
+          <a:p>
+            <a:r>
+              <a:t>Talking points to expand: Talking points, learner value, and lab connection Talking points • PBIP source of record • Publishing targets Why it helps • Ownership • Supportability Lab connection Coverage: Covered. Use the lab README to demonstrate or discuss this topic. Review terms: authoring, supportability, targets. 03</a:t>
+            </a:r>
+          </a:p>
+          <a:p>
+            <a:r>
+              <a:t>Why it matters: Frame this module as moving from a working desktop file to governed content users can trust in the Service.</a:t>
+            </a:r>
+          </a:p>
+          <a:p>
+            <a:r>
+              <a:t>How it helps users: connect the technical pattern to clearer decisions, fewer confusing report interactions, better trust in results, or easier support.</a:t>
+            </a:r>
+          </a:p>
+          <a:p>
+            <a:r>
+              <a:t>How it builds on prior lessons: reference the previous layer in the workshop, such as prepared data, a clean model, tested measures, or report UX conventions.</a:t>
+            </a:r>
+          </a:p>
+          <a:p>
+            <a:r>
+              <a:t>Lab connection: Show where this concept appears in the module lab. If the lab path is conceptual or Verify for Gov, explain what learners should document instead of building hands-on.</a:t>
+            </a:r>
+          </a:p>
+          <a:p>
+            <a:r>
+              <a:t>Instructor prompt: Ask one learner to describe the risk of skipping this pattern or using it without validation.</a:t>
+            </a:r>
+          </a:p>
+          <a:p>
+            <a:r>
+              <a:t>Further learning: Publish from Desktop: https://learn.microsoft.com/power-bi/create-reports/desktop-upload-desktop-files | Power BI Apps: https://learn.microsoft.com/power-bi/collaborate-share/service-create-distribute-apps | Deployment pipelines: https://learn.microsoft.com/power-bi/create-reports/deployment-pipelines-overview</a:t>
+            </a:r>
+          </a:p>
+        </p:txBody>
+      </p:sp>
+      <p:sp>
+        <p:nvSpPr>
+          <p:cNvPr id="4" name="Slide Number Placeholder 3"/>
+          <p:cNvSpPr>
+            <a:spLocks noGrp="1"/>
+          </p:cNvSpPr>
+          <p:nvPr>
+            <p:ph type="sldNum" idx="5" sz="quarter"/>
+          </p:nvPr>
+        </p:nvSpPr>
+        <p:spPr/>
+      </p:sp>
+    </p:spTree>
+  </p:cSld>
+  <p:clrMapOvr>
+    <a:masterClrMapping/>
+  </p:clrMapOvr>
+</p:notes>
+</file>
+
+<file path=ppt/notesSlides/notesSlide4.xml><?xml version="1.0" encoding="utf-8"?>
+<p:notes xmlns:a="http://schemas.openxmlformats.org/drawingml/2006/main" xmlns:p="http://schemas.openxmlformats.org/presentationml/2006/main" xmlns:r="http://schemas.openxmlformats.org/officeDocument/2006/relationships">
+  <p:cSld>
+    <p:spTree>
+      <p:nvGrpSpPr>
+        <p:cNvPr id="1" name=""/>
+        <p:cNvGrpSpPr/>
+        <p:nvPr/>
+      </p:nvGrpSpPr>
+      <p:grpSpPr>
+        <a:xfrm>
+          <a:off x="0" y="0"/>
+          <a:ext cx="0" cy="0"/>
+          <a:chOff x="0" y="0"/>
+          <a:chExt cx="0" cy="0"/>
+        </a:xfrm>
+      </p:grpSpPr>
+      <p:sp>
+        <p:nvSpPr>
+          <p:cNvPr id="2" name="Slide Image Placeholder 1"/>
+          <p:cNvSpPr>
+            <a:spLocks noGrp="1"/>
+          </p:cNvSpPr>
+          <p:nvPr>
+            <p:ph type="sldImg" idx="2"/>
+          </p:nvPr>
+        </p:nvSpPr>
+        <p:spPr/>
+      </p:sp>
+      <p:sp>
+        <p:nvSpPr>
+          <p:cNvPr id="3" name="Notes Placeholder 2"/>
+          <p:cNvSpPr>
+            <a:spLocks noGrp="1"/>
+          </p:cNvSpPr>
+          <p:nvPr>
+            <p:ph type="body" idx="3" sz="quarter"/>
+          </p:nvPr>
+        </p:nvSpPr>
+        <p:spPr/>
+        <p:txBody>
+          <a:bodyPr/>
+          <a:lstStyle/>
+          <a:p>
+            <a:r>
+              <a:t>Core message: 2. Workspace design.</a:t>
+            </a:r>
+          </a:p>
+          <a:p>
+            <a:r>
+              <a:t>Talking points to expand: Talking points, learner value, and lab connection Talking points • Development, test, production • Domain or subject-area workspaces Why it helps • Naming conventions • Ownership model Lab connection Coverage: Partial. Use the lab README to demonstrate or discuss this topic. Review terms: conventions, design, domain, naming, production. 04</a:t>
+            </a:r>
+          </a:p>
+          <a:p>
+            <a:r>
+              <a:t>Why it matters: Frame this module as moving from a working desktop file to governed content users can trust in the Service.</a:t>
+            </a:r>
+          </a:p>
+          <a:p>
+            <a:r>
+              <a:t>How it helps users: connect the technical pattern to clearer decisions, fewer confusing report interactions, better trust in results, or easier support.</a:t>
+            </a:r>
+          </a:p>
+          <a:p>
+            <a:r>
+              <a:t>How it builds on prior lessons: reference the previous layer in the workshop, such as prepared data, a clean model, tested measures, or report UX conventions.</a:t>
+            </a:r>
+          </a:p>
+          <a:p>
+            <a:r>
+              <a:t>Lab connection: Show where this concept appears in the module lab. If the lab path is conceptual or Verify for Gov, explain what learners should document instead of building hands-on.</a:t>
+            </a:r>
+          </a:p>
+          <a:p>
+            <a:r>
+              <a:t>Instructor prompt: Ask one learner to describe the risk of skipping this pattern or using it without validation.</a:t>
+            </a:r>
+          </a:p>
+          <a:p>
+            <a:r>
+              <a:t>Further learning: Publish from Desktop: https://learn.microsoft.com/power-bi/create-reports/desktop-upload-desktop-files | Power BI Apps: https://learn.microsoft.com/power-bi/collaborate-share/service-create-distribute-apps | Deployment pipelines: https://learn.microsoft.com/power-bi/create-reports/deployment-pipelines-overview</a:t>
+            </a:r>
+          </a:p>
+        </p:txBody>
+      </p:sp>
+      <p:sp>
+        <p:nvSpPr>
+          <p:cNvPr id="4" name="Slide Number Placeholder 3"/>
+          <p:cNvSpPr>
+            <a:spLocks noGrp="1"/>
+          </p:cNvSpPr>
+          <p:nvPr>
+            <p:ph type="sldNum" idx="5" sz="quarter"/>
+          </p:nvPr>
+        </p:nvSpPr>
+        <p:spPr/>
+      </p:sp>
+    </p:spTree>
+  </p:cSld>
+  <p:clrMapOvr>
+    <a:masterClrMapping/>
+  </p:clrMapOvr>
+</p:notes>
+</file>
+
+<file path=ppt/notesSlides/notesSlide5.xml><?xml version="1.0" encoding="utf-8"?>
+<p:notes xmlns:a="http://schemas.openxmlformats.org/drawingml/2006/main" xmlns:p="http://schemas.openxmlformats.org/presentationml/2006/main" xmlns:r="http://schemas.openxmlformats.org/officeDocument/2006/relationships">
+  <p:cSld>
+    <p:spTree>
+      <p:nvGrpSpPr>
+        <p:cNvPr id="1" name=""/>
+        <p:cNvGrpSpPr/>
+        <p:nvPr/>
+      </p:nvGrpSpPr>
+      <p:grpSpPr>
+        <a:xfrm>
+          <a:off x="0" y="0"/>
+          <a:ext cx="0" cy="0"/>
+          <a:chOff x="0" y="0"/>
+          <a:chExt cx="0" cy="0"/>
+        </a:xfrm>
+      </p:grpSpPr>
+      <p:sp>
+        <p:nvSpPr>
+          <p:cNvPr id="2" name="Slide Image Placeholder 1"/>
+          <p:cNvSpPr>
+            <a:spLocks noGrp="1"/>
+          </p:cNvSpPr>
+          <p:nvPr>
+            <p:ph type="sldImg" idx="2"/>
+          </p:nvPr>
+        </p:nvSpPr>
+        <p:spPr/>
+      </p:sp>
+      <p:sp>
+        <p:nvSpPr>
+          <p:cNvPr id="3" name="Notes Placeholder 2"/>
+          <p:cNvSpPr>
+            <a:spLocks noGrp="1"/>
+          </p:cNvSpPr>
+          <p:nvPr>
+            <p:ph type="body" idx="3" sz="quarter"/>
+          </p:nvPr>
+        </p:nvSpPr>
+        <p:spPr/>
+        <p:txBody>
+          <a:bodyPr/>
+          <a:lstStyle/>
+          <a:p>
+            <a:r>
+              <a:t>Core message: 3. Workspace roles.</a:t>
+            </a:r>
+          </a:p>
+          <a:p>
+            <a:r>
+              <a:t>Talking points to expand: Talking points, learner value, and lab connection Talking points • Admin • Member • Contributor Why it helps • Viewer • Security implications Lab connection Coverage: Partial. Use the lab README to demonstrate or discuss this topic. Review terms: admin, contributor, member, roles, viewer. 05</a:t>
+            </a:r>
+          </a:p>
+          <a:p>
+            <a:r>
+              <a:t>Why it matters: Frame this module as moving from a working desktop file to governed content users can trust in the Service.</a:t>
+            </a:r>
+          </a:p>
+          <a:p>
+            <a:r>
+              <a:t>How it helps users: connect the technical pattern to clearer decisions, fewer confusing report interactions, better trust in results, or easier support.</a:t>
+            </a:r>
+          </a:p>
+          <a:p>
+            <a:r>
+              <a:t>How it builds on prior lessons: reference the previous layer in the workshop, such as prepared data, a clean model, tested measures, or report UX conventions.</a:t>
+            </a:r>
+          </a:p>
+          <a:p>
+            <a:r>
+              <a:t>Lab connection: Show where this concept appears in the module lab. If the lab path is conceptual or Verify for Gov, explain what learners should document instead of building hands-on.</a:t>
+            </a:r>
+          </a:p>
+          <a:p>
+            <a:r>
+              <a:t>Instructor prompt: Ask one learner to describe the risk of skipping this pattern or using it without validation.</a:t>
+            </a:r>
+          </a:p>
+          <a:p>
+            <a:r>
+              <a:t>Further learning: Publish from Desktop: https://learn.microsoft.com/power-bi/create-reports/desktop-upload-desktop-files | Power BI Apps: https://learn.microsoft.com/power-bi/collaborate-share/service-create-distribute-apps | Deployment pipelines: https://learn.microsoft.com/power-bi/create-reports/deployment-pipelines-overview</a:t>
+            </a:r>
+          </a:p>
+        </p:txBody>
+      </p:sp>
+      <p:sp>
+        <p:nvSpPr>
+          <p:cNvPr id="4" name="Slide Number Placeholder 3"/>
+          <p:cNvSpPr>
+            <a:spLocks noGrp="1"/>
+          </p:cNvSpPr>
+          <p:nvPr>
+            <p:ph type="sldNum" idx="5" sz="quarter"/>
+          </p:nvPr>
+        </p:nvSpPr>
+        <p:spPr/>
+      </p:sp>
+    </p:spTree>
+  </p:cSld>
+  <p:clrMapOvr>
+    <a:masterClrMapping/>
+  </p:clrMapOvr>
+</p:notes>
+</file>
+
+<file path=ppt/notesSlides/notesSlide6.xml><?xml version="1.0" encoding="utf-8"?>
+<p:notes xmlns:a="http://schemas.openxmlformats.org/drawingml/2006/main" xmlns:p="http://schemas.openxmlformats.org/presentationml/2006/main" xmlns:r="http://schemas.openxmlformats.org/officeDocument/2006/relationships">
+  <p:cSld>
+    <p:spTree>
+      <p:nvGrpSpPr>
+        <p:cNvPr id="1" name=""/>
+        <p:cNvGrpSpPr/>
+        <p:nvPr/>
+      </p:nvGrpSpPr>
+      <p:grpSpPr>
+        <a:xfrm>
+          <a:off x="0" y="0"/>
+          <a:ext cx="0" cy="0"/>
+          <a:chOff x="0" y="0"/>
+          <a:chExt cx="0" cy="0"/>
+        </a:xfrm>
+      </p:grpSpPr>
+      <p:sp>
+        <p:nvSpPr>
+          <p:cNvPr id="2" name="Slide Image Placeholder 1"/>
+          <p:cNvSpPr>
+            <a:spLocks noGrp="1"/>
+          </p:cNvSpPr>
+          <p:nvPr>
+            <p:ph type="sldImg" idx="2"/>
+          </p:nvPr>
+        </p:nvSpPr>
+        <p:spPr/>
+      </p:sp>
+      <p:sp>
+        <p:nvSpPr>
+          <p:cNvPr id="3" name="Notes Placeholder 2"/>
+          <p:cNvSpPr>
+            <a:spLocks noGrp="1"/>
+          </p:cNvSpPr>
+          <p:nvPr>
+            <p:ph type="body" idx="3" sz="quarter"/>
+          </p:nvPr>
+        </p:nvSpPr>
+        <p:spPr/>
+        <p:txBody>
+          <a:bodyPr/>
+          <a:lstStyle/>
+          <a:p>
+            <a:r>
+              <a:t>Core message: 4. Publishing content.</a:t>
+            </a:r>
+          </a:p>
+          <a:p>
+            <a:r>
+              <a:t>Talking points to expand: Talking points, learner value, and lab connection Talking points • Reports • Semantic models Why it helps • PBIP-originated artifacts • Ownership and takeover Lab connection Coverage: Covered. Use the lab README to demonstrate or discuss this topic. Review terms: originated, takeover. 06</a:t>
+            </a:r>
+          </a:p>
+          <a:p>
+            <a:r>
+              <a:t>Why it matters: Frame this module as moving from a working desktop file to governed content users can trust in the Service.</a:t>
+            </a:r>
+          </a:p>
+          <a:p>
+            <a:r>
+              <a:t>How it helps users: connect the technical pattern to clearer decisions, fewer confusing report interactions, better trust in results, or easier support.</a:t>
+            </a:r>
+          </a:p>
+          <a:p>
+            <a:r>
+              <a:t>How it builds on prior lessons: reference the previous layer in the workshop, such as prepared data, a clean model, tested measures, or report UX conventions.</a:t>
+            </a:r>
+          </a:p>
+          <a:p>
+            <a:r>
+              <a:t>Lab connection: Show where this concept appears in the module lab. If the lab path is conceptual or Verify for Gov, explain what learners should document instead of building hands-on.</a:t>
+            </a:r>
+          </a:p>
+          <a:p>
+            <a:r>
+              <a:t>Instructor prompt: Ask one learner to describe the risk of skipping this pattern or using it without validation.</a:t>
+            </a:r>
+          </a:p>
+          <a:p>
+            <a:r>
+              <a:t>Further learning: Publish from Desktop: https://learn.microsoft.com/power-bi/create-reports/desktop-upload-desktop-files | Power BI Apps: https://learn.microsoft.com/power-bi/collaborate-share/service-create-distribute-apps | Deployment pipelines: https://learn.microsoft.com/power-bi/create-reports/deployment-pipelines-overview</a:t>
+            </a:r>
+          </a:p>
+        </p:txBody>
+      </p:sp>
+      <p:sp>
+        <p:nvSpPr>
+          <p:cNvPr id="4" name="Slide Number Placeholder 3"/>
+          <p:cNvSpPr>
+            <a:spLocks noGrp="1"/>
+          </p:cNvSpPr>
+          <p:nvPr>
+            <p:ph type="sldNum" idx="5" sz="quarter"/>
+          </p:nvPr>
+        </p:nvSpPr>
+        <p:spPr/>
+      </p:sp>
+    </p:spTree>
+  </p:cSld>
+  <p:clrMapOvr>
+    <a:masterClrMapping/>
+  </p:clrMapOvr>
+</p:notes>
+</file>
+
+<file path=ppt/notesSlides/notesSlide7.xml><?xml version="1.0" encoding="utf-8"?>
+<p:notes xmlns:a="http://schemas.openxmlformats.org/drawingml/2006/main" xmlns:p="http://schemas.openxmlformats.org/presentationml/2006/main" xmlns:r="http://schemas.openxmlformats.org/officeDocument/2006/relationships">
+  <p:cSld>
+    <p:spTree>
+      <p:nvGrpSpPr>
+        <p:cNvPr id="1" name=""/>
+        <p:cNvGrpSpPr/>
+        <p:nvPr/>
+      </p:nvGrpSpPr>
+      <p:grpSpPr>
+        <a:xfrm>
+          <a:off x="0" y="0"/>
+          <a:ext cx="0" cy="0"/>
+          <a:chOff x="0" y="0"/>
+          <a:chExt cx="0" cy="0"/>
+        </a:xfrm>
+      </p:grpSpPr>
+      <p:sp>
+        <p:nvSpPr>
+          <p:cNvPr id="2" name="Slide Image Placeholder 1"/>
+          <p:cNvSpPr>
+            <a:spLocks noGrp="1"/>
+          </p:cNvSpPr>
+          <p:nvPr>
+            <p:ph type="sldImg" idx="2"/>
+          </p:nvPr>
+        </p:nvSpPr>
+        <p:spPr/>
+      </p:sp>
+      <p:sp>
+        <p:nvSpPr>
+          <p:cNvPr id="3" name="Notes Placeholder 2"/>
+          <p:cNvSpPr>
+            <a:spLocks noGrp="1"/>
+          </p:cNvSpPr>
+          <p:nvPr>
+            <p:ph type="body" idx="3" sz="quarter"/>
+          </p:nvPr>
+        </p:nvSpPr>
+        <p:spPr/>
+        <p:txBody>
+          <a:bodyPr/>
+          <a:lstStyle/>
+          <a:p>
+            <a:r>
+              <a:t>Core message: 5. Refresh configuration.</a:t>
+            </a:r>
+          </a:p>
+          <a:p>
+            <a:r>
+              <a:t>Talking points to expand: Talking points, learner value, and lab connection Talking points • Scheduled refresh • Credentials • Privacy levels Why it helps • Refresh history • Troubleshooting Lab connection Coverage: Covered. Use the lab README to demonstrate or discuss this topic. Review terms: levels, privacy. 07</a:t>
+            </a:r>
+          </a:p>
+          <a:p>
+            <a:r>
+              <a:t>Why it matters: Frame this module as moving from a working desktop file to governed content users can trust in the Service.</a:t>
+            </a:r>
+          </a:p>
+          <a:p>
+            <a:r>
+              <a:t>How it helps users: connect the technical pattern to clearer decisions, fewer confusing report interactions, better trust in results, or easier support.</a:t>
+            </a:r>
+          </a:p>
+          <a:p>
+            <a:r>
+              <a:t>How it builds on prior lessons: reference the previous layer in the workshop, such as prepared data, a clean model, tested measures, or report UX conventions.</a:t>
+            </a:r>
+          </a:p>
+          <a:p>
+            <a:r>
+              <a:t>Lab connection: Show where this concept appears in the module lab. If the lab path is conceptual or Verify for Gov, explain what learners should document instead of building hands-on.</a:t>
+            </a:r>
+          </a:p>
+          <a:p>
+            <a:r>
+              <a:t>Instructor prompt: Ask one learner to describe the risk of skipping this pattern or using it without validation.</a:t>
+            </a:r>
+          </a:p>
+          <a:p>
+            <a:r>
+              <a:t>Further learning: Publish from Desktop: https://learn.microsoft.com/power-bi/create-reports/desktop-upload-desktop-files | Power BI Apps: https://learn.microsoft.com/power-bi/collaborate-share/service-create-distribute-apps | Deployment pipelines: https://learn.microsoft.com/power-bi/create-reports/deployment-pipelines-overview</a:t>
+            </a:r>
+          </a:p>
+        </p:txBody>
+      </p:sp>
+      <p:sp>
+        <p:nvSpPr>
+          <p:cNvPr id="4" name="Slide Number Placeholder 3"/>
+          <p:cNvSpPr>
+            <a:spLocks noGrp="1"/>
+          </p:cNvSpPr>
+          <p:nvPr>
+            <p:ph type="sldNum" idx="5" sz="quarter"/>
+          </p:nvPr>
+        </p:nvSpPr>
+        <p:spPr/>
+      </p:sp>
+    </p:spTree>
+  </p:cSld>
+  <p:clrMapOvr>
+    <a:masterClrMapping/>
+  </p:clrMapOvr>
+</p:notes>
+</file>
+
+<file path=ppt/notesSlides/notesSlide8.xml><?xml version="1.0" encoding="utf-8"?>
+<p:notes xmlns:a="http://schemas.openxmlformats.org/drawingml/2006/main" xmlns:p="http://schemas.openxmlformats.org/presentationml/2006/main" xmlns:r="http://schemas.openxmlformats.org/officeDocument/2006/relationships">
+  <p:cSld>
+    <p:spTree>
+      <p:nvGrpSpPr>
+        <p:cNvPr id="1" name=""/>
+        <p:cNvGrpSpPr/>
+        <p:nvPr/>
+      </p:nvGrpSpPr>
+      <p:grpSpPr>
+        <a:xfrm>
+          <a:off x="0" y="0"/>
+          <a:ext cx="0" cy="0"/>
+          <a:chOff x="0" y="0"/>
+          <a:chExt cx="0" cy="0"/>
+        </a:xfrm>
+      </p:grpSpPr>
+      <p:sp>
+        <p:nvSpPr>
+          <p:cNvPr id="2" name="Slide Image Placeholder 1"/>
+          <p:cNvSpPr>
+            <a:spLocks noGrp="1"/>
+          </p:cNvSpPr>
+          <p:nvPr>
+            <p:ph type="sldImg" idx="2"/>
+          </p:nvPr>
+        </p:nvSpPr>
+        <p:spPr/>
+      </p:sp>
+      <p:sp>
+        <p:nvSpPr>
+          <p:cNvPr id="3" name="Notes Placeholder 2"/>
+          <p:cNvSpPr>
+            <a:spLocks noGrp="1"/>
+          </p:cNvSpPr>
+          <p:nvPr>
+            <p:ph type="body" idx="3" sz="quarter"/>
+          </p:nvPr>
+        </p:nvSpPr>
+        <p:spPr/>
+        <p:txBody>
+          <a:bodyPr/>
+          <a:lstStyle/>
+          <a:p>
+            <a:r>
+              <a:t>Core message: 6. Gateways and cloud connections.</a:t>
+            </a:r>
+          </a:p>
+          <a:p>
+            <a:r>
+              <a:t>Talking points to expand: Talking points, learner value, and lab connection Talking points • On-premises data gateway • Gateway clusters • Data source mappings Why it helps • Cloud connections • Gov validation Lab connection Coverage: Covered. Use the lab README to demonstrate or discuss this topic. Review terms: clusters, mappings, premises. 08</a:t>
+            </a:r>
+          </a:p>
+          <a:p>
+            <a:r>
+              <a:t>Why it matters: Frame this module as moving from a working desktop file to governed content users can trust in the Service.</a:t>
+            </a:r>
+          </a:p>
+          <a:p>
+            <a:r>
+              <a:t>How it helps users: connect the technical pattern to clearer decisions, fewer confusing report interactions, better trust in results, or easier support.</a:t>
+            </a:r>
+          </a:p>
+          <a:p>
+            <a:r>
+              <a:t>How it builds on prior lessons: reference the previous layer in the workshop, such as prepared data, a clean model, tested measures, or report UX conventions.</a:t>
+            </a:r>
+          </a:p>
+          <a:p>
+            <a:r>
+              <a:t>Lab connection: Show where this concept appears in the module lab. If the lab path is conceptual or Verify for Gov, explain what learners should document instead of building hands-on.</a:t>
+            </a:r>
+          </a:p>
+          <a:p>
+            <a:r>
+              <a:t>Instructor prompt: Ask one learner to describe the risk of skipping this pattern or using it without validation.</a:t>
+            </a:r>
+          </a:p>
+          <a:p>
+            <a:r>
+              <a:t>Further learning: Publish from Desktop: https://learn.microsoft.com/power-bi/create-reports/desktop-upload-desktop-files | Power BI Apps: https://learn.microsoft.com/power-bi/collaborate-share/service-create-distribute-apps | Deployment pipelines: https://learn.microsoft.com/power-bi/create-reports/deployment-pipelines-overview</a:t>
+            </a:r>
+          </a:p>
+        </p:txBody>
+      </p:sp>
+      <p:sp>
+        <p:nvSpPr>
+          <p:cNvPr id="4" name="Slide Number Placeholder 3"/>
+          <p:cNvSpPr>
+            <a:spLocks noGrp="1"/>
+          </p:cNvSpPr>
+          <p:nvPr>
+            <p:ph type="sldNum" idx="5" sz="quarter"/>
+          </p:nvPr>
+        </p:nvSpPr>
+        <p:spPr/>
+      </p:sp>
+    </p:spTree>
+  </p:cSld>
+  <p:clrMapOvr>
+    <a:masterClrMapping/>
+  </p:clrMapOvr>
+</p:notes>
+</file>
+
+<file path=ppt/notesSlides/notesSlide9.xml><?xml version="1.0" encoding="utf-8"?>
+<p:notes xmlns:a="http://schemas.openxmlformats.org/drawingml/2006/main" xmlns:p="http://schemas.openxmlformats.org/presentationml/2006/main" xmlns:r="http://schemas.openxmlformats.org/officeDocument/2006/relationships">
+  <p:cSld>
+    <p:spTree>
+      <p:nvGrpSpPr>
+        <p:cNvPr id="1" name=""/>
+        <p:cNvGrpSpPr/>
+        <p:nvPr/>
+      </p:nvGrpSpPr>
+      <p:grpSpPr>
+        <a:xfrm>
+          <a:off x="0" y="0"/>
+          <a:ext cx="0" cy="0"/>
+          <a:chOff x="0" y="0"/>
+          <a:chExt cx="0" cy="0"/>
+        </a:xfrm>
+      </p:grpSpPr>
+      <p:sp>
+        <p:nvSpPr>
+          <p:cNvPr id="2" name="Slide Image Placeholder 1"/>
+          <p:cNvSpPr>
+            <a:spLocks noGrp="1"/>
+          </p:cNvSpPr>
+          <p:nvPr>
+            <p:ph type="sldImg" idx="2"/>
+          </p:nvPr>
+        </p:nvSpPr>
+        <p:spPr/>
+      </p:sp>
+      <p:sp>
+        <p:nvSpPr>
+          <p:cNvPr id="3" name="Notes Placeholder 2"/>
+          <p:cNvSpPr>
+            <a:spLocks noGrp="1"/>
+          </p:cNvSpPr>
+          <p:nvPr>
+            <p:ph type="body" idx="3" sz="quarter"/>
+          </p:nvPr>
+        </p:nvSpPr>
+        <p:spPr/>
+        <p:txBody>
+          <a:bodyPr/>
+          <a:lstStyle/>
+          <a:p>
+            <a:r>
+              <a:t>Core message: 7. Shared semantic models and thin reports.</a:t>
+            </a:r>
+          </a:p>
+          <a:p>
+            <a:r>
+              <a:t>Talking points to expand: Talking points, learner value, and lab connection Talking points • Reuse pattern • Build permission Why it helps • Certified semantic models • Impact analysis Lab connection Coverage: Covered. Use the lab README to demonstrate or discuss this topic. Review terms: analysis, impact, pattern. 09</a:t>
+            </a:r>
+          </a:p>
+          <a:p>
+            <a:r>
+              <a:t>Why it matters: Frame this module as moving from a working desktop file to governed content users can trust in the Service.</a:t>
+            </a:r>
+          </a:p>
+          <a:p>
+            <a:r>
+              <a:t>How it helps users: connect the technical pattern to clearer decisions, fewer confusing report interactions, better trust in results, or easier support.</a:t>
+            </a:r>
+          </a:p>
+          <a:p>
+            <a:r>
+              <a:t>How it builds on prior lessons: reference the previous layer in the workshop, such as prepared data, a clean model, tested measures, or report UX conventions.</a:t>
+            </a:r>
+          </a:p>
+          <a:p>
+            <a:r>
+              <a:t>Lab connection: Show where this concept appears in the module lab. If the lab path is conceptual or Verify for Gov, explain what learners should document instead of building hands-on.</a:t>
+            </a:r>
+          </a:p>
+          <a:p>
+            <a:r>
+              <a:t>Instructor prompt: Ask one learner to describe the risk of skipping this pattern or using it without validation.</a:t>
+            </a:r>
+          </a:p>
+          <a:p>
+            <a:r>
+              <a:t>Further learning: Publish from Desktop: https://learn.microsoft.com/power-bi/create-reports/desktop-upload-desktop-files | Power BI Apps: https://learn.microsoft.com/power-bi/collaborate-share/service-create-distribute-apps | Deployment pipelines: https://learn.microsoft.com/power-bi/create-reports/deployment-pipelines-overview</a:t>
+            </a:r>
+          </a:p>
+        </p:txBody>
+      </p:sp>
+      <p:sp>
+        <p:nvSpPr>
+          <p:cNvPr id="4" name="Slide Number Placeholder 3"/>
+          <p:cNvSpPr>
+            <a:spLocks noGrp="1"/>
+          </p:cNvSpPr>
+          <p:nvPr>
+            <p:ph type="sldNum" idx="5" sz="quarter"/>
+          </p:nvPr>
+        </p:nvSpPr>
+        <p:spPr/>
+      </p:sp>
+    </p:spTree>
+  </p:cSld>
+  <p:clrMapOvr>
+    <a:masterClrMapping/>
+  </p:clrMapOvr>
+</p:notes>
 </file>
 
 <file path=ppt/slideLayouts/slideLayout1.xml><?xml version="1.0" encoding="utf-8"?>
@@ -13287,4 +15122,324 @@
   </a:objectDefaults>
   <a:extraClrSchemeLst/>
 </a:theme>
+</file>
+
+<file path=ppt/theme/theme2.xml><?xml version="1.0" encoding="utf-8"?>
+<a:theme xmlns:a="http://schemas.openxmlformats.org/drawingml/2006/main" name="Office Theme">
+  <a:themeElements>
+    <a:clrScheme name="Office">
+      <a:dk1>
+        <a:sysClr val="windowText" lastClr="000000"/>
+      </a:dk1>
+      <a:lt1>
+        <a:sysClr val="window" lastClr="FFFFFF"/>
+      </a:lt1>
+      <a:dk2>
+        <a:srgbClr val="1F497D"/>
+      </a:dk2>
+      <a:lt2>
+        <a:srgbClr val="EEECE1"/>
+      </a:lt2>
+      <a:accent1>
+        <a:srgbClr val="4F81BD"/>
+      </a:accent1>
+      <a:accent2>
+        <a:srgbClr val="C0504D"/>
+      </a:accent2>
+      <a:accent3>
+        <a:srgbClr val="9BBB59"/>
+      </a:accent3>
+      <a:accent4>
+        <a:srgbClr val="8064A2"/>
+      </a:accent4>
+      <a:accent5>
+        <a:srgbClr val="4BACC6"/>
+      </a:accent5>
+      <a:accent6>
+        <a:srgbClr val="F79646"/>
+      </a:accent6>
+      <a:hlink>
+        <a:srgbClr val="0000FF"/>
+      </a:hlink>
+      <a:folHlink>
+        <a:srgbClr val="800080"/>
+      </a:folHlink>
+    </a:clrScheme>
+    <a:fontScheme name="Office">
+      <a:majorFont>
+        <a:latin typeface="Calibri"/>
+        <a:ea typeface=""/>
+        <a:cs typeface=""/>
+        <a:font script="Jpan" typeface="ＭＳ Ｐゴシック"/>
+        <a:font script="Hang" typeface="맑은 고딕"/>
+        <a:font script="Hans" typeface="宋体"/>
+        <a:font script="Hant" typeface="新細明體"/>
+        <a:font script="Arab" typeface="Times New Roman"/>
+        <a:font script="Hebr" typeface="Times New Roman"/>
+        <a:font script="Thai" typeface="Angsana New"/>
+        <a:font script="Ethi" typeface="Nyala"/>
+        <a:font script="Beng" typeface="Vrinda"/>
+        <a:font script="Gujr" typeface="Shruti"/>
+        <a:font script="Khmr" typeface="MoolBoran"/>
+        <a:font script="Knda" typeface="Tunga"/>
+        <a:font script="Guru" typeface="Raavi"/>
+        <a:font script="Cans" typeface="Euphemia"/>
+        <a:font script="Cher" typeface="Plantagenet Cherokee"/>
+        <a:font script="Yiii" typeface="Microsoft Yi Baiti"/>
+        <a:font script="Tibt" typeface="Microsoft Himalaya"/>
+        <a:font script="Thaa" typeface="MV Boli"/>
+        <a:font script="Deva" typeface="Mangal"/>
+        <a:font script="Telu" typeface="Gautami"/>
+        <a:font script="Taml" typeface="Latha"/>
+        <a:font script="Syrc" typeface="Estrangelo Edessa"/>
+        <a:font script="Orya" typeface="Kalinga"/>
+        <a:font script="Mlym" typeface="Kartika"/>
+        <a:font script="Laoo" typeface="DokChampa"/>
+        <a:font script="Sinh" typeface="Iskoola Pota"/>
+        <a:font script="Mong" typeface="Mongolian Baiti"/>
+        <a:font script="Viet" typeface="Times New Roman"/>
+        <a:font script="Uigh" typeface="Microsoft Uighur"/>
+        <a:font script="Geor" typeface="Sylfaen"/>
+      </a:majorFont>
+      <a:minorFont>
+        <a:latin typeface="Calibri"/>
+        <a:ea typeface=""/>
+        <a:cs typeface=""/>
+        <a:font script="Jpan" typeface="ＭＳ Ｐゴシック"/>
+        <a:font script="Hang" typeface="맑은 고딕"/>
+        <a:font script="Hans" typeface="宋体"/>
+        <a:font script="Hant" typeface="新細明體"/>
+        <a:font script="Arab" typeface="Arial"/>
+        <a:font script="Hebr" typeface="Arial"/>
+        <a:font script="Thai" typeface="Cordia New"/>
+        <a:font script="Ethi" typeface="Nyala"/>
+        <a:font script="Beng" typeface="Vrinda"/>
+        <a:font script="Gujr" typeface="Shruti"/>
+        <a:font script="Khmr" typeface="DaunPenh"/>
+        <a:font script="Knda" typeface="Tunga"/>
+        <a:font script="Guru" typeface="Raavi"/>
+        <a:font script="Cans" typeface="Euphemia"/>
+        <a:font script="Cher" typeface="Plantagenet Cherokee"/>
+        <a:font script="Yiii" typeface="Microsoft Yi Baiti"/>
+        <a:font script="Tibt" typeface="Microsoft Himalaya"/>
+        <a:font script="Thaa" typeface="MV Boli"/>
+        <a:font script="Deva" typeface="Mangal"/>
+        <a:font script="Telu" typeface="Gautami"/>
+        <a:font script="Taml" typeface="Latha"/>
+        <a:font script="Syrc" typeface="Estrangelo Edessa"/>
+        <a:font script="Orya" typeface="Kalinga"/>
+        <a:font script="Mlym" typeface="Kartika"/>
+        <a:font script="Laoo" typeface="DokChampa"/>
+        <a:font script="Sinh" typeface="Iskoola Pota"/>
+        <a:font script="Mong" typeface="Mongolian Baiti"/>
+        <a:font script="Viet" typeface="Arial"/>
+        <a:font script="Uigh" typeface="Microsoft Uighur"/>
+        <a:font script="Geor" typeface="Sylfaen"/>
+      </a:minorFont>
+    </a:fontScheme>
+    <a:fmtScheme name="Office">
+      <a:fillStyleLst>
+        <a:solidFill>
+          <a:schemeClr val="phClr"/>
+        </a:solidFill>
+        <a:gradFill rotWithShape="1">
+          <a:gsLst>
+            <a:gs pos="0">
+              <a:schemeClr val="phClr">
+                <a:tint val="50000"/>
+                <a:satMod val="300000"/>
+              </a:schemeClr>
+            </a:gs>
+            <a:gs pos="35000">
+              <a:schemeClr val="phClr">
+                <a:tint val="37000"/>
+                <a:satMod val="300000"/>
+              </a:schemeClr>
+            </a:gs>
+            <a:gs pos="100000">
+              <a:schemeClr val="phClr">
+                <a:tint val="15000"/>
+                <a:satMod val="350000"/>
+              </a:schemeClr>
+            </a:gs>
+          </a:gsLst>
+          <a:lin ang="16200000" scaled="1"/>
+        </a:gradFill>
+        <a:gradFill rotWithShape="1">
+          <a:gsLst>
+            <a:gs pos="0">
+              <a:schemeClr val="phClr">
+                <a:tint val="100000"/>
+                <a:shade val="100000"/>
+                <a:satMod val="130000"/>
+              </a:schemeClr>
+            </a:gs>
+            <a:gs pos="100000">
+              <a:schemeClr val="phClr">
+                <a:tint val="50000"/>
+                <a:shade val="100000"/>
+                <a:satMod val="350000"/>
+              </a:schemeClr>
+            </a:gs>
+          </a:gsLst>
+          <a:lin ang="16200000" scaled="0"/>
+        </a:gradFill>
+      </a:fillStyleLst>
+      <a:lnStyleLst>
+        <a:ln w="9525" cap="flat" cmpd="sng" algn="ctr">
+          <a:solidFill>
+            <a:schemeClr val="phClr">
+              <a:shade val="95000"/>
+              <a:satMod val="105000"/>
+            </a:schemeClr>
+          </a:solidFill>
+          <a:prstDash val="solid"/>
+        </a:ln>
+        <a:ln w="25400" cap="flat" cmpd="sng" algn="ctr">
+          <a:solidFill>
+            <a:schemeClr val="phClr"/>
+          </a:solidFill>
+          <a:prstDash val="solid"/>
+        </a:ln>
+        <a:ln w="38100" cap="flat" cmpd="sng" algn="ctr">
+          <a:solidFill>
+            <a:schemeClr val="phClr"/>
+          </a:solidFill>
+          <a:prstDash val="solid"/>
+        </a:ln>
+      </a:lnStyleLst>
+      <a:effectStyleLst>
+        <a:effectStyle>
+          <a:effectLst>
+            <a:outerShdw blurRad="40000" dist="20000" dir="5400000" rotWithShape="0">
+              <a:srgbClr val="000000">
+                <a:alpha val="38000"/>
+              </a:srgbClr>
+            </a:outerShdw>
+          </a:effectLst>
+        </a:effectStyle>
+        <a:effectStyle>
+          <a:effectLst>
+            <a:outerShdw blurRad="40000" dist="23000" dir="5400000" rotWithShape="0">
+              <a:srgbClr val="000000">
+                <a:alpha val="35000"/>
+              </a:srgbClr>
+            </a:outerShdw>
+          </a:effectLst>
+        </a:effectStyle>
+        <a:effectStyle>
+          <a:effectLst>
+            <a:outerShdw blurRad="40000" dist="23000" dir="5400000" rotWithShape="0">
+              <a:srgbClr val="000000">
+                <a:alpha val="35000"/>
+              </a:srgbClr>
+            </a:outerShdw>
+          </a:effectLst>
+          <a:scene3d>
+            <a:camera prst="orthographicFront">
+              <a:rot lat="0" lon="0" rev="0"/>
+            </a:camera>
+            <a:lightRig rig="threePt" dir="t">
+              <a:rot lat="0" lon="0" rev="1200000"/>
+            </a:lightRig>
+          </a:scene3d>
+          <a:sp3d>
+            <a:bevelT w="63500" h="25400"/>
+          </a:sp3d>
+        </a:effectStyle>
+      </a:effectStyleLst>
+      <a:bgFillStyleLst>
+        <a:solidFill>
+          <a:schemeClr val="phClr"/>
+        </a:solidFill>
+        <a:gradFill rotWithShape="1">
+          <a:gsLst>
+            <a:gs pos="0">
+              <a:schemeClr val="phClr">
+                <a:tint val="40000"/>
+                <a:satMod val="350000"/>
+              </a:schemeClr>
+            </a:gs>
+            <a:gs pos="40000">
+              <a:schemeClr val="phClr">
+                <a:tint val="45000"/>
+                <a:shade val="99000"/>
+                <a:satMod val="350000"/>
+              </a:schemeClr>
+            </a:gs>
+            <a:gs pos="100000">
+              <a:schemeClr val="phClr">
+                <a:shade val="20000"/>
+                <a:satMod val="255000"/>
+              </a:schemeClr>
+            </a:gs>
+          </a:gsLst>
+          <a:path path="circle">
+            <a:fillToRect l="50000" t="-80000" r="50000" b="180000"/>
+          </a:path>
+        </a:gradFill>
+        <a:gradFill rotWithShape="1">
+          <a:gsLst>
+            <a:gs pos="0">
+              <a:schemeClr val="phClr">
+                <a:tint val="80000"/>
+                <a:satMod val="300000"/>
+              </a:schemeClr>
+            </a:gs>
+            <a:gs pos="100000">
+              <a:schemeClr val="phClr">
+                <a:shade val="30000"/>
+                <a:satMod val="200000"/>
+              </a:schemeClr>
+            </a:gs>
+          </a:gsLst>
+          <a:path path="circle">
+            <a:fillToRect l="50000" t="50000" r="50000" b="50000"/>
+          </a:path>
+        </a:gradFill>
+      </a:bgFillStyleLst>
+    </a:fmtScheme>
+  </a:themeElements>
+  <a:objectDefaults>
+    <a:spDef>
+      <a:spPr/>
+      <a:bodyPr/>
+      <a:lstStyle/>
+      <a:style>
+        <a:lnRef idx="1">
+          <a:schemeClr val="accent1"/>
+        </a:lnRef>
+        <a:fillRef idx="3">
+          <a:schemeClr val="accent1"/>
+        </a:fillRef>
+        <a:effectRef idx="2">
+          <a:schemeClr val="accent1"/>
+        </a:effectRef>
+        <a:fontRef idx="minor">
+          <a:schemeClr val="lt1"/>
+        </a:fontRef>
+      </a:style>
+    </a:spDef>
+    <a:lnDef>
+      <a:spPr/>
+      <a:bodyPr/>
+      <a:lstStyle/>
+      <a:style>
+        <a:lnRef idx="2">
+          <a:schemeClr val="accent1"/>
+        </a:lnRef>
+        <a:fillRef idx="0">
+          <a:schemeClr val="accent1"/>
+        </a:fillRef>
+        <a:effectRef idx="1">
+          <a:schemeClr val="accent1"/>
+        </a:effectRef>
+        <a:fontRef idx="minor">
+          <a:schemeClr val="tx1"/>
+        </a:fontRef>
+      </a:style>
+    </a:lnDef>
+  </a:objectDefaults>
+  <a:extraClrSchemeLst/>
+</a:theme>
 </file>
--- a/modules/08-service-enterprise-deployment/assets/service-enterprise-deployment.pptx
+++ b/modules/08-service-enterprise-deployment/assets/service-enterprise-deployment.pptx
@@ -5047,7 +5047,7 @@
               </a:defRPr>
             </a:pPr>
             <a:r>
-              <a:t>Power BI Advanced Factory teaching deck</a:t>
+              <a:t>Student module overview</a:t>
             </a:r>
           </a:p>
         </p:txBody>
@@ -5571,42 +5571,6 @@
       </p:sp>
       <p:sp>
         <p:nvSpPr>
-          <p:cNvPr id="4" name="TextBox 3"/>
-          <p:cNvSpPr txBox="1"/>
-          <p:nvPr/>
-        </p:nvSpPr>
-        <p:spPr>
-          <a:xfrm>
-            <a:off x="530352" y="914400"/>
-            <a:ext cx="10515600" cy="320040"/>
-          </a:xfrm>
-          <a:prstGeom prst="rect">
-            <a:avLst/>
-          </a:prstGeom>
-          <a:noFill/>
-        </p:spPr>
-        <p:txBody>
-          <a:bodyPr wrap="none">
-            <a:spAutoFit/>
-          </a:bodyPr>
-          <a:lstStyle/>
-          <a:p>
-            <a:pPr>
-              <a:defRPr sz="1200">
-                <a:solidFill>
-                  <a:srgbClr val="5C5C5C"/>
-                </a:solidFill>
-                <a:latin typeface="Aptos"/>
-              </a:defRPr>
-            </a:pPr>
-            <a:r>
-              <a:t>Talking points, learner value, and lab connection</a:t>
-            </a:r>
-          </a:p>
-        </p:txBody>
-      </p:sp>
-      <p:sp>
-        <p:nvSpPr>
           <p:cNvPr id="5" name="Rounded Rectangle 4"/>
           <p:cNvSpPr/>
           <p:nvPr/>
@@ -5724,7 +5688,139 @@
               </a:defRPr>
             </a:pPr>
             <a:r>
-              <a:t>Talking points</a:t>
+              <a:t>Key ideas</a:t>
+            </a:r>
+            <a:br/>
+            <a:r>
+              <a:t>• App packaging</a:t>
+            </a:r>
+            <a:br/>
+            <a:r>
+              <a:t>• App consumers</a:t>
+            </a:r>
+          </a:p>
+        </p:txBody>
+      </p:sp>
+      <p:sp>
+        <p:nvSpPr>
+          <p:cNvPr id="8" name="Rounded Rectangle 7"/>
+          <p:cNvSpPr/>
+          <p:nvPr/>
+        </p:nvSpPr>
+        <p:spPr>
+          <a:xfrm>
+            <a:off x="6263640" y="1234440"/>
+            <a:ext cx="5303520" cy="1828800"/>
+          </a:xfrm>
+          <a:prstGeom prst="roundRect">
+            <a:avLst/>
+          </a:prstGeom>
+          <a:solidFill>
+            <a:srgbClr val="FFFFFF"/>
+          </a:solidFill>
+          <a:ln>
+            <a:solidFill>
+              <a:srgbClr val="DCDCDC"/>
+            </a:solidFill>
+          </a:ln>
+        </p:spPr>
+        <p:style>
+          <a:lnRef idx="1">
+            <a:schemeClr val="accent1"/>
+          </a:lnRef>
+          <a:fillRef idx="3">
+            <a:schemeClr val="accent1"/>
+          </a:fillRef>
+          <a:effectRef idx="2">
+            <a:schemeClr val="accent1"/>
+          </a:effectRef>
+          <a:fontRef idx="minor">
+            <a:schemeClr val="lt1"/>
+          </a:fontRef>
+        </p:style>
+        <p:txBody>
+          <a:bodyPr rtlCol="0" anchor="ctr"/>
+          <a:lstStyle/>
+          <a:p>
+            <a:pPr algn="ctr"/>
+          </a:p>
+        </p:txBody>
+      </p:sp>
+      <p:sp>
+        <p:nvSpPr>
+          <p:cNvPr id="9" name="Rectangle 8"/>
+          <p:cNvSpPr/>
+          <p:nvPr/>
+        </p:nvSpPr>
+        <p:spPr>
+          <a:xfrm>
+            <a:off x="6263640" y="1234440"/>
+            <a:ext cx="91440" cy="1828800"/>
+          </a:xfrm>
+          <a:prstGeom prst="rect">
+            <a:avLst/>
+          </a:prstGeom>
+          <a:solidFill>
+            <a:srgbClr val="02C39A"/>
+          </a:solidFill>
+          <a:ln>
+            <a:noFill/>
+          </a:ln>
+        </p:spPr>
+        <p:style>
+          <a:lnRef idx="1">
+            <a:schemeClr val="accent1"/>
+          </a:lnRef>
+          <a:fillRef idx="3">
+            <a:schemeClr val="accent1"/>
+          </a:fillRef>
+          <a:effectRef idx="2">
+            <a:schemeClr val="accent1"/>
+          </a:effectRef>
+          <a:fontRef idx="minor">
+            <a:schemeClr val="lt1"/>
+          </a:fontRef>
+        </p:style>
+        <p:txBody>
+          <a:bodyPr rtlCol="0" anchor="ctr"/>
+          <a:lstStyle/>
+          <a:p>
+            <a:pPr algn="ctr"/>
+          </a:p>
+        </p:txBody>
+      </p:sp>
+      <p:sp>
+        <p:nvSpPr>
+          <p:cNvPr id="10" name="TextBox 9"/>
+          <p:cNvSpPr txBox="1"/>
+          <p:nvPr/>
+        </p:nvSpPr>
+        <p:spPr>
+          <a:xfrm>
+            <a:off x="6446520" y="1344168"/>
+            <a:ext cx="4983480" cy="1664208"/>
+          </a:xfrm>
+          <a:prstGeom prst="rect">
+            <a:avLst/>
+          </a:prstGeom>
+          <a:noFill/>
+        </p:spPr>
+        <p:txBody>
+          <a:bodyPr wrap="square" lIns="0" rIns="0">
+            <a:spAutoFit/>
+          </a:bodyPr>
+          <a:lstStyle/>
+          <a:p>
+            <a:pPr>
+              <a:defRPr b="1" sz="1500">
+                <a:solidFill>
+                  <a:srgbClr val="1E2761"/>
+                </a:solidFill>
+                <a:latin typeface="Aptos Display"/>
+              </a:defRPr>
+            </a:pPr>
+            <a:r>
+              <a:t>Why it helps</a:t>
             </a:r>
           </a:p>
           <a:p>
@@ -5740,25 +5836,25 @@
               </a:defRPr>
             </a:pPr>
             <a:r>
-              <a:t>• App packaging</a:t>
+              <a:t>• Update process</a:t>
             </a:r>
             <a:br/>
             <a:r>
-              <a:t>• App consumers</a:t>
-            </a:r>
-          </a:p>
-        </p:txBody>
-      </p:sp>
-      <p:sp>
-        <p:nvSpPr>
-          <p:cNvPr id="8" name="Rounded Rectangle 7"/>
+              <a:t>• Audience targeting</a:t>
+            </a:r>
+          </a:p>
+        </p:txBody>
+      </p:sp>
+      <p:sp>
+        <p:nvSpPr>
+          <p:cNvPr id="11" name="Rounded Rectangle 10"/>
           <p:cNvSpPr/>
           <p:nvPr/>
         </p:nvSpPr>
         <p:spPr>
           <a:xfrm>
-            <a:off x="6263640" y="1234440"/>
-            <a:ext cx="5303520" cy="1828800"/>
+            <a:off x="822960" y="4160520"/>
+            <a:ext cx="10424160" cy="868680"/>
           </a:xfrm>
           <a:prstGeom prst="roundRect">
             <a:avLst/>
@@ -5796,20 +5892,20 @@
       </p:sp>
       <p:sp>
         <p:nvSpPr>
-          <p:cNvPr id="9" name="Rectangle 8"/>
+          <p:cNvPr id="12" name="Rectangle 11"/>
           <p:cNvSpPr/>
           <p:nvPr/>
         </p:nvSpPr>
         <p:spPr>
           <a:xfrm>
-            <a:off x="6263640" y="1234440"/>
-            <a:ext cx="91440" cy="1828800"/>
+            <a:off x="822960" y="4160520"/>
+            <a:ext cx="91440" cy="868680"/>
           </a:xfrm>
           <a:prstGeom prst="rect">
             <a:avLst/>
           </a:prstGeom>
           <a:solidFill>
-            <a:srgbClr val="02C39A"/>
+            <a:srgbClr val="F9B700"/>
           </a:solidFill>
           <a:ln>
             <a:noFill/>
@@ -5839,14 +5935,14 @@
       </p:sp>
       <p:sp>
         <p:nvSpPr>
-          <p:cNvPr id="10" name="TextBox 9"/>
+          <p:cNvPr id="13" name="TextBox 12"/>
           <p:cNvSpPr txBox="1"/>
           <p:nvPr/>
         </p:nvSpPr>
         <p:spPr>
           <a:xfrm>
-            <a:off x="6446520" y="1344168"/>
-            <a:ext cx="4983480" cy="1664208"/>
+            <a:off x="1005840" y="4270248"/>
+            <a:ext cx="10104120" cy="704088"/>
           </a:xfrm>
           <a:prstGeom prst="rect">
             <a:avLst/>
@@ -5868,167 +5964,7 @@
               </a:defRPr>
             </a:pPr>
             <a:r>
-              <a:t>Why it helps</a:t>
-            </a:r>
-          </a:p>
-          <a:p>
-            <a:pPr>
-              <a:spcBef>
-                <a:spcPts val="400"/>
-              </a:spcBef>
-              <a:defRPr sz="1050">
-                <a:solidFill>
-                  <a:srgbClr val="242424"/>
-                </a:solidFill>
-                <a:latin typeface="Aptos"/>
-              </a:defRPr>
-            </a:pPr>
-            <a:r>
-              <a:t>• Update process</a:t>
-            </a:r>
-            <a:br/>
-            <a:r>
-              <a:t>• Audience targeting</a:t>
-            </a:r>
-          </a:p>
-        </p:txBody>
-      </p:sp>
-      <p:sp>
-        <p:nvSpPr>
-          <p:cNvPr id="11" name="Rounded Rectangle 10"/>
-          <p:cNvSpPr/>
-          <p:nvPr/>
-        </p:nvSpPr>
-        <p:spPr>
-          <a:xfrm>
-            <a:off x="822960" y="4160520"/>
-            <a:ext cx="10424160" cy="868680"/>
-          </a:xfrm>
-          <a:prstGeom prst="roundRect">
-            <a:avLst/>
-          </a:prstGeom>
-          <a:solidFill>
-            <a:srgbClr val="FFFFFF"/>
-          </a:solidFill>
-          <a:ln>
-            <a:solidFill>
-              <a:srgbClr val="DCDCDC"/>
-            </a:solidFill>
-          </a:ln>
-        </p:spPr>
-        <p:style>
-          <a:lnRef idx="1">
-            <a:schemeClr val="accent1"/>
-          </a:lnRef>
-          <a:fillRef idx="3">
-            <a:schemeClr val="accent1"/>
-          </a:fillRef>
-          <a:effectRef idx="2">
-            <a:schemeClr val="accent1"/>
-          </a:effectRef>
-          <a:fontRef idx="minor">
-            <a:schemeClr val="lt1"/>
-          </a:fontRef>
-        </p:style>
-        <p:txBody>
-          <a:bodyPr rtlCol="0" anchor="ctr"/>
-          <a:lstStyle/>
-          <a:p>
-            <a:pPr algn="ctr"/>
-          </a:p>
-        </p:txBody>
-      </p:sp>
-      <p:sp>
-        <p:nvSpPr>
-          <p:cNvPr id="12" name="Rectangle 11"/>
-          <p:cNvSpPr/>
-          <p:nvPr/>
-        </p:nvSpPr>
-        <p:spPr>
-          <a:xfrm>
-            <a:off x="822960" y="4160520"/>
-            <a:ext cx="91440" cy="868680"/>
-          </a:xfrm>
-          <a:prstGeom prst="rect">
-            <a:avLst/>
-          </a:prstGeom>
-          <a:solidFill>
-            <a:srgbClr val="F9B700"/>
-          </a:solidFill>
-          <a:ln>
-            <a:noFill/>
-          </a:ln>
-        </p:spPr>
-        <p:style>
-          <a:lnRef idx="1">
-            <a:schemeClr val="accent1"/>
-          </a:lnRef>
-          <a:fillRef idx="3">
-            <a:schemeClr val="accent1"/>
-          </a:fillRef>
-          <a:effectRef idx="2">
-            <a:schemeClr val="accent1"/>
-          </a:effectRef>
-          <a:fontRef idx="minor">
-            <a:schemeClr val="lt1"/>
-          </a:fontRef>
-        </p:style>
-        <p:txBody>
-          <a:bodyPr rtlCol="0" anchor="ctr"/>
-          <a:lstStyle/>
-          <a:p>
-            <a:pPr algn="ctr"/>
-          </a:p>
-        </p:txBody>
-      </p:sp>
-      <p:sp>
-        <p:nvSpPr>
-          <p:cNvPr id="13" name="TextBox 12"/>
-          <p:cNvSpPr txBox="1"/>
-          <p:nvPr/>
-        </p:nvSpPr>
-        <p:spPr>
-          <a:xfrm>
-            <a:off x="1005840" y="4270248"/>
-            <a:ext cx="10104120" cy="704088"/>
-          </a:xfrm>
-          <a:prstGeom prst="rect">
-            <a:avLst/>
-          </a:prstGeom>
-          <a:noFill/>
-        </p:spPr>
-        <p:txBody>
-          <a:bodyPr wrap="square" lIns="0" rIns="0">
-            <a:spAutoFit/>
-          </a:bodyPr>
-          <a:lstStyle/>
-          <a:p>
-            <a:pPr>
-              <a:defRPr b="1" sz="1500">
-                <a:solidFill>
-                  <a:srgbClr val="1E2761"/>
-                </a:solidFill>
-                <a:latin typeface="Aptos Display"/>
-              </a:defRPr>
-            </a:pPr>
-            <a:r>
-              <a:t>Lab connection</a:t>
-            </a:r>
-          </a:p>
-          <a:p>
-            <a:pPr>
-              <a:spcBef>
-                <a:spcPts val="400"/>
-              </a:spcBef>
-              <a:defRPr sz="1050">
-                <a:solidFill>
-                  <a:srgbClr val="242424"/>
-                </a:solidFill>
-                <a:latin typeface="Aptos"/>
-              </a:defRPr>
-            </a:pPr>
-            <a:r>
-              <a:t>Coverage: Covered. Use the lab README to demonstrate or discuss this topic. Review terms: packaging, targeting.</a:t>
+              <a:t>In the lab, you will apply this pattern, validate the expected behavior, and discuss where it fits in a real Power BI solution.</a:t>
             </a:r>
           </a:p>
         </p:txBody>
@@ -6167,42 +6103,6 @@
       </p:sp>
       <p:sp>
         <p:nvSpPr>
-          <p:cNvPr id="4" name="TextBox 3"/>
-          <p:cNvSpPr txBox="1"/>
-          <p:nvPr/>
-        </p:nvSpPr>
-        <p:spPr>
-          <a:xfrm>
-            <a:off x="530352" y="914400"/>
-            <a:ext cx="10515600" cy="320040"/>
-          </a:xfrm>
-          <a:prstGeom prst="rect">
-            <a:avLst/>
-          </a:prstGeom>
-          <a:noFill/>
-        </p:spPr>
-        <p:txBody>
-          <a:bodyPr wrap="none">
-            <a:spAutoFit/>
-          </a:bodyPr>
-          <a:lstStyle/>
-          <a:p>
-            <a:pPr>
-              <a:defRPr sz="1200">
-                <a:solidFill>
-                  <a:srgbClr val="5C5C5C"/>
-                </a:solidFill>
-                <a:latin typeface="Aptos"/>
-              </a:defRPr>
-            </a:pPr>
-            <a:r>
-              <a:t>Talking points, learner value, and lab connection</a:t>
-            </a:r>
-          </a:p>
-        </p:txBody>
-      </p:sp>
-      <p:sp>
-        <p:nvSpPr>
           <p:cNvPr id="5" name="Rounded Rectangle 4"/>
           <p:cNvSpPr/>
           <p:nvPr/>
@@ -6320,7 +6220,139 @@
               </a:defRPr>
             </a:pPr>
             <a:r>
-              <a:t>Talking points</a:t>
+              <a:t>Key ideas</a:t>
+            </a:r>
+            <a:br/>
+            <a:r>
+              <a:t>• Dev/test/prod stages</a:t>
+            </a:r>
+            <a:br/>
+            <a:r>
+              <a:t>• Deployment rules</a:t>
+            </a:r>
+          </a:p>
+        </p:txBody>
+      </p:sp>
+      <p:sp>
+        <p:nvSpPr>
+          <p:cNvPr id="8" name="Rounded Rectangle 7"/>
+          <p:cNvSpPr/>
+          <p:nvPr/>
+        </p:nvSpPr>
+        <p:spPr>
+          <a:xfrm>
+            <a:off x="6263640" y="1234440"/>
+            <a:ext cx="5303520" cy="1828800"/>
+          </a:xfrm>
+          <a:prstGeom prst="roundRect">
+            <a:avLst/>
+          </a:prstGeom>
+          <a:solidFill>
+            <a:srgbClr val="FFFFFF"/>
+          </a:solidFill>
+          <a:ln>
+            <a:solidFill>
+              <a:srgbClr val="DCDCDC"/>
+            </a:solidFill>
+          </a:ln>
+        </p:spPr>
+        <p:style>
+          <a:lnRef idx="1">
+            <a:schemeClr val="accent1"/>
+          </a:lnRef>
+          <a:fillRef idx="3">
+            <a:schemeClr val="accent1"/>
+          </a:fillRef>
+          <a:effectRef idx="2">
+            <a:schemeClr val="accent1"/>
+          </a:effectRef>
+          <a:fontRef idx="minor">
+            <a:schemeClr val="lt1"/>
+          </a:fontRef>
+        </p:style>
+        <p:txBody>
+          <a:bodyPr rtlCol="0" anchor="ctr"/>
+          <a:lstStyle/>
+          <a:p>
+            <a:pPr algn="ctr"/>
+          </a:p>
+        </p:txBody>
+      </p:sp>
+      <p:sp>
+        <p:nvSpPr>
+          <p:cNvPr id="9" name="Rectangle 8"/>
+          <p:cNvSpPr/>
+          <p:nvPr/>
+        </p:nvSpPr>
+        <p:spPr>
+          <a:xfrm>
+            <a:off x="6263640" y="1234440"/>
+            <a:ext cx="91440" cy="1828800"/>
+          </a:xfrm>
+          <a:prstGeom prst="rect">
+            <a:avLst/>
+          </a:prstGeom>
+          <a:solidFill>
+            <a:srgbClr val="02C39A"/>
+          </a:solidFill>
+          <a:ln>
+            <a:noFill/>
+          </a:ln>
+        </p:spPr>
+        <p:style>
+          <a:lnRef idx="1">
+            <a:schemeClr val="accent1"/>
+          </a:lnRef>
+          <a:fillRef idx="3">
+            <a:schemeClr val="accent1"/>
+          </a:fillRef>
+          <a:effectRef idx="2">
+            <a:schemeClr val="accent1"/>
+          </a:effectRef>
+          <a:fontRef idx="minor">
+            <a:schemeClr val="lt1"/>
+          </a:fontRef>
+        </p:style>
+        <p:txBody>
+          <a:bodyPr rtlCol="0" anchor="ctr"/>
+          <a:lstStyle/>
+          <a:p>
+            <a:pPr algn="ctr"/>
+          </a:p>
+        </p:txBody>
+      </p:sp>
+      <p:sp>
+        <p:nvSpPr>
+          <p:cNvPr id="10" name="TextBox 9"/>
+          <p:cNvSpPr txBox="1"/>
+          <p:nvPr/>
+        </p:nvSpPr>
+        <p:spPr>
+          <a:xfrm>
+            <a:off x="6446520" y="1344168"/>
+            <a:ext cx="4983480" cy="1664208"/>
+          </a:xfrm>
+          <a:prstGeom prst="rect">
+            <a:avLst/>
+          </a:prstGeom>
+          <a:noFill/>
+        </p:spPr>
+        <p:txBody>
+          <a:bodyPr wrap="square" lIns="0" rIns="0">
+            <a:spAutoFit/>
+          </a:bodyPr>
+          <a:lstStyle/>
+          <a:p>
+            <a:pPr>
+              <a:defRPr b="1" sz="1500">
+                <a:solidFill>
+                  <a:srgbClr val="1E2761"/>
+                </a:solidFill>
+                <a:latin typeface="Aptos Display"/>
+              </a:defRPr>
+            </a:pPr>
+            <a:r>
+              <a:t>Why it helps</a:t>
             </a:r>
           </a:p>
           <a:p>
@@ -6336,25 +6368,25 @@
               </a:defRPr>
             </a:pPr>
             <a:r>
-              <a:t>• Dev/test/prod stages</a:t>
+              <a:t>• Capacity/licensing requirements</a:t>
             </a:r>
             <a:br/>
             <a:r>
-              <a:t>• Deployment rules</a:t>
-            </a:r>
-          </a:p>
-        </p:txBody>
-      </p:sp>
-      <p:sp>
-        <p:nvSpPr>
-          <p:cNvPr id="8" name="Rounded Rectangle 7"/>
+              <a:t>• Gov validation</a:t>
+            </a:r>
+          </a:p>
+        </p:txBody>
+      </p:sp>
+      <p:sp>
+        <p:nvSpPr>
+          <p:cNvPr id="11" name="Rounded Rectangle 10"/>
           <p:cNvSpPr/>
           <p:nvPr/>
         </p:nvSpPr>
         <p:spPr>
           <a:xfrm>
-            <a:off x="6263640" y="1234440"/>
-            <a:ext cx="5303520" cy="1828800"/>
+            <a:off x="822960" y="4160520"/>
+            <a:ext cx="10424160" cy="868680"/>
           </a:xfrm>
           <a:prstGeom prst="roundRect">
             <a:avLst/>
@@ -6392,20 +6424,20 @@
       </p:sp>
       <p:sp>
         <p:nvSpPr>
-          <p:cNvPr id="9" name="Rectangle 8"/>
+          <p:cNvPr id="12" name="Rectangle 11"/>
           <p:cNvSpPr/>
           <p:nvPr/>
         </p:nvSpPr>
         <p:spPr>
           <a:xfrm>
-            <a:off x="6263640" y="1234440"/>
-            <a:ext cx="91440" cy="1828800"/>
+            <a:off x="822960" y="4160520"/>
+            <a:ext cx="91440" cy="868680"/>
           </a:xfrm>
           <a:prstGeom prst="rect">
             <a:avLst/>
           </a:prstGeom>
           <a:solidFill>
-            <a:srgbClr val="02C39A"/>
+            <a:srgbClr val="F9B700"/>
           </a:solidFill>
           <a:ln>
             <a:noFill/>
@@ -6435,14 +6467,14 @@
       </p:sp>
       <p:sp>
         <p:nvSpPr>
-          <p:cNvPr id="10" name="TextBox 9"/>
+          <p:cNvPr id="13" name="TextBox 12"/>
           <p:cNvSpPr txBox="1"/>
           <p:nvPr/>
         </p:nvSpPr>
         <p:spPr>
           <a:xfrm>
-            <a:off x="6446520" y="1344168"/>
-            <a:ext cx="4983480" cy="1664208"/>
+            <a:off x="1005840" y="4270248"/>
+            <a:ext cx="10104120" cy="704088"/>
           </a:xfrm>
           <a:prstGeom prst="rect">
             <a:avLst/>
@@ -6464,167 +6496,7 @@
               </a:defRPr>
             </a:pPr>
             <a:r>
-              <a:t>Why it helps</a:t>
-            </a:r>
-          </a:p>
-          <a:p>
-            <a:pPr>
-              <a:spcBef>
-                <a:spcPts val="400"/>
-              </a:spcBef>
-              <a:defRPr sz="1050">
-                <a:solidFill>
-                  <a:srgbClr val="242424"/>
-                </a:solidFill>
-                <a:latin typeface="Aptos"/>
-              </a:defRPr>
-            </a:pPr>
-            <a:r>
-              <a:t>• Capacity/licensing requirements</a:t>
-            </a:r>
-            <a:br/>
-            <a:r>
-              <a:t>• Gov validation</a:t>
-            </a:r>
-          </a:p>
-        </p:txBody>
-      </p:sp>
-      <p:sp>
-        <p:nvSpPr>
-          <p:cNvPr id="11" name="Rounded Rectangle 10"/>
-          <p:cNvSpPr/>
-          <p:nvPr/>
-        </p:nvSpPr>
-        <p:spPr>
-          <a:xfrm>
-            <a:off x="822960" y="4160520"/>
-            <a:ext cx="10424160" cy="868680"/>
-          </a:xfrm>
-          <a:prstGeom prst="roundRect">
-            <a:avLst/>
-          </a:prstGeom>
-          <a:solidFill>
-            <a:srgbClr val="FFFFFF"/>
-          </a:solidFill>
-          <a:ln>
-            <a:solidFill>
-              <a:srgbClr val="DCDCDC"/>
-            </a:solidFill>
-          </a:ln>
-        </p:spPr>
-        <p:style>
-          <a:lnRef idx="1">
-            <a:schemeClr val="accent1"/>
-          </a:lnRef>
-          <a:fillRef idx="3">
-            <a:schemeClr val="accent1"/>
-          </a:fillRef>
-          <a:effectRef idx="2">
-            <a:schemeClr val="accent1"/>
-          </a:effectRef>
-          <a:fontRef idx="minor">
-            <a:schemeClr val="lt1"/>
-          </a:fontRef>
-        </p:style>
-        <p:txBody>
-          <a:bodyPr rtlCol="0" anchor="ctr"/>
-          <a:lstStyle/>
-          <a:p>
-            <a:pPr algn="ctr"/>
-          </a:p>
-        </p:txBody>
-      </p:sp>
-      <p:sp>
-        <p:nvSpPr>
-          <p:cNvPr id="12" name="Rectangle 11"/>
-          <p:cNvSpPr/>
-          <p:nvPr/>
-        </p:nvSpPr>
-        <p:spPr>
-          <a:xfrm>
-            <a:off x="822960" y="4160520"/>
-            <a:ext cx="91440" cy="868680"/>
-          </a:xfrm>
-          <a:prstGeom prst="rect">
-            <a:avLst/>
-          </a:prstGeom>
-          <a:solidFill>
-            <a:srgbClr val="F9B700"/>
-          </a:solidFill>
-          <a:ln>
-            <a:noFill/>
-          </a:ln>
-        </p:spPr>
-        <p:style>
-          <a:lnRef idx="1">
-            <a:schemeClr val="accent1"/>
-          </a:lnRef>
-          <a:fillRef idx="3">
-            <a:schemeClr val="accent1"/>
-          </a:fillRef>
-          <a:effectRef idx="2">
-            <a:schemeClr val="accent1"/>
-          </a:effectRef>
-          <a:fontRef idx="minor">
-            <a:schemeClr val="lt1"/>
-          </a:fontRef>
-        </p:style>
-        <p:txBody>
-          <a:bodyPr rtlCol="0" anchor="ctr"/>
-          <a:lstStyle/>
-          <a:p>
-            <a:pPr algn="ctr"/>
-          </a:p>
-        </p:txBody>
-      </p:sp>
-      <p:sp>
-        <p:nvSpPr>
-          <p:cNvPr id="13" name="TextBox 12"/>
-          <p:cNvSpPr txBox="1"/>
-          <p:nvPr/>
-        </p:nvSpPr>
-        <p:spPr>
-          <a:xfrm>
-            <a:off x="1005840" y="4270248"/>
-            <a:ext cx="10104120" cy="704088"/>
-          </a:xfrm>
-          <a:prstGeom prst="rect">
-            <a:avLst/>
-          </a:prstGeom>
-          <a:noFill/>
-        </p:spPr>
-        <p:txBody>
-          <a:bodyPr wrap="square" lIns="0" rIns="0">
-            <a:spAutoFit/>
-          </a:bodyPr>
-          <a:lstStyle/>
-          <a:p>
-            <a:pPr>
-              <a:defRPr b="1" sz="1500">
-                <a:solidFill>
-                  <a:srgbClr val="1E2761"/>
-                </a:solidFill>
-                <a:latin typeface="Aptos Display"/>
-              </a:defRPr>
-            </a:pPr>
-            <a:r>
-              <a:t>Lab connection</a:t>
-            </a:r>
-          </a:p>
-          <a:p>
-            <a:pPr>
-              <a:spcBef>
-                <a:spcPts val="400"/>
-              </a:spcBef>
-              <a:defRPr sz="1050">
-                <a:solidFill>
-                  <a:srgbClr val="242424"/>
-                </a:solidFill>
-                <a:latin typeface="Aptos"/>
-              </a:defRPr>
-            </a:pPr>
-            <a:r>
-              <a:t>Coverage: Covered. Use the lab README to demonstrate or discuss this topic. Review terms: none.</a:t>
+              <a:t>In the lab, you will apply this pattern, validate the expected behavior, and discuss where it fits in a real Power BI solution.</a:t>
             </a:r>
           </a:p>
         </p:txBody>
@@ -6763,42 +6635,6 @@
       </p:sp>
       <p:sp>
         <p:nvSpPr>
-          <p:cNvPr id="4" name="TextBox 3"/>
-          <p:cNvSpPr txBox="1"/>
-          <p:nvPr/>
-        </p:nvSpPr>
-        <p:spPr>
-          <a:xfrm>
-            <a:off x="530352" y="914400"/>
-            <a:ext cx="10515600" cy="320040"/>
-          </a:xfrm>
-          <a:prstGeom prst="rect">
-            <a:avLst/>
-          </a:prstGeom>
-          <a:noFill/>
-        </p:spPr>
-        <p:txBody>
-          <a:bodyPr wrap="none">
-            <a:spAutoFit/>
-          </a:bodyPr>
-          <a:lstStyle/>
-          <a:p>
-            <a:pPr>
-              <a:defRPr sz="1200">
-                <a:solidFill>
-                  <a:srgbClr val="5C5C5C"/>
-                </a:solidFill>
-                <a:latin typeface="Aptos"/>
-              </a:defRPr>
-            </a:pPr>
-            <a:r>
-              <a:t>Talking points, learner value, and lab connection</a:t>
-            </a:r>
-          </a:p>
-        </p:txBody>
-      </p:sp>
-      <p:sp>
-        <p:nvSpPr>
           <p:cNvPr id="5" name="Rounded Rectangle 4"/>
           <p:cNvSpPr/>
           <p:nvPr/>
@@ -6916,7 +6752,139 @@
               </a:defRPr>
             </a:pPr>
             <a:r>
-              <a:t>Talking points</a:t>
+              <a:t>Key ideas</a:t>
+            </a:r>
+            <a:br/>
+            <a:r>
+              <a:t>• Promoted</a:t>
+            </a:r>
+            <a:br/>
+            <a:r>
+              <a:t>• Certified</a:t>
+            </a:r>
+          </a:p>
+        </p:txBody>
+      </p:sp>
+      <p:sp>
+        <p:nvSpPr>
+          <p:cNvPr id="8" name="Rounded Rectangle 7"/>
+          <p:cNvSpPr/>
+          <p:nvPr/>
+        </p:nvSpPr>
+        <p:spPr>
+          <a:xfrm>
+            <a:off x="6263640" y="1234440"/>
+            <a:ext cx="5303520" cy="1828800"/>
+          </a:xfrm>
+          <a:prstGeom prst="roundRect">
+            <a:avLst/>
+          </a:prstGeom>
+          <a:solidFill>
+            <a:srgbClr val="FFFFFF"/>
+          </a:solidFill>
+          <a:ln>
+            <a:solidFill>
+              <a:srgbClr val="DCDCDC"/>
+            </a:solidFill>
+          </a:ln>
+        </p:spPr>
+        <p:style>
+          <a:lnRef idx="1">
+            <a:schemeClr val="accent1"/>
+          </a:lnRef>
+          <a:fillRef idx="3">
+            <a:schemeClr val="accent1"/>
+          </a:fillRef>
+          <a:effectRef idx="2">
+            <a:schemeClr val="accent1"/>
+          </a:effectRef>
+          <a:fontRef idx="minor">
+            <a:schemeClr val="lt1"/>
+          </a:fontRef>
+        </p:style>
+        <p:txBody>
+          <a:bodyPr rtlCol="0" anchor="ctr"/>
+          <a:lstStyle/>
+          <a:p>
+            <a:pPr algn="ctr"/>
+          </a:p>
+        </p:txBody>
+      </p:sp>
+      <p:sp>
+        <p:nvSpPr>
+          <p:cNvPr id="9" name="Rectangle 8"/>
+          <p:cNvSpPr/>
+          <p:nvPr/>
+        </p:nvSpPr>
+        <p:spPr>
+          <a:xfrm>
+            <a:off x="6263640" y="1234440"/>
+            <a:ext cx="91440" cy="1828800"/>
+          </a:xfrm>
+          <a:prstGeom prst="rect">
+            <a:avLst/>
+          </a:prstGeom>
+          <a:solidFill>
+            <a:srgbClr val="02C39A"/>
+          </a:solidFill>
+          <a:ln>
+            <a:noFill/>
+          </a:ln>
+        </p:spPr>
+        <p:style>
+          <a:lnRef idx="1">
+            <a:schemeClr val="accent1"/>
+          </a:lnRef>
+          <a:fillRef idx="3">
+            <a:schemeClr val="accent1"/>
+          </a:fillRef>
+          <a:effectRef idx="2">
+            <a:schemeClr val="accent1"/>
+          </a:effectRef>
+          <a:fontRef idx="minor">
+            <a:schemeClr val="lt1"/>
+          </a:fontRef>
+        </p:style>
+        <p:txBody>
+          <a:bodyPr rtlCol="0" anchor="ctr"/>
+          <a:lstStyle/>
+          <a:p>
+            <a:pPr algn="ctr"/>
+          </a:p>
+        </p:txBody>
+      </p:sp>
+      <p:sp>
+        <p:nvSpPr>
+          <p:cNvPr id="10" name="TextBox 9"/>
+          <p:cNvSpPr txBox="1"/>
+          <p:nvPr/>
+        </p:nvSpPr>
+        <p:spPr>
+          <a:xfrm>
+            <a:off x="6446520" y="1344168"/>
+            <a:ext cx="4983480" cy="1664208"/>
+          </a:xfrm>
+          <a:prstGeom prst="rect">
+            <a:avLst/>
+          </a:prstGeom>
+          <a:noFill/>
+        </p:spPr>
+        <p:txBody>
+          <a:bodyPr wrap="square" lIns="0" rIns="0">
+            <a:spAutoFit/>
+          </a:bodyPr>
+          <a:lstStyle/>
+          <a:p>
+            <a:pPr>
+              <a:defRPr b="1" sz="1500">
+                <a:solidFill>
+                  <a:srgbClr val="1E2761"/>
+                </a:solidFill>
+                <a:latin typeface="Aptos Display"/>
+              </a:defRPr>
+            </a:pPr>
+            <a:r>
+              <a:t>Why it helps</a:t>
             </a:r>
           </a:p>
           <a:p>
@@ -6932,25 +6900,25 @@
               </a:defRPr>
             </a:pPr>
             <a:r>
-              <a:t>• Promoted</a:t>
+              <a:t>• Governance workflow</a:t>
             </a:r>
             <a:br/>
             <a:r>
-              <a:t>• Certified</a:t>
-            </a:r>
-          </a:p>
-        </p:txBody>
-      </p:sp>
-      <p:sp>
-        <p:nvSpPr>
-          <p:cNvPr id="8" name="Rounded Rectangle 7"/>
+              <a:t>• Ownership and support</a:t>
+            </a:r>
+          </a:p>
+        </p:txBody>
+      </p:sp>
+      <p:sp>
+        <p:nvSpPr>
+          <p:cNvPr id="11" name="Rounded Rectangle 10"/>
           <p:cNvSpPr/>
           <p:nvPr/>
         </p:nvSpPr>
         <p:spPr>
           <a:xfrm>
-            <a:off x="6263640" y="1234440"/>
-            <a:ext cx="5303520" cy="1828800"/>
+            <a:off x="822960" y="4160520"/>
+            <a:ext cx="10424160" cy="868680"/>
           </a:xfrm>
           <a:prstGeom prst="roundRect">
             <a:avLst/>
@@ -6988,20 +6956,20 @@
       </p:sp>
       <p:sp>
         <p:nvSpPr>
-          <p:cNvPr id="9" name="Rectangle 8"/>
+          <p:cNvPr id="12" name="Rectangle 11"/>
           <p:cNvSpPr/>
           <p:nvPr/>
         </p:nvSpPr>
         <p:spPr>
           <a:xfrm>
-            <a:off x="6263640" y="1234440"/>
-            <a:ext cx="91440" cy="1828800"/>
+            <a:off x="822960" y="4160520"/>
+            <a:ext cx="91440" cy="868680"/>
           </a:xfrm>
           <a:prstGeom prst="rect">
             <a:avLst/>
           </a:prstGeom>
           <a:solidFill>
-            <a:srgbClr val="02C39A"/>
+            <a:srgbClr val="F9B700"/>
           </a:solidFill>
           <a:ln>
             <a:noFill/>
@@ -7031,14 +6999,14 @@
       </p:sp>
       <p:sp>
         <p:nvSpPr>
-          <p:cNvPr id="10" name="TextBox 9"/>
+          <p:cNvPr id="13" name="TextBox 12"/>
           <p:cNvSpPr txBox="1"/>
           <p:nvPr/>
         </p:nvSpPr>
         <p:spPr>
           <a:xfrm>
-            <a:off x="6446520" y="1344168"/>
-            <a:ext cx="4983480" cy="1664208"/>
+            <a:off x="1005840" y="4270248"/>
+            <a:ext cx="10104120" cy="704088"/>
           </a:xfrm>
           <a:prstGeom prst="rect">
             <a:avLst/>
@@ -7060,167 +7028,7 @@
               </a:defRPr>
             </a:pPr>
             <a:r>
-              <a:t>Why it helps</a:t>
-            </a:r>
-          </a:p>
-          <a:p>
-            <a:pPr>
-              <a:spcBef>
-                <a:spcPts val="400"/>
-              </a:spcBef>
-              <a:defRPr sz="1050">
-                <a:solidFill>
-                  <a:srgbClr val="242424"/>
-                </a:solidFill>
-                <a:latin typeface="Aptos"/>
-              </a:defRPr>
-            </a:pPr>
-            <a:r>
-              <a:t>• Governance workflow</a:t>
-            </a:r>
-            <a:br/>
-            <a:r>
-              <a:t>• Ownership and support</a:t>
-            </a:r>
-          </a:p>
-        </p:txBody>
-      </p:sp>
-      <p:sp>
-        <p:nvSpPr>
-          <p:cNvPr id="11" name="Rounded Rectangle 10"/>
-          <p:cNvSpPr/>
-          <p:nvPr/>
-        </p:nvSpPr>
-        <p:spPr>
-          <a:xfrm>
-            <a:off x="822960" y="4160520"/>
-            <a:ext cx="10424160" cy="868680"/>
-          </a:xfrm>
-          <a:prstGeom prst="roundRect">
-            <a:avLst/>
-          </a:prstGeom>
-          <a:solidFill>
-            <a:srgbClr val="FFFFFF"/>
-          </a:solidFill>
-          <a:ln>
-            <a:solidFill>
-              <a:srgbClr val="DCDCDC"/>
-            </a:solidFill>
-          </a:ln>
-        </p:spPr>
-        <p:style>
-          <a:lnRef idx="1">
-            <a:schemeClr val="accent1"/>
-          </a:lnRef>
-          <a:fillRef idx="3">
-            <a:schemeClr val="accent1"/>
-          </a:fillRef>
-          <a:effectRef idx="2">
-            <a:schemeClr val="accent1"/>
-          </a:effectRef>
-          <a:fontRef idx="minor">
-            <a:schemeClr val="lt1"/>
-          </a:fontRef>
-        </p:style>
-        <p:txBody>
-          <a:bodyPr rtlCol="0" anchor="ctr"/>
-          <a:lstStyle/>
-          <a:p>
-            <a:pPr algn="ctr"/>
-          </a:p>
-        </p:txBody>
-      </p:sp>
-      <p:sp>
-        <p:nvSpPr>
-          <p:cNvPr id="12" name="Rectangle 11"/>
-          <p:cNvSpPr/>
-          <p:nvPr/>
-        </p:nvSpPr>
-        <p:spPr>
-          <a:xfrm>
-            <a:off x="822960" y="4160520"/>
-            <a:ext cx="91440" cy="868680"/>
-          </a:xfrm>
-          <a:prstGeom prst="rect">
-            <a:avLst/>
-          </a:prstGeom>
-          <a:solidFill>
-            <a:srgbClr val="F9B700"/>
-          </a:solidFill>
-          <a:ln>
-            <a:noFill/>
-          </a:ln>
-        </p:spPr>
-        <p:style>
-          <a:lnRef idx="1">
-            <a:schemeClr val="accent1"/>
-          </a:lnRef>
-          <a:fillRef idx="3">
-            <a:schemeClr val="accent1"/>
-          </a:fillRef>
-          <a:effectRef idx="2">
-            <a:schemeClr val="accent1"/>
-          </a:effectRef>
-          <a:fontRef idx="minor">
-            <a:schemeClr val="lt1"/>
-          </a:fontRef>
-        </p:style>
-        <p:txBody>
-          <a:bodyPr rtlCol="0" anchor="ctr"/>
-          <a:lstStyle/>
-          <a:p>
-            <a:pPr algn="ctr"/>
-          </a:p>
-        </p:txBody>
-      </p:sp>
-      <p:sp>
-        <p:nvSpPr>
-          <p:cNvPr id="13" name="TextBox 12"/>
-          <p:cNvSpPr txBox="1"/>
-          <p:nvPr/>
-        </p:nvSpPr>
-        <p:spPr>
-          <a:xfrm>
-            <a:off x="1005840" y="4270248"/>
-            <a:ext cx="10104120" cy="704088"/>
-          </a:xfrm>
-          <a:prstGeom prst="rect">
-            <a:avLst/>
-          </a:prstGeom>
-          <a:noFill/>
-        </p:spPr>
-        <p:txBody>
-          <a:bodyPr wrap="square" lIns="0" rIns="0">
-            <a:spAutoFit/>
-          </a:bodyPr>
-          <a:lstStyle/>
-          <a:p>
-            <a:pPr>
-              <a:defRPr b="1" sz="1500">
-                <a:solidFill>
-                  <a:srgbClr val="1E2761"/>
-                </a:solidFill>
-                <a:latin typeface="Aptos Display"/>
-              </a:defRPr>
-            </a:pPr>
-            <a:r>
-              <a:t>Lab connection</a:t>
-            </a:r>
-          </a:p>
-          <a:p>
-            <a:pPr>
-              <a:spcBef>
-                <a:spcPts val="400"/>
-              </a:spcBef>
-              <a:defRPr sz="1050">
-                <a:solidFill>
-                  <a:srgbClr val="242424"/>
-                </a:solidFill>
-                <a:latin typeface="Aptos"/>
-              </a:defRPr>
-            </a:pPr>
-            <a:r>
-              <a:t>Coverage: Covered. Use the lab README to demonstrate or discuss this topic. Review terms: workflow.</a:t>
+              <a:t>In the lab, you will apply this pattern, validate the expected behavior, and discuss where it fits in a real Power BI solution.</a:t>
             </a:r>
           </a:p>
         </p:txBody>
@@ -7359,42 +7167,6 @@
       </p:sp>
       <p:sp>
         <p:nvSpPr>
-          <p:cNvPr id="4" name="TextBox 3"/>
-          <p:cNvSpPr txBox="1"/>
-          <p:nvPr/>
-        </p:nvSpPr>
-        <p:spPr>
-          <a:xfrm>
-            <a:off x="530352" y="914400"/>
-            <a:ext cx="10515600" cy="320040"/>
-          </a:xfrm>
-          <a:prstGeom prst="rect">
-            <a:avLst/>
-          </a:prstGeom>
-          <a:noFill/>
-        </p:spPr>
-        <p:txBody>
-          <a:bodyPr wrap="none">
-            <a:spAutoFit/>
-          </a:bodyPr>
-          <a:lstStyle/>
-          <a:p>
-            <a:pPr>
-              <a:defRPr sz="1200">
-                <a:solidFill>
-                  <a:srgbClr val="5C5C5C"/>
-                </a:solidFill>
-                <a:latin typeface="Aptos"/>
-              </a:defRPr>
-            </a:pPr>
-            <a:r>
-              <a:t>Talking points, learner value, and lab connection</a:t>
-            </a:r>
-          </a:p>
-        </p:txBody>
-      </p:sp>
-      <p:sp>
-        <p:nvSpPr>
           <p:cNvPr id="5" name="Rounded Rectangle 4"/>
           <p:cNvSpPr/>
           <p:nvPr/>
@@ -7512,7 +7284,143 @@
               </a:defRPr>
             </a:pPr>
             <a:r>
-              <a:t>Talking points</a:t>
+              <a:t>Key ideas</a:t>
+            </a:r>
+            <a:br/>
+            <a:r>
+              <a:t>• Tenant restrictions</a:t>
+            </a:r>
+            <a:br/>
+            <a:r>
+              <a:t>• Gateways and network</a:t>
+            </a:r>
+            <a:br/>
+            <a:r>
+              <a:t>• App audiences</a:t>
+            </a:r>
+          </a:p>
+        </p:txBody>
+      </p:sp>
+      <p:sp>
+        <p:nvSpPr>
+          <p:cNvPr id="8" name="Rounded Rectangle 7"/>
+          <p:cNvSpPr/>
+          <p:nvPr/>
+        </p:nvSpPr>
+        <p:spPr>
+          <a:xfrm>
+            <a:off x="6263640" y="1234440"/>
+            <a:ext cx="5303520" cy="1828800"/>
+          </a:xfrm>
+          <a:prstGeom prst="roundRect">
+            <a:avLst/>
+          </a:prstGeom>
+          <a:solidFill>
+            <a:srgbClr val="FFFFFF"/>
+          </a:solidFill>
+          <a:ln>
+            <a:solidFill>
+              <a:srgbClr val="DCDCDC"/>
+            </a:solidFill>
+          </a:ln>
+        </p:spPr>
+        <p:style>
+          <a:lnRef idx="1">
+            <a:schemeClr val="accent1"/>
+          </a:lnRef>
+          <a:fillRef idx="3">
+            <a:schemeClr val="accent1"/>
+          </a:fillRef>
+          <a:effectRef idx="2">
+            <a:schemeClr val="accent1"/>
+          </a:effectRef>
+          <a:fontRef idx="minor">
+            <a:schemeClr val="lt1"/>
+          </a:fontRef>
+        </p:style>
+        <p:txBody>
+          <a:bodyPr rtlCol="0" anchor="ctr"/>
+          <a:lstStyle/>
+          <a:p>
+            <a:pPr algn="ctr"/>
+          </a:p>
+        </p:txBody>
+      </p:sp>
+      <p:sp>
+        <p:nvSpPr>
+          <p:cNvPr id="9" name="Rectangle 8"/>
+          <p:cNvSpPr/>
+          <p:nvPr/>
+        </p:nvSpPr>
+        <p:spPr>
+          <a:xfrm>
+            <a:off x="6263640" y="1234440"/>
+            <a:ext cx="91440" cy="1828800"/>
+          </a:xfrm>
+          <a:prstGeom prst="rect">
+            <a:avLst/>
+          </a:prstGeom>
+          <a:solidFill>
+            <a:srgbClr val="02C39A"/>
+          </a:solidFill>
+          <a:ln>
+            <a:noFill/>
+          </a:ln>
+        </p:spPr>
+        <p:style>
+          <a:lnRef idx="1">
+            <a:schemeClr val="accent1"/>
+          </a:lnRef>
+          <a:fillRef idx="3">
+            <a:schemeClr val="accent1"/>
+          </a:fillRef>
+          <a:effectRef idx="2">
+            <a:schemeClr val="accent1"/>
+          </a:effectRef>
+          <a:fontRef idx="minor">
+            <a:schemeClr val="lt1"/>
+          </a:fontRef>
+        </p:style>
+        <p:txBody>
+          <a:bodyPr rtlCol="0" anchor="ctr"/>
+          <a:lstStyle/>
+          <a:p>
+            <a:pPr algn="ctr"/>
+          </a:p>
+        </p:txBody>
+      </p:sp>
+      <p:sp>
+        <p:nvSpPr>
+          <p:cNvPr id="10" name="TextBox 9"/>
+          <p:cNvSpPr txBox="1"/>
+          <p:nvPr/>
+        </p:nvSpPr>
+        <p:spPr>
+          <a:xfrm>
+            <a:off x="6446520" y="1344168"/>
+            <a:ext cx="4983480" cy="1664208"/>
+          </a:xfrm>
+          <a:prstGeom prst="rect">
+            <a:avLst/>
+          </a:prstGeom>
+          <a:noFill/>
+        </p:spPr>
+        <p:txBody>
+          <a:bodyPr wrap="square" lIns="0" rIns="0">
+            <a:spAutoFit/>
+          </a:bodyPr>
+          <a:lstStyle/>
+          <a:p>
+            <a:pPr>
+              <a:defRPr b="1" sz="1500">
+                <a:solidFill>
+                  <a:srgbClr val="1E2761"/>
+                </a:solidFill>
+                <a:latin typeface="Aptos Display"/>
+              </a:defRPr>
+            </a:pPr>
+            <a:r>
+              <a:t>Why it helps</a:t>
             </a:r>
           </a:p>
           <a:p>
@@ -7528,29 +7436,25 @@
               </a:defRPr>
             </a:pPr>
             <a:r>
-              <a:t>• Tenant restrictions</a:t>
+              <a:t>• Deployment pipelines</a:t>
             </a:r>
             <a:br/>
             <a:r>
-              <a:t>• Gateways and network</a:t>
-            </a:r>
-            <a:br/>
-            <a:r>
-              <a:t>• App audiences</a:t>
-            </a:r>
-          </a:p>
-        </p:txBody>
-      </p:sp>
-      <p:sp>
-        <p:nvSpPr>
-          <p:cNvPr id="8" name="Rounded Rectangle 7"/>
+              <a:t>• Cloud connections</a:t>
+            </a:r>
+          </a:p>
+        </p:txBody>
+      </p:sp>
+      <p:sp>
+        <p:nvSpPr>
+          <p:cNvPr id="11" name="Rounded Rectangle 10"/>
           <p:cNvSpPr/>
           <p:nvPr/>
         </p:nvSpPr>
         <p:spPr>
           <a:xfrm>
-            <a:off x="6263640" y="1234440"/>
-            <a:ext cx="5303520" cy="1828800"/>
+            <a:off x="822960" y="4160520"/>
+            <a:ext cx="10424160" cy="868680"/>
           </a:xfrm>
           <a:prstGeom prst="roundRect">
             <a:avLst/>
@@ -7588,20 +7492,20 @@
       </p:sp>
       <p:sp>
         <p:nvSpPr>
-          <p:cNvPr id="9" name="Rectangle 8"/>
+          <p:cNvPr id="12" name="Rectangle 11"/>
           <p:cNvSpPr/>
           <p:nvPr/>
         </p:nvSpPr>
         <p:spPr>
           <a:xfrm>
-            <a:off x="6263640" y="1234440"/>
-            <a:ext cx="91440" cy="1828800"/>
+            <a:off x="822960" y="4160520"/>
+            <a:ext cx="91440" cy="868680"/>
           </a:xfrm>
           <a:prstGeom prst="rect">
             <a:avLst/>
           </a:prstGeom>
           <a:solidFill>
-            <a:srgbClr val="02C39A"/>
+            <a:srgbClr val="F9B700"/>
           </a:solidFill>
           <a:ln>
             <a:noFill/>
@@ -7631,14 +7535,14 @@
       </p:sp>
       <p:sp>
         <p:nvSpPr>
-          <p:cNvPr id="10" name="TextBox 9"/>
+          <p:cNvPr id="13" name="TextBox 12"/>
           <p:cNvSpPr txBox="1"/>
           <p:nvPr/>
         </p:nvSpPr>
         <p:spPr>
           <a:xfrm>
-            <a:off x="6446520" y="1344168"/>
-            <a:ext cx="4983480" cy="1664208"/>
+            <a:off x="1005840" y="4270248"/>
+            <a:ext cx="10104120" cy="704088"/>
           </a:xfrm>
           <a:prstGeom prst="rect">
             <a:avLst/>
@@ -7660,167 +7564,7 @@
               </a:defRPr>
             </a:pPr>
             <a:r>
-              <a:t>Why it helps</a:t>
-            </a:r>
-          </a:p>
-          <a:p>
-            <a:pPr>
-              <a:spcBef>
-                <a:spcPts val="400"/>
-              </a:spcBef>
-              <a:defRPr sz="1050">
-                <a:solidFill>
-                  <a:srgbClr val="242424"/>
-                </a:solidFill>
-                <a:latin typeface="Aptos"/>
-              </a:defRPr>
-            </a:pPr>
-            <a:r>
-              <a:t>• Deployment pipelines</a:t>
-            </a:r>
-            <a:br/>
-            <a:r>
-              <a:t>• Cloud connections</a:t>
-            </a:r>
-          </a:p>
-        </p:txBody>
-      </p:sp>
-      <p:sp>
-        <p:nvSpPr>
-          <p:cNvPr id="11" name="Rounded Rectangle 10"/>
-          <p:cNvSpPr/>
-          <p:nvPr/>
-        </p:nvSpPr>
-        <p:spPr>
-          <a:xfrm>
-            <a:off x="822960" y="4160520"/>
-            <a:ext cx="10424160" cy="868680"/>
-          </a:xfrm>
-          <a:prstGeom prst="roundRect">
-            <a:avLst/>
-          </a:prstGeom>
-          <a:solidFill>
-            <a:srgbClr val="FFFFFF"/>
-          </a:solidFill>
-          <a:ln>
-            <a:solidFill>
-              <a:srgbClr val="DCDCDC"/>
-            </a:solidFill>
-          </a:ln>
-        </p:spPr>
-        <p:style>
-          <a:lnRef idx="1">
-            <a:schemeClr val="accent1"/>
-          </a:lnRef>
-          <a:fillRef idx="3">
-            <a:schemeClr val="accent1"/>
-          </a:fillRef>
-          <a:effectRef idx="2">
-            <a:schemeClr val="accent1"/>
-          </a:effectRef>
-          <a:fontRef idx="minor">
-            <a:schemeClr val="lt1"/>
-          </a:fontRef>
-        </p:style>
-        <p:txBody>
-          <a:bodyPr rtlCol="0" anchor="ctr"/>
-          <a:lstStyle/>
-          <a:p>
-            <a:pPr algn="ctr"/>
-          </a:p>
-        </p:txBody>
-      </p:sp>
-      <p:sp>
-        <p:nvSpPr>
-          <p:cNvPr id="12" name="Rectangle 11"/>
-          <p:cNvSpPr/>
-          <p:nvPr/>
-        </p:nvSpPr>
-        <p:spPr>
-          <a:xfrm>
-            <a:off x="822960" y="4160520"/>
-            <a:ext cx="91440" cy="868680"/>
-          </a:xfrm>
-          <a:prstGeom prst="rect">
-            <a:avLst/>
-          </a:prstGeom>
-          <a:solidFill>
-            <a:srgbClr val="F9B700"/>
-          </a:solidFill>
-          <a:ln>
-            <a:noFill/>
-          </a:ln>
-        </p:spPr>
-        <p:style>
-          <a:lnRef idx="1">
-            <a:schemeClr val="accent1"/>
-          </a:lnRef>
-          <a:fillRef idx="3">
-            <a:schemeClr val="accent1"/>
-          </a:fillRef>
-          <a:effectRef idx="2">
-            <a:schemeClr val="accent1"/>
-          </a:effectRef>
-          <a:fontRef idx="minor">
-            <a:schemeClr val="lt1"/>
-          </a:fontRef>
-        </p:style>
-        <p:txBody>
-          <a:bodyPr rtlCol="0" anchor="ctr"/>
-          <a:lstStyle/>
-          <a:p>
-            <a:pPr algn="ctr"/>
-          </a:p>
-        </p:txBody>
-      </p:sp>
-      <p:sp>
-        <p:nvSpPr>
-          <p:cNvPr id="13" name="TextBox 12"/>
-          <p:cNvSpPr txBox="1"/>
-          <p:nvPr/>
-        </p:nvSpPr>
-        <p:spPr>
-          <a:xfrm>
-            <a:off x="1005840" y="4270248"/>
-            <a:ext cx="10104120" cy="704088"/>
-          </a:xfrm>
-          <a:prstGeom prst="rect">
-            <a:avLst/>
-          </a:prstGeom>
-          <a:noFill/>
-        </p:spPr>
-        <p:txBody>
-          <a:bodyPr wrap="square" lIns="0" rIns="0">
-            <a:spAutoFit/>
-          </a:bodyPr>
-          <a:lstStyle/>
-          <a:p>
-            <a:pPr>
-              <a:defRPr b="1" sz="1500">
-                <a:solidFill>
-                  <a:srgbClr val="1E2761"/>
-                </a:solidFill>
-                <a:latin typeface="Aptos Display"/>
-              </a:defRPr>
-            </a:pPr>
-            <a:r>
-              <a:t>Lab connection</a:t>
-            </a:r>
-          </a:p>
-          <a:p>
-            <a:pPr>
-              <a:spcBef>
-                <a:spcPts val="400"/>
-              </a:spcBef>
-              <a:defRPr sz="1050">
-                <a:solidFill>
-                  <a:srgbClr val="242424"/>
-                </a:solidFill>
-                <a:latin typeface="Aptos"/>
-              </a:defRPr>
-            </a:pPr>
-            <a:r>
-              <a:t>Coverage: Covered. Use the lab README to demonstrate or discuss this topic. Review terms: considerations, restrictions.</a:t>
+              <a:t>In the lab, you will apply this pattern, validate the expected behavior, and discuss where it fits in a real Power BI solution.</a:t>
             </a:r>
           </a:p>
         </p:txBody>
@@ -7959,42 +7703,6 @@
       </p:sp>
       <p:sp>
         <p:nvSpPr>
-          <p:cNvPr id="4" name="TextBox 3"/>
-          <p:cNvSpPr txBox="1"/>
-          <p:nvPr/>
-        </p:nvSpPr>
-        <p:spPr>
-          <a:xfrm>
-            <a:off x="530352" y="914400"/>
-            <a:ext cx="10515600" cy="320040"/>
-          </a:xfrm>
-          <a:prstGeom prst="rect">
-            <a:avLst/>
-          </a:prstGeom>
-          <a:noFill/>
-        </p:spPr>
-        <p:txBody>
-          <a:bodyPr wrap="none">
-            <a:spAutoFit/>
-          </a:bodyPr>
-          <a:lstStyle/>
-          <a:p>
-            <a:pPr>
-              <a:defRPr sz="1200">
-                <a:solidFill>
-                  <a:srgbClr val="5C5C5C"/>
-                </a:solidFill>
-                <a:latin typeface="Aptos"/>
-              </a:defRPr>
-            </a:pPr>
-            <a:r>
-              <a:t>Talking points, learner value, and lab connection</a:t>
-            </a:r>
-          </a:p>
-        </p:txBody>
-      </p:sp>
-      <p:sp>
-        <p:nvSpPr>
           <p:cNvPr id="5" name="Rounded Rectangle 4"/>
           <p:cNvSpPr/>
           <p:nvPr/>
@@ -8112,7 +7820,139 @@
               </a:defRPr>
             </a:pPr>
             <a:r>
-              <a:t>Talking points</a:t>
+              <a:t>Key ideas</a:t>
+            </a:r>
+            <a:br/>
+            <a:r>
+              <a:t>• Workspace setup</a:t>
+            </a:r>
+            <a:br/>
+            <a:r>
+              <a:t>• Refresh</a:t>
+            </a:r>
+          </a:p>
+        </p:txBody>
+      </p:sp>
+      <p:sp>
+        <p:nvSpPr>
+          <p:cNvPr id="8" name="Rounded Rectangle 7"/>
+          <p:cNvSpPr/>
+          <p:nvPr/>
+        </p:nvSpPr>
+        <p:spPr>
+          <a:xfrm>
+            <a:off x="6263640" y="1234440"/>
+            <a:ext cx="5303520" cy="1828800"/>
+          </a:xfrm>
+          <a:prstGeom prst="roundRect">
+            <a:avLst/>
+          </a:prstGeom>
+          <a:solidFill>
+            <a:srgbClr val="FFFFFF"/>
+          </a:solidFill>
+          <a:ln>
+            <a:solidFill>
+              <a:srgbClr val="DCDCDC"/>
+            </a:solidFill>
+          </a:ln>
+        </p:spPr>
+        <p:style>
+          <a:lnRef idx="1">
+            <a:schemeClr val="accent1"/>
+          </a:lnRef>
+          <a:fillRef idx="3">
+            <a:schemeClr val="accent1"/>
+          </a:fillRef>
+          <a:effectRef idx="2">
+            <a:schemeClr val="accent1"/>
+          </a:effectRef>
+          <a:fontRef idx="minor">
+            <a:schemeClr val="lt1"/>
+          </a:fontRef>
+        </p:style>
+        <p:txBody>
+          <a:bodyPr rtlCol="0" anchor="ctr"/>
+          <a:lstStyle/>
+          <a:p>
+            <a:pPr algn="ctr"/>
+          </a:p>
+        </p:txBody>
+      </p:sp>
+      <p:sp>
+        <p:nvSpPr>
+          <p:cNvPr id="9" name="Rectangle 8"/>
+          <p:cNvSpPr/>
+          <p:nvPr/>
+        </p:nvSpPr>
+        <p:spPr>
+          <a:xfrm>
+            <a:off x="6263640" y="1234440"/>
+            <a:ext cx="91440" cy="1828800"/>
+          </a:xfrm>
+          <a:prstGeom prst="rect">
+            <a:avLst/>
+          </a:prstGeom>
+          <a:solidFill>
+            <a:srgbClr val="02C39A"/>
+          </a:solidFill>
+          <a:ln>
+            <a:noFill/>
+          </a:ln>
+        </p:spPr>
+        <p:style>
+          <a:lnRef idx="1">
+            <a:schemeClr val="accent1"/>
+          </a:lnRef>
+          <a:fillRef idx="3">
+            <a:schemeClr val="accent1"/>
+          </a:fillRef>
+          <a:effectRef idx="2">
+            <a:schemeClr val="accent1"/>
+          </a:effectRef>
+          <a:fontRef idx="minor">
+            <a:schemeClr val="lt1"/>
+          </a:fontRef>
+        </p:style>
+        <p:txBody>
+          <a:bodyPr rtlCol="0" anchor="ctr"/>
+          <a:lstStyle/>
+          <a:p>
+            <a:pPr algn="ctr"/>
+          </a:p>
+        </p:txBody>
+      </p:sp>
+      <p:sp>
+        <p:nvSpPr>
+          <p:cNvPr id="10" name="TextBox 9"/>
+          <p:cNvSpPr txBox="1"/>
+          <p:nvPr/>
+        </p:nvSpPr>
+        <p:spPr>
+          <a:xfrm>
+            <a:off x="6446520" y="1344168"/>
+            <a:ext cx="4983480" cy="1664208"/>
+          </a:xfrm>
+          <a:prstGeom prst="rect">
+            <a:avLst/>
+          </a:prstGeom>
+          <a:noFill/>
+        </p:spPr>
+        <p:txBody>
+          <a:bodyPr wrap="square" lIns="0" rIns="0">
+            <a:spAutoFit/>
+          </a:bodyPr>
+          <a:lstStyle/>
+          <a:p>
+            <a:pPr>
+              <a:defRPr b="1" sz="1500">
+                <a:solidFill>
+                  <a:srgbClr val="1E2761"/>
+                </a:solidFill>
+                <a:latin typeface="Aptos Display"/>
+              </a:defRPr>
+            </a:pPr>
+            <a:r>
+              <a:t>Why it helps</a:t>
             </a:r>
           </a:p>
           <a:p>
@@ -8128,25 +7968,25 @@
               </a:defRPr>
             </a:pPr>
             <a:r>
-              <a:t>• Workspace setup</a:t>
+              <a:t>• App distribution</a:t>
             </a:r>
             <a:br/>
             <a:r>
-              <a:t>• Refresh</a:t>
-            </a:r>
-          </a:p>
-        </p:txBody>
-      </p:sp>
-      <p:sp>
-        <p:nvSpPr>
-          <p:cNvPr id="8" name="Rounded Rectangle 7"/>
+              <a:t>• Governance checklist</a:t>
+            </a:r>
+          </a:p>
+        </p:txBody>
+      </p:sp>
+      <p:sp>
+        <p:nvSpPr>
+          <p:cNvPr id="11" name="Rounded Rectangle 10"/>
           <p:cNvSpPr/>
           <p:nvPr/>
         </p:nvSpPr>
         <p:spPr>
           <a:xfrm>
-            <a:off x="6263640" y="1234440"/>
-            <a:ext cx="5303520" cy="1828800"/>
+            <a:off x="822960" y="4160520"/>
+            <a:ext cx="10424160" cy="868680"/>
           </a:xfrm>
           <a:prstGeom prst="roundRect">
             <a:avLst/>
@@ -8184,20 +8024,20 @@
       </p:sp>
       <p:sp>
         <p:nvSpPr>
-          <p:cNvPr id="9" name="Rectangle 8"/>
+          <p:cNvPr id="12" name="Rectangle 11"/>
           <p:cNvSpPr/>
           <p:nvPr/>
         </p:nvSpPr>
         <p:spPr>
           <a:xfrm>
-            <a:off x="6263640" y="1234440"/>
-            <a:ext cx="91440" cy="1828800"/>
+            <a:off x="822960" y="4160520"/>
+            <a:ext cx="91440" cy="868680"/>
           </a:xfrm>
           <a:prstGeom prst="rect">
             <a:avLst/>
           </a:prstGeom>
           <a:solidFill>
-            <a:srgbClr val="02C39A"/>
+            <a:srgbClr val="F9B700"/>
           </a:solidFill>
           <a:ln>
             <a:noFill/>
@@ -8227,14 +8067,14 @@
       </p:sp>
       <p:sp>
         <p:nvSpPr>
-          <p:cNvPr id="10" name="TextBox 9"/>
+          <p:cNvPr id="13" name="TextBox 12"/>
           <p:cNvSpPr txBox="1"/>
           <p:nvPr/>
         </p:nvSpPr>
         <p:spPr>
           <a:xfrm>
-            <a:off x="6446520" y="1344168"/>
-            <a:ext cx="4983480" cy="1664208"/>
+            <a:off x="1005840" y="4270248"/>
+            <a:ext cx="10104120" cy="704088"/>
           </a:xfrm>
           <a:prstGeom prst="rect">
             <a:avLst/>
@@ -8256,167 +8096,7 @@
               </a:defRPr>
             </a:pPr>
             <a:r>
-              <a:t>Why it helps</a:t>
-            </a:r>
-          </a:p>
-          <a:p>
-            <a:pPr>
-              <a:spcBef>
-                <a:spcPts val="400"/>
-              </a:spcBef>
-              <a:defRPr sz="1050">
-                <a:solidFill>
-                  <a:srgbClr val="242424"/>
-                </a:solidFill>
-                <a:latin typeface="Aptos"/>
-              </a:defRPr>
-            </a:pPr>
-            <a:r>
-              <a:t>• App distribution</a:t>
-            </a:r>
-            <a:br/>
-            <a:r>
-              <a:t>• Governance checklist</a:t>
-            </a:r>
-          </a:p>
-        </p:txBody>
-      </p:sp>
-      <p:sp>
-        <p:nvSpPr>
-          <p:cNvPr id="11" name="Rounded Rectangle 10"/>
-          <p:cNvSpPr/>
-          <p:nvPr/>
-        </p:nvSpPr>
-        <p:spPr>
-          <a:xfrm>
-            <a:off x="822960" y="4160520"/>
-            <a:ext cx="10424160" cy="868680"/>
-          </a:xfrm>
-          <a:prstGeom prst="roundRect">
-            <a:avLst/>
-          </a:prstGeom>
-          <a:solidFill>
-            <a:srgbClr val="FFFFFF"/>
-          </a:solidFill>
-          <a:ln>
-            <a:solidFill>
-              <a:srgbClr val="DCDCDC"/>
-            </a:solidFill>
-          </a:ln>
-        </p:spPr>
-        <p:style>
-          <a:lnRef idx="1">
-            <a:schemeClr val="accent1"/>
-          </a:lnRef>
-          <a:fillRef idx="3">
-            <a:schemeClr val="accent1"/>
-          </a:fillRef>
-          <a:effectRef idx="2">
-            <a:schemeClr val="accent1"/>
-          </a:effectRef>
-          <a:fontRef idx="minor">
-            <a:schemeClr val="lt1"/>
-          </a:fontRef>
-        </p:style>
-        <p:txBody>
-          <a:bodyPr rtlCol="0" anchor="ctr"/>
-          <a:lstStyle/>
-          <a:p>
-            <a:pPr algn="ctr"/>
-          </a:p>
-        </p:txBody>
-      </p:sp>
-      <p:sp>
-        <p:nvSpPr>
-          <p:cNvPr id="12" name="Rectangle 11"/>
-          <p:cNvSpPr/>
-          <p:nvPr/>
-        </p:nvSpPr>
-        <p:spPr>
-          <a:xfrm>
-            <a:off x="822960" y="4160520"/>
-            <a:ext cx="91440" cy="868680"/>
-          </a:xfrm>
-          <a:prstGeom prst="rect">
-            <a:avLst/>
-          </a:prstGeom>
-          <a:solidFill>
-            <a:srgbClr val="F9B700"/>
-          </a:solidFill>
-          <a:ln>
-            <a:noFill/>
-          </a:ln>
-        </p:spPr>
-        <p:style>
-          <a:lnRef idx="1">
-            <a:schemeClr val="accent1"/>
-          </a:lnRef>
-          <a:fillRef idx="3">
-            <a:schemeClr val="accent1"/>
-          </a:fillRef>
-          <a:effectRef idx="2">
-            <a:schemeClr val="accent1"/>
-          </a:effectRef>
-          <a:fontRef idx="minor">
-            <a:schemeClr val="lt1"/>
-          </a:fontRef>
-        </p:style>
-        <p:txBody>
-          <a:bodyPr rtlCol="0" anchor="ctr"/>
-          <a:lstStyle/>
-          <a:p>
-            <a:pPr algn="ctr"/>
-          </a:p>
-        </p:txBody>
-      </p:sp>
-      <p:sp>
-        <p:nvSpPr>
-          <p:cNvPr id="13" name="TextBox 12"/>
-          <p:cNvSpPr txBox="1"/>
-          <p:nvPr/>
-        </p:nvSpPr>
-        <p:spPr>
-          <a:xfrm>
-            <a:off x="1005840" y="4270248"/>
-            <a:ext cx="10104120" cy="704088"/>
-          </a:xfrm>
-          <a:prstGeom prst="rect">
-            <a:avLst/>
-          </a:prstGeom>
-          <a:noFill/>
-        </p:spPr>
-        <p:txBody>
-          <a:bodyPr wrap="square" lIns="0" rIns="0">
-            <a:spAutoFit/>
-          </a:bodyPr>
-          <a:lstStyle/>
-          <a:p>
-            <a:pPr>
-              <a:defRPr b="1" sz="1500">
-                <a:solidFill>
-                  <a:srgbClr val="1E2761"/>
-                </a:solidFill>
-                <a:latin typeface="Aptos Display"/>
-              </a:defRPr>
-            </a:pPr>
-            <a:r>
-              <a:t>Lab connection</a:t>
-            </a:r>
-          </a:p>
-          <a:p>
-            <a:pPr>
-              <a:spcBef>
-                <a:spcPts val="400"/>
-              </a:spcBef>
-              <a:defRPr sz="1050">
-                <a:solidFill>
-                  <a:srgbClr val="242424"/>
-                </a:solidFill>
-                <a:latin typeface="Aptos"/>
-              </a:defRPr>
-            </a:pPr>
-            <a:r>
-              <a:t>Coverage: Covered. Use the lab README to demonstrate or discuss this topic. Review terms: none.</a:t>
+              <a:t>In the lab, you will apply this pattern, validate the expected behavior, and discuss where it fits in a real Power BI solution.</a:t>
             </a:r>
           </a:p>
         </p:txBody>
@@ -9423,42 +9103,6 @@
       </p:sp>
       <p:sp>
         <p:nvSpPr>
-          <p:cNvPr id="4" name="TextBox 3"/>
-          <p:cNvSpPr txBox="1"/>
-          <p:nvPr/>
-        </p:nvSpPr>
-        <p:spPr>
-          <a:xfrm>
-            <a:off x="530352" y="914400"/>
-            <a:ext cx="10515600" cy="320040"/>
-          </a:xfrm>
-          <a:prstGeom prst="rect">
-            <a:avLst/>
-          </a:prstGeom>
-          <a:noFill/>
-        </p:spPr>
-        <p:txBody>
-          <a:bodyPr wrap="none">
-            <a:spAutoFit/>
-          </a:bodyPr>
-          <a:lstStyle/>
-          <a:p>
-            <a:pPr>
-              <a:defRPr sz="1200">
-                <a:solidFill>
-                  <a:srgbClr val="5C5C5C"/>
-                </a:solidFill>
-                <a:latin typeface="Aptos"/>
-              </a:defRPr>
-            </a:pPr>
-            <a:r>
-              <a:t>Use this to introduce the section before hands-on labs.</a:t>
-            </a:r>
-          </a:p>
-        </p:txBody>
-      </p:sp>
-      <p:sp>
-        <p:nvSpPr>
           <p:cNvPr id="5" name="Rounded Rectangle 4"/>
           <p:cNvSpPr/>
           <p:nvPr/>
@@ -10711,42 +10355,6 @@
       </p:sp>
       <p:sp>
         <p:nvSpPr>
-          <p:cNvPr id="4" name="TextBox 3"/>
-          <p:cNvSpPr txBox="1"/>
-          <p:nvPr/>
-        </p:nvSpPr>
-        <p:spPr>
-          <a:xfrm>
-            <a:off x="530352" y="914400"/>
-            <a:ext cx="10515600" cy="320040"/>
-          </a:xfrm>
-          <a:prstGeom prst="rect">
-            <a:avLst/>
-          </a:prstGeom>
-          <a:noFill/>
-        </p:spPr>
-        <p:txBody>
-          <a:bodyPr wrap="none">
-            <a:spAutoFit/>
-          </a:bodyPr>
-          <a:lstStyle/>
-          <a:p>
-            <a:pPr>
-              <a:defRPr sz="1200">
-                <a:solidFill>
-                  <a:srgbClr val="5C5C5C"/>
-                </a:solidFill>
-                <a:latin typeface="Aptos"/>
-              </a:defRPr>
-            </a:pPr>
-            <a:r>
-              <a:t>Talking points, learner value, and lab connection</a:t>
-            </a:r>
-          </a:p>
-        </p:txBody>
-      </p:sp>
-      <p:sp>
-        <p:nvSpPr>
           <p:cNvPr id="5" name="Rounded Rectangle 4"/>
           <p:cNvSpPr/>
           <p:nvPr/>
@@ -10864,7 +10472,139 @@
               </a:defRPr>
             </a:pPr>
             <a:r>
-              <a:t>Talking points</a:t>
+              <a:t>Key ideas</a:t>
+            </a:r>
+            <a:br/>
+            <a:r>
+              <a:t>• PBIP source of record</a:t>
+            </a:r>
+            <a:br/>
+            <a:r>
+              <a:t>• Publishing targets</a:t>
+            </a:r>
+          </a:p>
+        </p:txBody>
+      </p:sp>
+      <p:sp>
+        <p:nvSpPr>
+          <p:cNvPr id="8" name="Rounded Rectangle 7"/>
+          <p:cNvSpPr/>
+          <p:nvPr/>
+        </p:nvSpPr>
+        <p:spPr>
+          <a:xfrm>
+            <a:off x="6263640" y="1234440"/>
+            <a:ext cx="5303520" cy="1828800"/>
+          </a:xfrm>
+          <a:prstGeom prst="roundRect">
+            <a:avLst/>
+          </a:prstGeom>
+          <a:solidFill>
+            <a:srgbClr val="FFFFFF"/>
+          </a:solidFill>
+          <a:ln>
+            <a:solidFill>
+              <a:srgbClr val="DCDCDC"/>
+            </a:solidFill>
+          </a:ln>
+        </p:spPr>
+        <p:style>
+          <a:lnRef idx="1">
+            <a:schemeClr val="accent1"/>
+          </a:lnRef>
+          <a:fillRef idx="3">
+            <a:schemeClr val="accent1"/>
+          </a:fillRef>
+          <a:effectRef idx="2">
+            <a:schemeClr val="accent1"/>
+          </a:effectRef>
+          <a:fontRef idx="minor">
+            <a:schemeClr val="lt1"/>
+          </a:fontRef>
+        </p:style>
+        <p:txBody>
+          <a:bodyPr rtlCol="0" anchor="ctr"/>
+          <a:lstStyle/>
+          <a:p>
+            <a:pPr algn="ctr"/>
+          </a:p>
+        </p:txBody>
+      </p:sp>
+      <p:sp>
+        <p:nvSpPr>
+          <p:cNvPr id="9" name="Rectangle 8"/>
+          <p:cNvSpPr/>
+          <p:nvPr/>
+        </p:nvSpPr>
+        <p:spPr>
+          <a:xfrm>
+            <a:off x="6263640" y="1234440"/>
+            <a:ext cx="91440" cy="1828800"/>
+          </a:xfrm>
+          <a:prstGeom prst="rect">
+            <a:avLst/>
+          </a:prstGeom>
+          <a:solidFill>
+            <a:srgbClr val="02C39A"/>
+          </a:solidFill>
+          <a:ln>
+            <a:noFill/>
+          </a:ln>
+        </p:spPr>
+        <p:style>
+          <a:lnRef idx="1">
+            <a:schemeClr val="accent1"/>
+          </a:lnRef>
+          <a:fillRef idx="3">
+            <a:schemeClr val="accent1"/>
+          </a:fillRef>
+          <a:effectRef idx="2">
+            <a:schemeClr val="accent1"/>
+          </a:effectRef>
+          <a:fontRef idx="minor">
+            <a:schemeClr val="lt1"/>
+          </a:fontRef>
+        </p:style>
+        <p:txBody>
+          <a:bodyPr rtlCol="0" anchor="ctr"/>
+          <a:lstStyle/>
+          <a:p>
+            <a:pPr algn="ctr"/>
+          </a:p>
+        </p:txBody>
+      </p:sp>
+      <p:sp>
+        <p:nvSpPr>
+          <p:cNvPr id="10" name="TextBox 9"/>
+          <p:cNvSpPr txBox="1"/>
+          <p:nvPr/>
+        </p:nvSpPr>
+        <p:spPr>
+          <a:xfrm>
+            <a:off x="6446520" y="1344168"/>
+            <a:ext cx="4983480" cy="1664208"/>
+          </a:xfrm>
+          <a:prstGeom prst="rect">
+            <a:avLst/>
+          </a:prstGeom>
+          <a:noFill/>
+        </p:spPr>
+        <p:txBody>
+          <a:bodyPr wrap="square" lIns="0" rIns="0">
+            <a:spAutoFit/>
+          </a:bodyPr>
+          <a:lstStyle/>
+          <a:p>
+            <a:pPr>
+              <a:defRPr b="1" sz="1500">
+                <a:solidFill>
+                  <a:srgbClr val="1E2761"/>
+                </a:solidFill>
+                <a:latin typeface="Aptos Display"/>
+              </a:defRPr>
+            </a:pPr>
+            <a:r>
+              <a:t>Why it helps</a:t>
             </a:r>
           </a:p>
           <a:p>
@@ -10880,25 +10620,25 @@
               </a:defRPr>
             </a:pPr>
             <a:r>
-              <a:t>• PBIP source of record</a:t>
+              <a:t>• Ownership</a:t>
             </a:r>
             <a:br/>
             <a:r>
-              <a:t>• Publishing targets</a:t>
-            </a:r>
-          </a:p>
-        </p:txBody>
-      </p:sp>
-      <p:sp>
-        <p:nvSpPr>
-          <p:cNvPr id="8" name="Rounded Rectangle 7"/>
+              <a:t>• Supportability</a:t>
+            </a:r>
+          </a:p>
+        </p:txBody>
+      </p:sp>
+      <p:sp>
+        <p:nvSpPr>
+          <p:cNvPr id="11" name="Rounded Rectangle 10"/>
           <p:cNvSpPr/>
           <p:nvPr/>
         </p:nvSpPr>
         <p:spPr>
           <a:xfrm>
-            <a:off x="6263640" y="1234440"/>
-            <a:ext cx="5303520" cy="1828800"/>
+            <a:off x="822960" y="4160520"/>
+            <a:ext cx="10424160" cy="868680"/>
           </a:xfrm>
           <a:prstGeom prst="roundRect">
             <a:avLst/>
@@ -10936,20 +10676,20 @@
       </p:sp>
       <p:sp>
         <p:nvSpPr>
-          <p:cNvPr id="9" name="Rectangle 8"/>
+          <p:cNvPr id="12" name="Rectangle 11"/>
           <p:cNvSpPr/>
           <p:nvPr/>
         </p:nvSpPr>
         <p:spPr>
           <a:xfrm>
-            <a:off x="6263640" y="1234440"/>
-            <a:ext cx="91440" cy="1828800"/>
+            <a:off x="822960" y="4160520"/>
+            <a:ext cx="91440" cy="868680"/>
           </a:xfrm>
           <a:prstGeom prst="rect">
             <a:avLst/>
           </a:prstGeom>
           <a:solidFill>
-            <a:srgbClr val="02C39A"/>
+            <a:srgbClr val="F9B700"/>
           </a:solidFill>
           <a:ln>
             <a:noFill/>
@@ -10979,14 +10719,14 @@
       </p:sp>
       <p:sp>
         <p:nvSpPr>
-          <p:cNvPr id="10" name="TextBox 9"/>
+          <p:cNvPr id="13" name="TextBox 12"/>
           <p:cNvSpPr txBox="1"/>
           <p:nvPr/>
         </p:nvSpPr>
         <p:spPr>
           <a:xfrm>
-            <a:off x="6446520" y="1344168"/>
-            <a:ext cx="4983480" cy="1664208"/>
+            <a:off x="1005840" y="4270248"/>
+            <a:ext cx="10104120" cy="704088"/>
           </a:xfrm>
           <a:prstGeom prst="rect">
             <a:avLst/>
@@ -11008,167 +10748,7 @@
               </a:defRPr>
             </a:pPr>
             <a:r>
-              <a:t>Why it helps</a:t>
-            </a:r>
-          </a:p>
-          <a:p>
-            <a:pPr>
-              <a:spcBef>
-                <a:spcPts val="400"/>
-              </a:spcBef>
-              <a:defRPr sz="1050">
-                <a:solidFill>
-                  <a:srgbClr val="242424"/>
-                </a:solidFill>
-                <a:latin typeface="Aptos"/>
-              </a:defRPr>
-            </a:pPr>
-            <a:r>
-              <a:t>• Ownership</a:t>
-            </a:r>
-            <a:br/>
-            <a:r>
-              <a:t>• Supportability</a:t>
-            </a:r>
-          </a:p>
-        </p:txBody>
-      </p:sp>
-      <p:sp>
-        <p:nvSpPr>
-          <p:cNvPr id="11" name="Rounded Rectangle 10"/>
-          <p:cNvSpPr/>
-          <p:nvPr/>
-        </p:nvSpPr>
-        <p:spPr>
-          <a:xfrm>
-            <a:off x="822960" y="4160520"/>
-            <a:ext cx="10424160" cy="868680"/>
-          </a:xfrm>
-          <a:prstGeom prst="roundRect">
-            <a:avLst/>
-          </a:prstGeom>
-          <a:solidFill>
-            <a:srgbClr val="FFFFFF"/>
-          </a:solidFill>
-          <a:ln>
-            <a:solidFill>
-              <a:srgbClr val="DCDCDC"/>
-            </a:solidFill>
-          </a:ln>
-        </p:spPr>
-        <p:style>
-          <a:lnRef idx="1">
-            <a:schemeClr val="accent1"/>
-          </a:lnRef>
-          <a:fillRef idx="3">
-            <a:schemeClr val="accent1"/>
-          </a:fillRef>
-          <a:effectRef idx="2">
-            <a:schemeClr val="accent1"/>
-          </a:effectRef>
-          <a:fontRef idx="minor">
-            <a:schemeClr val="lt1"/>
-          </a:fontRef>
-        </p:style>
-        <p:txBody>
-          <a:bodyPr rtlCol="0" anchor="ctr"/>
-          <a:lstStyle/>
-          <a:p>
-            <a:pPr algn="ctr"/>
-          </a:p>
-        </p:txBody>
-      </p:sp>
-      <p:sp>
-        <p:nvSpPr>
-          <p:cNvPr id="12" name="Rectangle 11"/>
-          <p:cNvSpPr/>
-          <p:nvPr/>
-        </p:nvSpPr>
-        <p:spPr>
-          <a:xfrm>
-            <a:off x="822960" y="4160520"/>
-            <a:ext cx="91440" cy="868680"/>
-          </a:xfrm>
-          <a:prstGeom prst="rect">
-            <a:avLst/>
-          </a:prstGeom>
-          <a:solidFill>
-            <a:srgbClr val="F9B700"/>
-          </a:solidFill>
-          <a:ln>
-            <a:noFill/>
-          </a:ln>
-        </p:spPr>
-        <p:style>
-          <a:lnRef idx="1">
-            <a:schemeClr val="accent1"/>
-          </a:lnRef>
-          <a:fillRef idx="3">
-            <a:schemeClr val="accent1"/>
-          </a:fillRef>
-          <a:effectRef idx="2">
-            <a:schemeClr val="accent1"/>
-          </a:effectRef>
-          <a:fontRef idx="minor">
-            <a:schemeClr val="lt1"/>
-          </a:fontRef>
-        </p:style>
-        <p:txBody>
-          <a:bodyPr rtlCol="0" anchor="ctr"/>
-          <a:lstStyle/>
-          <a:p>
-            <a:pPr algn="ctr"/>
-          </a:p>
-        </p:txBody>
-      </p:sp>
-      <p:sp>
-        <p:nvSpPr>
-          <p:cNvPr id="13" name="TextBox 12"/>
-          <p:cNvSpPr txBox="1"/>
-          <p:nvPr/>
-        </p:nvSpPr>
-        <p:spPr>
-          <a:xfrm>
-            <a:off x="1005840" y="4270248"/>
-            <a:ext cx="10104120" cy="704088"/>
-          </a:xfrm>
-          <a:prstGeom prst="rect">
-            <a:avLst/>
-          </a:prstGeom>
-          <a:noFill/>
-        </p:spPr>
-        <p:txBody>
-          <a:bodyPr wrap="square" lIns="0" rIns="0">
-            <a:spAutoFit/>
-          </a:bodyPr>
-          <a:lstStyle/>
-          <a:p>
-            <a:pPr>
-              <a:defRPr b="1" sz="1500">
-                <a:solidFill>
-                  <a:srgbClr val="1E2761"/>
-                </a:solidFill>
-                <a:latin typeface="Aptos Display"/>
-              </a:defRPr>
-            </a:pPr>
-            <a:r>
-              <a:t>Lab connection</a:t>
-            </a:r>
-          </a:p>
-          <a:p>
-            <a:pPr>
-              <a:spcBef>
-                <a:spcPts val="400"/>
-              </a:spcBef>
-              <a:defRPr sz="1050">
-                <a:solidFill>
-                  <a:srgbClr val="242424"/>
-                </a:solidFill>
-                <a:latin typeface="Aptos"/>
-              </a:defRPr>
-            </a:pPr>
-            <a:r>
-              <a:t>Coverage: Covered. Use the lab README to demonstrate or discuss this topic. Review terms: authoring, supportability, targets.</a:t>
+              <a:t>In the lab, you will apply this pattern, validate the expected behavior, and discuss where it fits in a real Power BI solution.</a:t>
             </a:r>
           </a:p>
         </p:txBody>
@@ -11307,42 +10887,6 @@
       </p:sp>
       <p:sp>
         <p:nvSpPr>
-          <p:cNvPr id="4" name="TextBox 3"/>
-          <p:cNvSpPr txBox="1"/>
-          <p:nvPr/>
-        </p:nvSpPr>
-        <p:spPr>
-          <a:xfrm>
-            <a:off x="530352" y="914400"/>
-            <a:ext cx="10515600" cy="320040"/>
-          </a:xfrm>
-          <a:prstGeom prst="rect">
-            <a:avLst/>
-          </a:prstGeom>
-          <a:noFill/>
-        </p:spPr>
-        <p:txBody>
-          <a:bodyPr wrap="none">
-            <a:spAutoFit/>
-          </a:bodyPr>
-          <a:lstStyle/>
-          <a:p>
-            <a:pPr>
-              <a:defRPr sz="1200">
-                <a:solidFill>
-                  <a:srgbClr val="5C5C5C"/>
-                </a:solidFill>
-                <a:latin typeface="Aptos"/>
-              </a:defRPr>
-            </a:pPr>
-            <a:r>
-              <a:t>Talking points, learner value, and lab connection</a:t>
-            </a:r>
-          </a:p>
-        </p:txBody>
-      </p:sp>
-      <p:sp>
-        <p:nvSpPr>
           <p:cNvPr id="5" name="Rounded Rectangle 4"/>
           <p:cNvSpPr/>
           <p:nvPr/>
@@ -11460,7 +11004,139 @@
               </a:defRPr>
             </a:pPr>
             <a:r>
-              <a:t>Talking points</a:t>
+              <a:t>Key ideas</a:t>
+            </a:r>
+            <a:br/>
+            <a:r>
+              <a:t>• Development, test, production</a:t>
+            </a:r>
+            <a:br/>
+            <a:r>
+              <a:t>• Domain or subject-area workspaces</a:t>
+            </a:r>
+          </a:p>
+        </p:txBody>
+      </p:sp>
+      <p:sp>
+        <p:nvSpPr>
+          <p:cNvPr id="8" name="Rounded Rectangle 7"/>
+          <p:cNvSpPr/>
+          <p:nvPr/>
+        </p:nvSpPr>
+        <p:spPr>
+          <a:xfrm>
+            <a:off x="6263640" y="1234440"/>
+            <a:ext cx="5303520" cy="1828800"/>
+          </a:xfrm>
+          <a:prstGeom prst="roundRect">
+            <a:avLst/>
+          </a:prstGeom>
+          <a:solidFill>
+            <a:srgbClr val="FFFFFF"/>
+          </a:solidFill>
+          <a:ln>
+            <a:solidFill>
+              <a:srgbClr val="DCDCDC"/>
+            </a:solidFill>
+          </a:ln>
+        </p:spPr>
+        <p:style>
+          <a:lnRef idx="1">
+            <a:schemeClr val="accent1"/>
+          </a:lnRef>
+          <a:fillRef idx="3">
+            <a:schemeClr val="accent1"/>
+          </a:fillRef>
+          <a:effectRef idx="2">
+            <a:schemeClr val="accent1"/>
+          </a:effectRef>
+          <a:fontRef idx="minor">
+            <a:schemeClr val="lt1"/>
+          </a:fontRef>
+        </p:style>
+        <p:txBody>
+          <a:bodyPr rtlCol="0" anchor="ctr"/>
+          <a:lstStyle/>
+          <a:p>
+            <a:pPr algn="ctr"/>
+          </a:p>
+        </p:txBody>
+      </p:sp>
+      <p:sp>
+        <p:nvSpPr>
+          <p:cNvPr id="9" name="Rectangle 8"/>
+          <p:cNvSpPr/>
+          <p:nvPr/>
+        </p:nvSpPr>
+        <p:spPr>
+          <a:xfrm>
+            <a:off x="6263640" y="1234440"/>
+            <a:ext cx="91440" cy="1828800"/>
+          </a:xfrm>
+          <a:prstGeom prst="rect">
+            <a:avLst/>
+          </a:prstGeom>
+          <a:solidFill>
+            <a:srgbClr val="02C39A"/>
+          </a:solidFill>
+          <a:ln>
+            <a:noFill/>
+          </a:ln>
+        </p:spPr>
+        <p:style>
+          <a:lnRef idx="1">
+            <a:schemeClr val="accent1"/>
+          </a:lnRef>
+          <a:fillRef idx="3">
+            <a:schemeClr val="accent1"/>
+          </a:fillRef>
+          <a:effectRef idx="2">
+            <a:schemeClr val="accent1"/>
+          </a:effectRef>
+          <a:fontRef idx="minor">
+            <a:schemeClr val="lt1"/>
+          </a:fontRef>
+        </p:style>
+        <p:txBody>
+          <a:bodyPr rtlCol="0" anchor="ctr"/>
+          <a:lstStyle/>
+          <a:p>
+            <a:pPr algn="ctr"/>
+          </a:p>
+        </p:txBody>
+      </p:sp>
+      <p:sp>
+        <p:nvSpPr>
+          <p:cNvPr id="10" name="TextBox 9"/>
+          <p:cNvSpPr txBox="1"/>
+          <p:nvPr/>
+        </p:nvSpPr>
+        <p:spPr>
+          <a:xfrm>
+            <a:off x="6446520" y="1344168"/>
+            <a:ext cx="4983480" cy="1664208"/>
+          </a:xfrm>
+          <a:prstGeom prst="rect">
+            <a:avLst/>
+          </a:prstGeom>
+          <a:noFill/>
+        </p:spPr>
+        <p:txBody>
+          <a:bodyPr wrap="square" lIns="0" rIns="0">
+            <a:spAutoFit/>
+          </a:bodyPr>
+          <a:lstStyle/>
+          <a:p>
+            <a:pPr>
+              <a:defRPr b="1" sz="1500">
+                <a:solidFill>
+                  <a:srgbClr val="1E2761"/>
+                </a:solidFill>
+                <a:latin typeface="Aptos Display"/>
+              </a:defRPr>
+            </a:pPr>
+            <a:r>
+              <a:t>Why it helps</a:t>
             </a:r>
           </a:p>
           <a:p>
@@ -11476,25 +11152,25 @@
               </a:defRPr>
             </a:pPr>
             <a:r>
-              <a:t>• Development, test, production</a:t>
+              <a:t>• Naming conventions</a:t>
             </a:r>
             <a:br/>
             <a:r>
-              <a:t>• Domain or subject-area workspaces</a:t>
-            </a:r>
-          </a:p>
-        </p:txBody>
-      </p:sp>
-      <p:sp>
-        <p:nvSpPr>
-          <p:cNvPr id="8" name="Rounded Rectangle 7"/>
+              <a:t>• Ownership model</a:t>
+            </a:r>
+          </a:p>
+        </p:txBody>
+      </p:sp>
+      <p:sp>
+        <p:nvSpPr>
+          <p:cNvPr id="11" name="Rounded Rectangle 10"/>
           <p:cNvSpPr/>
           <p:nvPr/>
         </p:nvSpPr>
         <p:spPr>
           <a:xfrm>
-            <a:off x="6263640" y="1234440"/>
-            <a:ext cx="5303520" cy="1828800"/>
+            <a:off x="822960" y="4160520"/>
+            <a:ext cx="10424160" cy="868680"/>
           </a:xfrm>
           <a:prstGeom prst="roundRect">
             <a:avLst/>
@@ -11532,20 +11208,20 @@
       </p:sp>
       <p:sp>
         <p:nvSpPr>
-          <p:cNvPr id="9" name="Rectangle 8"/>
+          <p:cNvPr id="12" name="Rectangle 11"/>
           <p:cNvSpPr/>
           <p:nvPr/>
         </p:nvSpPr>
         <p:spPr>
           <a:xfrm>
-            <a:off x="6263640" y="1234440"/>
-            <a:ext cx="91440" cy="1828800"/>
+            <a:off x="822960" y="4160520"/>
+            <a:ext cx="91440" cy="868680"/>
           </a:xfrm>
           <a:prstGeom prst="rect">
             <a:avLst/>
           </a:prstGeom>
           <a:solidFill>
-            <a:srgbClr val="02C39A"/>
+            <a:srgbClr val="F9B700"/>
           </a:solidFill>
           <a:ln>
             <a:noFill/>
@@ -11575,14 +11251,14 @@
       </p:sp>
       <p:sp>
         <p:nvSpPr>
-          <p:cNvPr id="10" name="TextBox 9"/>
+          <p:cNvPr id="13" name="TextBox 12"/>
           <p:cNvSpPr txBox="1"/>
           <p:nvPr/>
         </p:nvSpPr>
         <p:spPr>
           <a:xfrm>
-            <a:off x="6446520" y="1344168"/>
-            <a:ext cx="4983480" cy="1664208"/>
+            <a:off x="1005840" y="4270248"/>
+            <a:ext cx="10104120" cy="704088"/>
           </a:xfrm>
           <a:prstGeom prst="rect">
             <a:avLst/>
@@ -11604,167 +11280,7 @@
               </a:defRPr>
             </a:pPr>
             <a:r>
-              <a:t>Why it helps</a:t>
-            </a:r>
-          </a:p>
-          <a:p>
-            <a:pPr>
-              <a:spcBef>
-                <a:spcPts val="400"/>
-              </a:spcBef>
-              <a:defRPr sz="1050">
-                <a:solidFill>
-                  <a:srgbClr val="242424"/>
-                </a:solidFill>
-                <a:latin typeface="Aptos"/>
-              </a:defRPr>
-            </a:pPr>
-            <a:r>
-              <a:t>• Naming conventions</a:t>
-            </a:r>
-            <a:br/>
-            <a:r>
-              <a:t>• Ownership model</a:t>
-            </a:r>
-          </a:p>
-        </p:txBody>
-      </p:sp>
-      <p:sp>
-        <p:nvSpPr>
-          <p:cNvPr id="11" name="Rounded Rectangle 10"/>
-          <p:cNvSpPr/>
-          <p:nvPr/>
-        </p:nvSpPr>
-        <p:spPr>
-          <a:xfrm>
-            <a:off x="822960" y="4160520"/>
-            <a:ext cx="10424160" cy="868680"/>
-          </a:xfrm>
-          <a:prstGeom prst="roundRect">
-            <a:avLst/>
-          </a:prstGeom>
-          <a:solidFill>
-            <a:srgbClr val="FFFFFF"/>
-          </a:solidFill>
-          <a:ln>
-            <a:solidFill>
-              <a:srgbClr val="DCDCDC"/>
-            </a:solidFill>
-          </a:ln>
-        </p:spPr>
-        <p:style>
-          <a:lnRef idx="1">
-            <a:schemeClr val="accent1"/>
-          </a:lnRef>
-          <a:fillRef idx="3">
-            <a:schemeClr val="accent1"/>
-          </a:fillRef>
-          <a:effectRef idx="2">
-            <a:schemeClr val="accent1"/>
-          </a:effectRef>
-          <a:fontRef idx="minor">
-            <a:schemeClr val="lt1"/>
-          </a:fontRef>
-        </p:style>
-        <p:txBody>
-          <a:bodyPr rtlCol="0" anchor="ctr"/>
-          <a:lstStyle/>
-          <a:p>
-            <a:pPr algn="ctr"/>
-          </a:p>
-        </p:txBody>
-      </p:sp>
-      <p:sp>
-        <p:nvSpPr>
-          <p:cNvPr id="12" name="Rectangle 11"/>
-          <p:cNvSpPr/>
-          <p:nvPr/>
-        </p:nvSpPr>
-        <p:spPr>
-          <a:xfrm>
-            <a:off x="822960" y="4160520"/>
-            <a:ext cx="91440" cy="868680"/>
-          </a:xfrm>
-          <a:prstGeom prst="rect">
-            <a:avLst/>
-          </a:prstGeom>
-          <a:solidFill>
-            <a:srgbClr val="F9B700"/>
-          </a:solidFill>
-          <a:ln>
-            <a:noFill/>
-          </a:ln>
-        </p:spPr>
-        <p:style>
-          <a:lnRef idx="1">
-            <a:schemeClr val="accent1"/>
-          </a:lnRef>
-          <a:fillRef idx="3">
-            <a:schemeClr val="accent1"/>
-          </a:fillRef>
-          <a:effectRef idx="2">
-            <a:schemeClr val="accent1"/>
-          </a:effectRef>
-          <a:fontRef idx="minor">
-            <a:schemeClr val="lt1"/>
-          </a:fontRef>
-        </p:style>
-        <p:txBody>
-          <a:bodyPr rtlCol="0" anchor="ctr"/>
-          <a:lstStyle/>
-          <a:p>
-            <a:pPr algn="ctr"/>
-          </a:p>
-        </p:txBody>
-      </p:sp>
-      <p:sp>
-        <p:nvSpPr>
-          <p:cNvPr id="13" name="TextBox 12"/>
-          <p:cNvSpPr txBox="1"/>
-          <p:nvPr/>
-        </p:nvSpPr>
-        <p:spPr>
-          <a:xfrm>
-            <a:off x="1005840" y="4270248"/>
-            <a:ext cx="10104120" cy="704088"/>
-          </a:xfrm>
-          <a:prstGeom prst="rect">
-            <a:avLst/>
-          </a:prstGeom>
-          <a:noFill/>
-        </p:spPr>
-        <p:txBody>
-          <a:bodyPr wrap="square" lIns="0" rIns="0">
-            <a:spAutoFit/>
-          </a:bodyPr>
-          <a:lstStyle/>
-          <a:p>
-            <a:pPr>
-              <a:defRPr b="1" sz="1500">
-                <a:solidFill>
-                  <a:srgbClr val="1E2761"/>
-                </a:solidFill>
-                <a:latin typeface="Aptos Display"/>
-              </a:defRPr>
-            </a:pPr>
-            <a:r>
-              <a:t>Lab connection</a:t>
-            </a:r>
-          </a:p>
-          <a:p>
-            <a:pPr>
-              <a:spcBef>
-                <a:spcPts val="400"/>
-              </a:spcBef>
-              <a:defRPr sz="1050">
-                <a:solidFill>
-                  <a:srgbClr val="242424"/>
-                </a:solidFill>
-                <a:latin typeface="Aptos"/>
-              </a:defRPr>
-            </a:pPr>
-            <a:r>
-              <a:t>Coverage: Partial. Use the lab README to demonstrate or discuss this topic. Review terms: conventions, design, domain, naming, production.</a:t>
+              <a:t>In the lab, you will apply this pattern, validate the expected behavior, and discuss where it fits in a real Power BI solution.</a:t>
             </a:r>
           </a:p>
         </p:txBody>
@@ -11903,42 +11419,6 @@
       </p:sp>
       <p:sp>
         <p:nvSpPr>
-          <p:cNvPr id="4" name="TextBox 3"/>
-          <p:cNvSpPr txBox="1"/>
-          <p:nvPr/>
-        </p:nvSpPr>
-        <p:spPr>
-          <a:xfrm>
-            <a:off x="530352" y="914400"/>
-            <a:ext cx="10515600" cy="320040"/>
-          </a:xfrm>
-          <a:prstGeom prst="rect">
-            <a:avLst/>
-          </a:prstGeom>
-          <a:noFill/>
-        </p:spPr>
-        <p:txBody>
-          <a:bodyPr wrap="none">
-            <a:spAutoFit/>
-          </a:bodyPr>
-          <a:lstStyle/>
-          <a:p>
-            <a:pPr>
-              <a:defRPr sz="1200">
-                <a:solidFill>
-                  <a:srgbClr val="5C5C5C"/>
-                </a:solidFill>
-                <a:latin typeface="Aptos"/>
-              </a:defRPr>
-            </a:pPr>
-            <a:r>
-              <a:t>Talking points, learner value, and lab connection</a:t>
-            </a:r>
-          </a:p>
-        </p:txBody>
-      </p:sp>
-      <p:sp>
-        <p:nvSpPr>
           <p:cNvPr id="5" name="Rounded Rectangle 4"/>
           <p:cNvSpPr/>
           <p:nvPr/>
@@ -12056,7 +11536,143 @@
               </a:defRPr>
             </a:pPr>
             <a:r>
-              <a:t>Talking points</a:t>
+              <a:t>Key ideas</a:t>
+            </a:r>
+            <a:br/>
+            <a:r>
+              <a:t>• Admin</a:t>
+            </a:r>
+            <a:br/>
+            <a:r>
+              <a:t>• Member</a:t>
+            </a:r>
+            <a:br/>
+            <a:r>
+              <a:t>• Contributor</a:t>
+            </a:r>
+          </a:p>
+        </p:txBody>
+      </p:sp>
+      <p:sp>
+        <p:nvSpPr>
+          <p:cNvPr id="8" name="Rounded Rectangle 7"/>
+          <p:cNvSpPr/>
+          <p:nvPr/>
+        </p:nvSpPr>
+        <p:spPr>
+          <a:xfrm>
+            <a:off x="6263640" y="1234440"/>
+            <a:ext cx="5303520" cy="1828800"/>
+          </a:xfrm>
+          <a:prstGeom prst="roundRect">
+            <a:avLst/>
+          </a:prstGeom>
+          <a:solidFill>
+            <a:srgbClr val="FFFFFF"/>
+          </a:solidFill>
+          <a:ln>
+            <a:solidFill>
+              <a:srgbClr val="DCDCDC"/>
+            </a:solidFill>
+          </a:ln>
+        </p:spPr>
+        <p:style>
+          <a:lnRef idx="1">
+            <a:schemeClr val="accent1"/>
+          </a:lnRef>
+          <a:fillRef idx="3">
+            <a:schemeClr val="accent1"/>
+          </a:fillRef>
+          <a:effectRef idx="2">
+            <a:schemeClr val="accent1"/>
+          </a:effectRef>
+          <a:fontRef idx="minor">
+            <a:schemeClr val="lt1"/>
+          </a:fontRef>
+        </p:style>
+        <p:txBody>
+          <a:bodyPr rtlCol="0" anchor="ctr"/>
+          <a:lstStyle/>
+          <a:p>
+            <a:pPr algn="ctr"/>
+          </a:p>
+        </p:txBody>
+      </p:sp>
+      <p:sp>
+        <p:nvSpPr>
+          <p:cNvPr id="9" name="Rectangle 8"/>
+          <p:cNvSpPr/>
+          <p:nvPr/>
+        </p:nvSpPr>
+        <p:spPr>
+          <a:xfrm>
+            <a:off x="6263640" y="1234440"/>
+            <a:ext cx="91440" cy="1828800"/>
+          </a:xfrm>
+          <a:prstGeom prst="rect">
+            <a:avLst/>
+          </a:prstGeom>
+          <a:solidFill>
+            <a:srgbClr val="02C39A"/>
+          </a:solidFill>
+          <a:ln>
+            <a:noFill/>
+          </a:ln>
+        </p:spPr>
+        <p:style>
+          <a:lnRef idx="1">
+            <a:schemeClr val="accent1"/>
+          </a:lnRef>
+          <a:fillRef idx="3">
+            <a:schemeClr val="accent1"/>
+          </a:fillRef>
+          <a:effectRef idx="2">
+            <a:schemeClr val="accent1"/>
+          </a:effectRef>
+          <a:fontRef idx="minor">
+            <a:schemeClr val="lt1"/>
+          </a:fontRef>
+        </p:style>
+        <p:txBody>
+          <a:bodyPr rtlCol="0" anchor="ctr"/>
+          <a:lstStyle/>
+          <a:p>
+            <a:pPr algn="ctr"/>
+          </a:p>
+        </p:txBody>
+      </p:sp>
+      <p:sp>
+        <p:nvSpPr>
+          <p:cNvPr id="10" name="TextBox 9"/>
+          <p:cNvSpPr txBox="1"/>
+          <p:nvPr/>
+        </p:nvSpPr>
+        <p:spPr>
+          <a:xfrm>
+            <a:off x="6446520" y="1344168"/>
+            <a:ext cx="4983480" cy="1664208"/>
+          </a:xfrm>
+          <a:prstGeom prst="rect">
+            <a:avLst/>
+          </a:prstGeom>
+          <a:noFill/>
+        </p:spPr>
+        <p:txBody>
+          <a:bodyPr wrap="square" lIns="0" rIns="0">
+            <a:spAutoFit/>
+          </a:bodyPr>
+          <a:lstStyle/>
+          <a:p>
+            <a:pPr>
+              <a:defRPr b="1" sz="1500">
+                <a:solidFill>
+                  <a:srgbClr val="1E2761"/>
+                </a:solidFill>
+                <a:latin typeface="Aptos Display"/>
+              </a:defRPr>
+            </a:pPr>
+            <a:r>
+              <a:t>Why it helps</a:t>
             </a:r>
           </a:p>
           <a:p>
@@ -12072,29 +11688,25 @@
               </a:defRPr>
             </a:pPr>
             <a:r>
-              <a:t>• Admin</a:t>
+              <a:t>• Viewer</a:t>
             </a:r>
             <a:br/>
             <a:r>
-              <a:t>• Member</a:t>
-            </a:r>
-            <a:br/>
-            <a:r>
-              <a:t>• Contributor</a:t>
-            </a:r>
-          </a:p>
-        </p:txBody>
-      </p:sp>
-      <p:sp>
-        <p:nvSpPr>
-          <p:cNvPr id="8" name="Rounded Rectangle 7"/>
+              <a:t>• Security implications</a:t>
+            </a:r>
+          </a:p>
+        </p:txBody>
+      </p:sp>
+      <p:sp>
+        <p:nvSpPr>
+          <p:cNvPr id="11" name="Rounded Rectangle 10"/>
           <p:cNvSpPr/>
           <p:nvPr/>
         </p:nvSpPr>
         <p:spPr>
           <a:xfrm>
-            <a:off x="6263640" y="1234440"/>
-            <a:ext cx="5303520" cy="1828800"/>
+            <a:off x="822960" y="4160520"/>
+            <a:ext cx="10424160" cy="868680"/>
           </a:xfrm>
           <a:prstGeom prst="roundRect">
             <a:avLst/>
@@ -12132,20 +11744,20 @@
       </p:sp>
       <p:sp>
         <p:nvSpPr>
-          <p:cNvPr id="9" name="Rectangle 8"/>
+          <p:cNvPr id="12" name="Rectangle 11"/>
           <p:cNvSpPr/>
           <p:nvPr/>
         </p:nvSpPr>
         <p:spPr>
           <a:xfrm>
-            <a:off x="6263640" y="1234440"/>
-            <a:ext cx="91440" cy="1828800"/>
+            <a:off x="822960" y="4160520"/>
+            <a:ext cx="91440" cy="868680"/>
           </a:xfrm>
           <a:prstGeom prst="rect">
             <a:avLst/>
           </a:prstGeom>
           <a:solidFill>
-            <a:srgbClr val="02C39A"/>
+            <a:srgbClr val="F9B700"/>
           </a:solidFill>
           <a:ln>
             <a:noFill/>
@@ -12175,14 +11787,14 @@
       </p:sp>
       <p:sp>
         <p:nvSpPr>
-          <p:cNvPr id="10" name="TextBox 9"/>
+          <p:cNvPr id="13" name="TextBox 12"/>
           <p:cNvSpPr txBox="1"/>
           <p:nvPr/>
         </p:nvSpPr>
         <p:spPr>
           <a:xfrm>
-            <a:off x="6446520" y="1344168"/>
-            <a:ext cx="4983480" cy="1664208"/>
+            <a:off x="1005840" y="4270248"/>
+            <a:ext cx="10104120" cy="704088"/>
           </a:xfrm>
           <a:prstGeom prst="rect">
             <a:avLst/>
@@ -12204,167 +11816,7 @@
               </a:defRPr>
             </a:pPr>
             <a:r>
-              <a:t>Why it helps</a:t>
-            </a:r>
-          </a:p>
-          <a:p>
-            <a:pPr>
-              <a:spcBef>
-                <a:spcPts val="400"/>
-              </a:spcBef>
-              <a:defRPr sz="1050">
-                <a:solidFill>
-                  <a:srgbClr val="242424"/>
-                </a:solidFill>
-                <a:latin typeface="Aptos"/>
-              </a:defRPr>
-            </a:pPr>
-            <a:r>
-              <a:t>• Viewer</a:t>
-            </a:r>
-            <a:br/>
-            <a:r>
-              <a:t>• Security implications</a:t>
-            </a:r>
-          </a:p>
-        </p:txBody>
-      </p:sp>
-      <p:sp>
-        <p:nvSpPr>
-          <p:cNvPr id="11" name="Rounded Rectangle 10"/>
-          <p:cNvSpPr/>
-          <p:nvPr/>
-        </p:nvSpPr>
-        <p:spPr>
-          <a:xfrm>
-            <a:off x="822960" y="4160520"/>
-            <a:ext cx="10424160" cy="868680"/>
-          </a:xfrm>
-          <a:prstGeom prst="roundRect">
-            <a:avLst/>
-          </a:prstGeom>
-          <a:solidFill>
-            <a:srgbClr val="FFFFFF"/>
-          </a:solidFill>
-          <a:ln>
-            <a:solidFill>
-              <a:srgbClr val="DCDCDC"/>
-            </a:solidFill>
-          </a:ln>
-        </p:spPr>
-        <p:style>
-          <a:lnRef idx="1">
-            <a:schemeClr val="accent1"/>
-          </a:lnRef>
-          <a:fillRef idx="3">
-            <a:schemeClr val="accent1"/>
-          </a:fillRef>
-          <a:effectRef idx="2">
-            <a:schemeClr val="accent1"/>
-          </a:effectRef>
-          <a:fontRef idx="minor">
-            <a:schemeClr val="lt1"/>
-          </a:fontRef>
-        </p:style>
-        <p:txBody>
-          <a:bodyPr rtlCol="0" anchor="ctr"/>
-          <a:lstStyle/>
-          <a:p>
-            <a:pPr algn="ctr"/>
-          </a:p>
-        </p:txBody>
-      </p:sp>
-      <p:sp>
-        <p:nvSpPr>
-          <p:cNvPr id="12" name="Rectangle 11"/>
-          <p:cNvSpPr/>
-          <p:nvPr/>
-        </p:nvSpPr>
-        <p:spPr>
-          <a:xfrm>
-            <a:off x="822960" y="4160520"/>
-            <a:ext cx="91440" cy="868680"/>
-          </a:xfrm>
-          <a:prstGeom prst="rect">
-            <a:avLst/>
-          </a:prstGeom>
-          <a:solidFill>
-            <a:srgbClr val="F9B700"/>
-          </a:solidFill>
-          <a:ln>
-            <a:noFill/>
-          </a:ln>
-        </p:spPr>
-        <p:style>
-          <a:lnRef idx="1">
-            <a:schemeClr val="accent1"/>
-          </a:lnRef>
-          <a:fillRef idx="3">
-            <a:schemeClr val="accent1"/>
-          </a:fillRef>
-          <a:effectRef idx="2">
-            <a:schemeClr val="accent1"/>
-          </a:effectRef>
-          <a:fontRef idx="minor">
-            <a:schemeClr val="lt1"/>
-          </a:fontRef>
-        </p:style>
-        <p:txBody>
-          <a:bodyPr rtlCol="0" anchor="ctr"/>
-          <a:lstStyle/>
-          <a:p>
-            <a:pPr algn="ctr"/>
-          </a:p>
-        </p:txBody>
-      </p:sp>
-      <p:sp>
-        <p:nvSpPr>
-          <p:cNvPr id="13" name="TextBox 12"/>
-          <p:cNvSpPr txBox="1"/>
-          <p:nvPr/>
-        </p:nvSpPr>
-        <p:spPr>
-          <a:xfrm>
-            <a:off x="1005840" y="4270248"/>
-            <a:ext cx="10104120" cy="704088"/>
-          </a:xfrm>
-          <a:prstGeom prst="rect">
-            <a:avLst/>
-          </a:prstGeom>
-          <a:noFill/>
-        </p:spPr>
-        <p:txBody>
-          <a:bodyPr wrap="square" lIns="0" rIns="0">
-            <a:spAutoFit/>
-          </a:bodyPr>
-          <a:lstStyle/>
-          <a:p>
-            <a:pPr>
-              <a:defRPr b="1" sz="1500">
-                <a:solidFill>
-                  <a:srgbClr val="1E2761"/>
-                </a:solidFill>
-                <a:latin typeface="Aptos Display"/>
-              </a:defRPr>
-            </a:pPr>
-            <a:r>
-              <a:t>Lab connection</a:t>
-            </a:r>
-          </a:p>
-          <a:p>
-            <a:pPr>
-              <a:spcBef>
-                <a:spcPts val="400"/>
-              </a:spcBef>
-              <a:defRPr sz="1050">
-                <a:solidFill>
-                  <a:srgbClr val="242424"/>
-                </a:solidFill>
-                <a:latin typeface="Aptos"/>
-              </a:defRPr>
-            </a:pPr>
-            <a:r>
-              <a:t>Coverage: Partial. Use the lab README to demonstrate or discuss this topic. Review terms: admin, contributor, member, roles, viewer.</a:t>
+              <a:t>In the lab, you will apply this pattern, validate the expected behavior, and discuss where it fits in a real Power BI solution.</a:t>
             </a:r>
           </a:p>
         </p:txBody>
@@ -12503,42 +11955,6 @@
       </p:sp>
       <p:sp>
         <p:nvSpPr>
-          <p:cNvPr id="4" name="TextBox 3"/>
-          <p:cNvSpPr txBox="1"/>
-          <p:nvPr/>
-        </p:nvSpPr>
-        <p:spPr>
-          <a:xfrm>
-            <a:off x="530352" y="914400"/>
-            <a:ext cx="10515600" cy="320040"/>
-          </a:xfrm>
-          <a:prstGeom prst="rect">
-            <a:avLst/>
-          </a:prstGeom>
-          <a:noFill/>
-        </p:spPr>
-        <p:txBody>
-          <a:bodyPr wrap="none">
-            <a:spAutoFit/>
-          </a:bodyPr>
-          <a:lstStyle/>
-          <a:p>
-            <a:pPr>
-              <a:defRPr sz="1200">
-                <a:solidFill>
-                  <a:srgbClr val="5C5C5C"/>
-                </a:solidFill>
-                <a:latin typeface="Aptos"/>
-              </a:defRPr>
-            </a:pPr>
-            <a:r>
-              <a:t>Talking points, learner value, and lab connection</a:t>
-            </a:r>
-          </a:p>
-        </p:txBody>
-      </p:sp>
-      <p:sp>
-        <p:nvSpPr>
           <p:cNvPr id="5" name="Rounded Rectangle 4"/>
           <p:cNvSpPr/>
           <p:nvPr/>
@@ -12656,7 +12072,139 @@
               </a:defRPr>
             </a:pPr>
             <a:r>
-              <a:t>Talking points</a:t>
+              <a:t>Key ideas</a:t>
+            </a:r>
+            <a:br/>
+            <a:r>
+              <a:t>• Reports</a:t>
+            </a:r>
+            <a:br/>
+            <a:r>
+              <a:t>• Semantic models</a:t>
+            </a:r>
+          </a:p>
+        </p:txBody>
+      </p:sp>
+      <p:sp>
+        <p:nvSpPr>
+          <p:cNvPr id="8" name="Rounded Rectangle 7"/>
+          <p:cNvSpPr/>
+          <p:nvPr/>
+        </p:nvSpPr>
+        <p:spPr>
+          <a:xfrm>
+            <a:off x="6263640" y="1234440"/>
+            <a:ext cx="5303520" cy="1828800"/>
+          </a:xfrm>
+          <a:prstGeom prst="roundRect">
+            <a:avLst/>
+          </a:prstGeom>
+          <a:solidFill>
+            <a:srgbClr val="FFFFFF"/>
+          </a:solidFill>
+          <a:ln>
+            <a:solidFill>
+              <a:srgbClr val="DCDCDC"/>
+            </a:solidFill>
+          </a:ln>
+        </p:spPr>
+        <p:style>
+          <a:lnRef idx="1">
+            <a:schemeClr val="accent1"/>
+          </a:lnRef>
+          <a:fillRef idx="3">
+            <a:schemeClr val="accent1"/>
+          </a:fillRef>
+          <a:effectRef idx="2">
+            <a:schemeClr val="accent1"/>
+          </a:effectRef>
+          <a:fontRef idx="minor">
+            <a:schemeClr val="lt1"/>
+          </a:fontRef>
+        </p:style>
+        <p:txBody>
+          <a:bodyPr rtlCol="0" anchor="ctr"/>
+          <a:lstStyle/>
+          <a:p>
+            <a:pPr algn="ctr"/>
+          </a:p>
+        </p:txBody>
+      </p:sp>
+      <p:sp>
+        <p:nvSpPr>
+          <p:cNvPr id="9" name="Rectangle 8"/>
+          <p:cNvSpPr/>
+          <p:nvPr/>
+        </p:nvSpPr>
+        <p:spPr>
+          <a:xfrm>
+            <a:off x="6263640" y="1234440"/>
+            <a:ext cx="91440" cy="1828800"/>
+          </a:xfrm>
+          <a:prstGeom prst="rect">
+            <a:avLst/>
+          </a:prstGeom>
+          <a:solidFill>
+            <a:srgbClr val="02C39A"/>
+          </a:solidFill>
+          <a:ln>
+            <a:noFill/>
+          </a:ln>
+        </p:spPr>
+        <p:style>
+          <a:lnRef idx="1">
+            <a:schemeClr val="accent1"/>
+          </a:lnRef>
+          <a:fillRef idx="3">
+            <a:schemeClr val="accent1"/>
+          </a:fillRef>
+          <a:effectRef idx="2">
+            <a:schemeClr val="accent1"/>
+          </a:effectRef>
+          <a:fontRef idx="minor">
+            <a:schemeClr val="lt1"/>
+          </a:fontRef>
+        </p:style>
+        <p:txBody>
+          <a:bodyPr rtlCol="0" anchor="ctr"/>
+          <a:lstStyle/>
+          <a:p>
+            <a:pPr algn="ctr"/>
+          </a:p>
+        </p:txBody>
+      </p:sp>
+      <p:sp>
+        <p:nvSpPr>
+          <p:cNvPr id="10" name="TextBox 9"/>
+          <p:cNvSpPr txBox="1"/>
+          <p:nvPr/>
+        </p:nvSpPr>
+        <p:spPr>
+          <a:xfrm>
+            <a:off x="6446520" y="1344168"/>
+            <a:ext cx="4983480" cy="1664208"/>
+          </a:xfrm>
+          <a:prstGeom prst="rect">
+            <a:avLst/>
+          </a:prstGeom>
+          <a:noFill/>
+        </p:spPr>
+        <p:txBody>
+          <a:bodyPr wrap="square" lIns="0" rIns="0">
+            <a:spAutoFit/>
+          </a:bodyPr>
+          <a:lstStyle/>
+          <a:p>
+            <a:pPr>
+              <a:defRPr b="1" sz="1500">
+                <a:solidFill>
+                  <a:srgbClr val="1E2761"/>
+                </a:solidFill>
+                <a:latin typeface="Aptos Display"/>
+              </a:defRPr>
+            </a:pPr>
+            <a:r>
+              <a:t>Why it helps</a:t>
             </a:r>
           </a:p>
           <a:p>
@@ -12672,25 +12220,25 @@
               </a:defRPr>
             </a:pPr>
             <a:r>
-              <a:t>• Reports</a:t>
+              <a:t>• PBIP-originated artifacts</a:t>
             </a:r>
             <a:br/>
             <a:r>
-              <a:t>• Semantic models</a:t>
-            </a:r>
-          </a:p>
-        </p:txBody>
-      </p:sp>
-      <p:sp>
-        <p:nvSpPr>
-          <p:cNvPr id="8" name="Rounded Rectangle 7"/>
+              <a:t>• Ownership and takeover</a:t>
+            </a:r>
+          </a:p>
+        </p:txBody>
+      </p:sp>
+      <p:sp>
+        <p:nvSpPr>
+          <p:cNvPr id="11" name="Rounded Rectangle 10"/>
           <p:cNvSpPr/>
           <p:nvPr/>
         </p:nvSpPr>
         <p:spPr>
           <a:xfrm>
-            <a:off x="6263640" y="1234440"/>
-            <a:ext cx="5303520" cy="1828800"/>
+            <a:off x="822960" y="4160520"/>
+            <a:ext cx="10424160" cy="868680"/>
           </a:xfrm>
           <a:prstGeom prst="roundRect">
             <a:avLst/>
@@ -12728,20 +12276,20 @@
       </p:sp>
       <p:sp>
         <p:nvSpPr>
-          <p:cNvPr id="9" name="Rectangle 8"/>
+          <p:cNvPr id="12" name="Rectangle 11"/>
           <p:cNvSpPr/>
           <p:nvPr/>
         </p:nvSpPr>
         <p:spPr>
           <a:xfrm>
-            <a:off x="6263640" y="1234440"/>
-            <a:ext cx="91440" cy="1828800"/>
+            <a:off x="822960" y="4160520"/>
+            <a:ext cx="91440" cy="868680"/>
           </a:xfrm>
           <a:prstGeom prst="rect">
             <a:avLst/>
           </a:prstGeom>
           <a:solidFill>
-            <a:srgbClr val="02C39A"/>
+            <a:srgbClr val="F9B700"/>
           </a:solidFill>
           <a:ln>
             <a:noFill/>
@@ -12771,14 +12319,14 @@
       </p:sp>
       <p:sp>
         <p:nvSpPr>
-          <p:cNvPr id="10" name="TextBox 9"/>
+          <p:cNvPr id="13" name="TextBox 12"/>
           <p:cNvSpPr txBox="1"/>
           <p:nvPr/>
         </p:nvSpPr>
         <p:spPr>
           <a:xfrm>
-            <a:off x="6446520" y="1344168"/>
-            <a:ext cx="4983480" cy="1664208"/>
+            <a:off x="1005840" y="4270248"/>
+            <a:ext cx="10104120" cy="704088"/>
           </a:xfrm>
           <a:prstGeom prst="rect">
             <a:avLst/>
@@ -12800,167 +12348,7 @@
               </a:defRPr>
             </a:pPr>
             <a:r>
-              <a:t>Why it helps</a:t>
-            </a:r>
-          </a:p>
-          <a:p>
-            <a:pPr>
-              <a:spcBef>
-                <a:spcPts val="400"/>
-              </a:spcBef>
-              <a:defRPr sz="1050">
-                <a:solidFill>
-                  <a:srgbClr val="242424"/>
-                </a:solidFill>
-                <a:latin typeface="Aptos"/>
-              </a:defRPr>
-            </a:pPr>
-            <a:r>
-              <a:t>• PBIP-originated artifacts</a:t>
-            </a:r>
-            <a:br/>
-            <a:r>
-              <a:t>• Ownership and takeover</a:t>
-            </a:r>
-          </a:p>
-        </p:txBody>
-      </p:sp>
-      <p:sp>
-        <p:nvSpPr>
-          <p:cNvPr id="11" name="Rounded Rectangle 10"/>
-          <p:cNvSpPr/>
-          <p:nvPr/>
-        </p:nvSpPr>
-        <p:spPr>
-          <a:xfrm>
-            <a:off x="822960" y="4160520"/>
-            <a:ext cx="10424160" cy="868680"/>
-          </a:xfrm>
-          <a:prstGeom prst="roundRect">
-            <a:avLst/>
-          </a:prstGeom>
-          <a:solidFill>
-            <a:srgbClr val="FFFFFF"/>
-          </a:solidFill>
-          <a:ln>
-            <a:solidFill>
-              <a:srgbClr val="DCDCDC"/>
-            </a:solidFill>
-          </a:ln>
-        </p:spPr>
-        <p:style>
-          <a:lnRef idx="1">
-            <a:schemeClr val="accent1"/>
-          </a:lnRef>
-          <a:fillRef idx="3">
-            <a:schemeClr val="accent1"/>
-          </a:fillRef>
-          <a:effectRef idx="2">
-            <a:schemeClr val="accent1"/>
-          </a:effectRef>
-          <a:fontRef idx="minor">
-            <a:schemeClr val="lt1"/>
-          </a:fontRef>
-        </p:style>
-        <p:txBody>
-          <a:bodyPr rtlCol="0" anchor="ctr"/>
-          <a:lstStyle/>
-          <a:p>
-            <a:pPr algn="ctr"/>
-          </a:p>
-        </p:txBody>
-      </p:sp>
-      <p:sp>
-        <p:nvSpPr>
-          <p:cNvPr id="12" name="Rectangle 11"/>
-          <p:cNvSpPr/>
-          <p:nvPr/>
-        </p:nvSpPr>
-        <p:spPr>
-          <a:xfrm>
-            <a:off x="822960" y="4160520"/>
-            <a:ext cx="91440" cy="868680"/>
-          </a:xfrm>
-          <a:prstGeom prst="rect">
-            <a:avLst/>
-          </a:prstGeom>
-          <a:solidFill>
-            <a:srgbClr val="F9B700"/>
-          </a:solidFill>
-          <a:ln>
-            <a:noFill/>
-          </a:ln>
-        </p:spPr>
-        <p:style>
-          <a:lnRef idx="1">
-            <a:schemeClr val="accent1"/>
-          </a:lnRef>
-          <a:fillRef idx="3">
-            <a:schemeClr val="accent1"/>
-          </a:fillRef>
-          <a:effectRef idx="2">
-            <a:schemeClr val="accent1"/>
-          </a:effectRef>
-          <a:fontRef idx="minor">
-            <a:schemeClr val="lt1"/>
-          </a:fontRef>
-        </p:style>
-        <p:txBody>
-          <a:bodyPr rtlCol="0" anchor="ctr"/>
-          <a:lstStyle/>
-          <a:p>
-            <a:pPr algn="ctr"/>
-          </a:p>
-        </p:txBody>
-      </p:sp>
-      <p:sp>
-        <p:nvSpPr>
-          <p:cNvPr id="13" name="TextBox 12"/>
-          <p:cNvSpPr txBox="1"/>
-          <p:nvPr/>
-        </p:nvSpPr>
-        <p:spPr>
-          <a:xfrm>
-            <a:off x="1005840" y="4270248"/>
-            <a:ext cx="10104120" cy="704088"/>
-          </a:xfrm>
-          <a:prstGeom prst="rect">
-            <a:avLst/>
-          </a:prstGeom>
-          <a:noFill/>
-        </p:spPr>
-        <p:txBody>
-          <a:bodyPr wrap="square" lIns="0" rIns="0">
-            <a:spAutoFit/>
-          </a:bodyPr>
-          <a:lstStyle/>
-          <a:p>
-            <a:pPr>
-              <a:defRPr b="1" sz="1500">
-                <a:solidFill>
-                  <a:srgbClr val="1E2761"/>
-                </a:solidFill>
-                <a:latin typeface="Aptos Display"/>
-              </a:defRPr>
-            </a:pPr>
-            <a:r>
-              <a:t>Lab connection</a:t>
-            </a:r>
-          </a:p>
-          <a:p>
-            <a:pPr>
-              <a:spcBef>
-                <a:spcPts val="400"/>
-              </a:spcBef>
-              <a:defRPr sz="1050">
-                <a:solidFill>
-                  <a:srgbClr val="242424"/>
-                </a:solidFill>
-                <a:latin typeface="Aptos"/>
-              </a:defRPr>
-            </a:pPr>
-            <a:r>
-              <a:t>Coverage: Covered. Use the lab README to demonstrate or discuss this topic. Review terms: originated, takeover.</a:t>
+              <a:t>In the lab, you will apply this pattern, validate the expected behavior, and discuss where it fits in a real Power BI solution.</a:t>
             </a:r>
           </a:p>
         </p:txBody>
@@ -13099,42 +12487,6 @@
       </p:sp>
       <p:sp>
         <p:nvSpPr>
-          <p:cNvPr id="4" name="TextBox 3"/>
-          <p:cNvSpPr txBox="1"/>
-          <p:nvPr/>
-        </p:nvSpPr>
-        <p:spPr>
-          <a:xfrm>
-            <a:off x="530352" y="914400"/>
-            <a:ext cx="10515600" cy="320040"/>
-          </a:xfrm>
-          <a:prstGeom prst="rect">
-            <a:avLst/>
-          </a:prstGeom>
-          <a:noFill/>
-        </p:spPr>
-        <p:txBody>
-          <a:bodyPr wrap="none">
-            <a:spAutoFit/>
-          </a:bodyPr>
-          <a:lstStyle/>
-          <a:p>
-            <a:pPr>
-              <a:defRPr sz="1200">
-                <a:solidFill>
-                  <a:srgbClr val="5C5C5C"/>
-                </a:solidFill>
-                <a:latin typeface="Aptos"/>
-              </a:defRPr>
-            </a:pPr>
-            <a:r>
-              <a:t>Talking points, learner value, and lab connection</a:t>
-            </a:r>
-          </a:p>
-        </p:txBody>
-      </p:sp>
-      <p:sp>
-        <p:nvSpPr>
           <p:cNvPr id="5" name="Rounded Rectangle 4"/>
           <p:cNvSpPr/>
           <p:nvPr/>
@@ -13252,7 +12604,143 @@
               </a:defRPr>
             </a:pPr>
             <a:r>
-              <a:t>Talking points</a:t>
+              <a:t>Key ideas</a:t>
+            </a:r>
+            <a:br/>
+            <a:r>
+              <a:t>• Scheduled refresh</a:t>
+            </a:r>
+            <a:br/>
+            <a:r>
+              <a:t>• Credentials</a:t>
+            </a:r>
+            <a:br/>
+            <a:r>
+              <a:t>• Privacy levels</a:t>
+            </a:r>
+          </a:p>
+        </p:txBody>
+      </p:sp>
+      <p:sp>
+        <p:nvSpPr>
+          <p:cNvPr id="8" name="Rounded Rectangle 7"/>
+          <p:cNvSpPr/>
+          <p:nvPr/>
+        </p:nvSpPr>
+        <p:spPr>
+          <a:xfrm>
+            <a:off x="6263640" y="1234440"/>
+            <a:ext cx="5303520" cy="1828800"/>
+          </a:xfrm>
+          <a:prstGeom prst="roundRect">
+            <a:avLst/>
+          </a:prstGeom>
+          <a:solidFill>
+            <a:srgbClr val="FFFFFF"/>
+          </a:solidFill>
+          <a:ln>
+            <a:solidFill>
+              <a:srgbClr val="DCDCDC"/>
+            </a:solidFill>
+          </a:ln>
+        </p:spPr>
+        <p:style>
+          <a:lnRef idx="1">
+            <a:schemeClr val="accent1"/>
+          </a:lnRef>
+          <a:fillRef idx="3">
+            <a:schemeClr val="accent1"/>
+          </a:fillRef>
+          <a:effectRef idx="2">
+            <a:schemeClr val="accent1"/>
+          </a:effectRef>
+          <a:fontRef idx="minor">
+            <a:schemeClr val="lt1"/>
+          </a:fontRef>
+        </p:style>
+        <p:txBody>
+          <a:bodyPr rtlCol="0" anchor="ctr"/>
+          <a:lstStyle/>
+          <a:p>
+            <a:pPr algn="ctr"/>
+          </a:p>
+        </p:txBody>
+      </p:sp>
+      <p:sp>
+        <p:nvSpPr>
+          <p:cNvPr id="9" name="Rectangle 8"/>
+          <p:cNvSpPr/>
+          <p:nvPr/>
+        </p:nvSpPr>
+        <p:spPr>
+          <a:xfrm>
+            <a:off x="6263640" y="1234440"/>
+            <a:ext cx="91440" cy="1828800"/>
+          </a:xfrm>
+          <a:prstGeom prst="rect">
+            <a:avLst/>
+          </a:prstGeom>
+          <a:solidFill>
+            <a:srgbClr val="02C39A"/>
+          </a:solidFill>
+          <a:ln>
+            <a:noFill/>
+          </a:ln>
+        </p:spPr>
+        <p:style>
+          <a:lnRef idx="1">
+            <a:schemeClr val="accent1"/>
+          </a:lnRef>
+          <a:fillRef idx="3">
+            <a:schemeClr val="accent1"/>
+          </a:fillRef>
+          <a:effectRef idx="2">
+            <a:schemeClr val="accent1"/>
+          </a:effectRef>
+          <a:fontRef idx="minor">
+            <a:schemeClr val="lt1"/>
+          </a:fontRef>
+        </p:style>
+        <p:txBody>
+          <a:bodyPr rtlCol="0" anchor="ctr"/>
+          <a:lstStyle/>
+          <a:p>
+            <a:pPr algn="ctr"/>
+          </a:p>
+        </p:txBody>
+      </p:sp>
+      <p:sp>
+        <p:nvSpPr>
+          <p:cNvPr id="10" name="TextBox 9"/>
+          <p:cNvSpPr txBox="1"/>
+          <p:nvPr/>
+        </p:nvSpPr>
+        <p:spPr>
+          <a:xfrm>
+            <a:off x="6446520" y="1344168"/>
+            <a:ext cx="4983480" cy="1664208"/>
+          </a:xfrm>
+          <a:prstGeom prst="rect">
+            <a:avLst/>
+          </a:prstGeom>
+          <a:noFill/>
+        </p:spPr>
+        <p:txBody>
+          <a:bodyPr wrap="square" lIns="0" rIns="0">
+            <a:spAutoFit/>
+          </a:bodyPr>
+          <a:lstStyle/>
+          <a:p>
+            <a:pPr>
+              <a:defRPr b="1" sz="1500">
+                <a:solidFill>
+                  <a:srgbClr val="1E2761"/>
+                </a:solidFill>
+                <a:latin typeface="Aptos Display"/>
+              </a:defRPr>
+            </a:pPr>
+            <a:r>
+              <a:t>Why it helps</a:t>
             </a:r>
           </a:p>
           <a:p>
@@ -13268,29 +12756,25 @@
               </a:defRPr>
             </a:pPr>
             <a:r>
-              <a:t>• Scheduled refresh</a:t>
+              <a:t>• Refresh history</a:t>
             </a:r>
             <a:br/>
             <a:r>
-              <a:t>• Credentials</a:t>
-            </a:r>
-            <a:br/>
-            <a:r>
-              <a:t>• Privacy levels</a:t>
-            </a:r>
-          </a:p>
-        </p:txBody>
-      </p:sp>
-      <p:sp>
-        <p:nvSpPr>
-          <p:cNvPr id="8" name="Rounded Rectangle 7"/>
+              <a:t>• Troubleshooting</a:t>
+            </a:r>
+          </a:p>
+        </p:txBody>
+      </p:sp>
+      <p:sp>
+        <p:nvSpPr>
+          <p:cNvPr id="11" name="Rounded Rectangle 10"/>
           <p:cNvSpPr/>
           <p:nvPr/>
         </p:nvSpPr>
         <p:spPr>
           <a:xfrm>
-            <a:off x="6263640" y="1234440"/>
-            <a:ext cx="5303520" cy="1828800"/>
+            <a:off x="822960" y="4160520"/>
+            <a:ext cx="10424160" cy="868680"/>
           </a:xfrm>
           <a:prstGeom prst="roundRect">
             <a:avLst/>
@@ -13328,20 +12812,20 @@
       </p:sp>
       <p:sp>
         <p:nvSpPr>
-          <p:cNvPr id="9" name="Rectangle 8"/>
+          <p:cNvPr id="12" name="Rectangle 11"/>
           <p:cNvSpPr/>
           <p:nvPr/>
         </p:nvSpPr>
         <p:spPr>
           <a:xfrm>
-            <a:off x="6263640" y="1234440"/>
-            <a:ext cx="91440" cy="1828800"/>
+            <a:off x="822960" y="4160520"/>
+            <a:ext cx="91440" cy="868680"/>
           </a:xfrm>
           <a:prstGeom prst="rect">
             <a:avLst/>
           </a:prstGeom>
           <a:solidFill>
-            <a:srgbClr val="02C39A"/>
+            <a:srgbClr val="F9B700"/>
           </a:solidFill>
           <a:ln>
             <a:noFill/>
@@ -13371,14 +12855,14 @@
       </p:sp>
       <p:sp>
         <p:nvSpPr>
-          <p:cNvPr id="10" name="TextBox 9"/>
+          <p:cNvPr id="13" name="TextBox 12"/>
           <p:cNvSpPr txBox="1"/>
           <p:nvPr/>
         </p:nvSpPr>
         <p:spPr>
           <a:xfrm>
-            <a:off x="6446520" y="1344168"/>
-            <a:ext cx="4983480" cy="1664208"/>
+            <a:off x="1005840" y="4270248"/>
+            <a:ext cx="10104120" cy="704088"/>
           </a:xfrm>
           <a:prstGeom prst="rect">
             <a:avLst/>
@@ -13400,167 +12884,7 @@
               </a:defRPr>
             </a:pPr>
             <a:r>
-              <a:t>Why it helps</a:t>
-            </a:r>
-          </a:p>
-          <a:p>
-            <a:pPr>
-              <a:spcBef>
-                <a:spcPts val="400"/>
-              </a:spcBef>
-              <a:defRPr sz="1050">
-                <a:solidFill>
-                  <a:srgbClr val="242424"/>
-                </a:solidFill>
-                <a:latin typeface="Aptos"/>
-              </a:defRPr>
-            </a:pPr>
-            <a:r>
-              <a:t>• Refresh history</a:t>
-            </a:r>
-            <a:br/>
-            <a:r>
-              <a:t>• Troubleshooting</a:t>
-            </a:r>
-          </a:p>
-        </p:txBody>
-      </p:sp>
-      <p:sp>
-        <p:nvSpPr>
-          <p:cNvPr id="11" name="Rounded Rectangle 10"/>
-          <p:cNvSpPr/>
-          <p:nvPr/>
-        </p:nvSpPr>
-        <p:spPr>
-          <a:xfrm>
-            <a:off x="822960" y="4160520"/>
-            <a:ext cx="10424160" cy="868680"/>
-          </a:xfrm>
-          <a:prstGeom prst="roundRect">
-            <a:avLst/>
-          </a:prstGeom>
-          <a:solidFill>
-            <a:srgbClr val="FFFFFF"/>
-          </a:solidFill>
-          <a:ln>
-            <a:solidFill>
-              <a:srgbClr val="DCDCDC"/>
-            </a:solidFill>
-          </a:ln>
-        </p:spPr>
-        <p:style>
-          <a:lnRef idx="1">
-            <a:schemeClr val="accent1"/>
-          </a:lnRef>
-          <a:fillRef idx="3">
-            <a:schemeClr val="accent1"/>
-          </a:fillRef>
-          <a:effectRef idx="2">
-            <a:schemeClr val="accent1"/>
-          </a:effectRef>
-          <a:fontRef idx="minor">
-            <a:schemeClr val="lt1"/>
-          </a:fontRef>
-        </p:style>
-        <p:txBody>
-          <a:bodyPr rtlCol="0" anchor="ctr"/>
-          <a:lstStyle/>
-          <a:p>
-            <a:pPr algn="ctr"/>
-          </a:p>
-        </p:txBody>
-      </p:sp>
-      <p:sp>
-        <p:nvSpPr>
-          <p:cNvPr id="12" name="Rectangle 11"/>
-          <p:cNvSpPr/>
-          <p:nvPr/>
-        </p:nvSpPr>
-        <p:spPr>
-          <a:xfrm>
-            <a:off x="822960" y="4160520"/>
-            <a:ext cx="91440" cy="868680"/>
-          </a:xfrm>
-          <a:prstGeom prst="rect">
-            <a:avLst/>
-          </a:prstGeom>
-          <a:solidFill>
-            <a:srgbClr val="F9B700"/>
-          </a:solidFill>
-          <a:ln>
-            <a:noFill/>
-          </a:ln>
-        </p:spPr>
-        <p:style>
-          <a:lnRef idx="1">
-            <a:schemeClr val="accent1"/>
-          </a:lnRef>
-          <a:fillRef idx="3">
-            <a:schemeClr val="accent1"/>
-          </a:fillRef>
-          <a:effectRef idx="2">
-            <a:schemeClr val="accent1"/>
-          </a:effectRef>
-          <a:fontRef idx="minor">
-            <a:schemeClr val="lt1"/>
-          </a:fontRef>
-        </p:style>
-        <p:txBody>
-          <a:bodyPr rtlCol="0" anchor="ctr"/>
-          <a:lstStyle/>
-          <a:p>
-            <a:pPr algn="ctr"/>
-          </a:p>
-        </p:txBody>
-      </p:sp>
-      <p:sp>
-        <p:nvSpPr>
-          <p:cNvPr id="13" name="TextBox 12"/>
-          <p:cNvSpPr txBox="1"/>
-          <p:nvPr/>
-        </p:nvSpPr>
-        <p:spPr>
-          <a:xfrm>
-            <a:off x="1005840" y="4270248"/>
-            <a:ext cx="10104120" cy="704088"/>
-          </a:xfrm>
-          <a:prstGeom prst="rect">
-            <a:avLst/>
-          </a:prstGeom>
-          <a:noFill/>
-        </p:spPr>
-        <p:txBody>
-          <a:bodyPr wrap="square" lIns="0" rIns="0">
-            <a:spAutoFit/>
-          </a:bodyPr>
-          <a:lstStyle/>
-          <a:p>
-            <a:pPr>
-              <a:defRPr b="1" sz="1500">
-                <a:solidFill>
-                  <a:srgbClr val="1E2761"/>
-                </a:solidFill>
-                <a:latin typeface="Aptos Display"/>
-              </a:defRPr>
-            </a:pPr>
-            <a:r>
-              <a:t>Lab connection</a:t>
-            </a:r>
-          </a:p>
-          <a:p>
-            <a:pPr>
-              <a:spcBef>
-                <a:spcPts val="400"/>
-              </a:spcBef>
-              <a:defRPr sz="1050">
-                <a:solidFill>
-                  <a:srgbClr val="242424"/>
-                </a:solidFill>
-                <a:latin typeface="Aptos"/>
-              </a:defRPr>
-            </a:pPr>
-            <a:r>
-              <a:t>Coverage: Covered. Use the lab README to demonstrate or discuss this topic. Review terms: levels, privacy.</a:t>
+              <a:t>In the lab, you will apply this pattern, validate the expected behavior, and discuss where it fits in a real Power BI solution.</a:t>
             </a:r>
           </a:p>
         </p:txBody>
@@ -13699,42 +13023,6 @@
       </p:sp>
       <p:sp>
         <p:nvSpPr>
-          <p:cNvPr id="4" name="TextBox 3"/>
-          <p:cNvSpPr txBox="1"/>
-          <p:nvPr/>
-        </p:nvSpPr>
-        <p:spPr>
-          <a:xfrm>
-            <a:off x="530352" y="914400"/>
-            <a:ext cx="10515600" cy="320040"/>
-          </a:xfrm>
-          <a:prstGeom prst="rect">
-            <a:avLst/>
-          </a:prstGeom>
-          <a:noFill/>
-        </p:spPr>
-        <p:txBody>
-          <a:bodyPr wrap="none">
-            <a:spAutoFit/>
-          </a:bodyPr>
-          <a:lstStyle/>
-          <a:p>
-            <a:pPr>
-              <a:defRPr sz="1200">
-                <a:solidFill>
-                  <a:srgbClr val="5C5C5C"/>
-                </a:solidFill>
-                <a:latin typeface="Aptos"/>
-              </a:defRPr>
-            </a:pPr>
-            <a:r>
-              <a:t>Talking points, learner value, and lab connection</a:t>
-            </a:r>
-          </a:p>
-        </p:txBody>
-      </p:sp>
-      <p:sp>
-        <p:nvSpPr>
           <p:cNvPr id="5" name="Rounded Rectangle 4"/>
           <p:cNvSpPr/>
           <p:nvPr/>
@@ -13852,7 +13140,143 @@
               </a:defRPr>
             </a:pPr>
             <a:r>
-              <a:t>Talking points</a:t>
+              <a:t>Key ideas</a:t>
+            </a:r>
+            <a:br/>
+            <a:r>
+              <a:t>• On-premises data gateway</a:t>
+            </a:r>
+            <a:br/>
+            <a:r>
+              <a:t>• Gateway clusters</a:t>
+            </a:r>
+            <a:br/>
+            <a:r>
+              <a:t>• Data source mappings</a:t>
+            </a:r>
+          </a:p>
+        </p:txBody>
+      </p:sp>
+      <p:sp>
+        <p:nvSpPr>
+          <p:cNvPr id="8" name="Rounded Rectangle 7"/>
+          <p:cNvSpPr/>
+          <p:nvPr/>
+        </p:nvSpPr>
+        <p:spPr>
+          <a:xfrm>
+            <a:off x="6263640" y="1234440"/>
+            <a:ext cx="5303520" cy="1828800"/>
+          </a:xfrm>
+          <a:prstGeom prst="roundRect">
+            <a:avLst/>
+          </a:prstGeom>
+          <a:solidFill>
+            <a:srgbClr val="FFFFFF"/>
+          </a:solidFill>
+          <a:ln>
+            <a:solidFill>
+              <a:srgbClr val="DCDCDC"/>
+            </a:solidFill>
+          </a:ln>
+        </p:spPr>
+        <p:style>
+          <a:lnRef idx="1">
+            <a:schemeClr val="accent1"/>
+          </a:lnRef>
+          <a:fillRef idx="3">
+            <a:schemeClr val="accent1"/>
+          </a:fillRef>
+          <a:effectRef idx="2">
+            <a:schemeClr val="accent1"/>
+          </a:effectRef>
+          <a:fontRef idx="minor">
+            <a:schemeClr val="lt1"/>
+          </a:fontRef>
+        </p:style>
+        <p:txBody>
+          <a:bodyPr rtlCol="0" anchor="ctr"/>
+          <a:lstStyle/>
+          <a:p>
+            <a:pPr algn="ctr"/>
+          </a:p>
+        </p:txBody>
+      </p:sp>
+      <p:sp>
+        <p:nvSpPr>
+          <p:cNvPr id="9" name="Rectangle 8"/>
+          <p:cNvSpPr/>
+          <p:nvPr/>
+        </p:nvSpPr>
+        <p:spPr>
+          <a:xfrm>
+            <a:off x="6263640" y="1234440"/>
+            <a:ext cx="91440" cy="1828800"/>
+          </a:xfrm>
+          <a:prstGeom prst="rect">
+            <a:avLst/>
+          </a:prstGeom>
+          <a:solidFill>
+            <a:srgbClr val="02C39A"/>
+          </a:solidFill>
+          <a:ln>
+            <a:noFill/>
+          </a:ln>
+        </p:spPr>
+        <p:style>
+          <a:lnRef idx="1">
+            <a:schemeClr val="accent1"/>
+          </a:lnRef>
+          <a:fillRef idx="3">
+            <a:schemeClr val="accent1"/>
+          </a:fillRef>
+          <a:effectRef idx="2">
+            <a:schemeClr val="accent1"/>
+          </a:effectRef>
+          <a:fontRef idx="minor">
+            <a:schemeClr val="lt1"/>
+          </a:fontRef>
+        </p:style>
+        <p:txBody>
+          <a:bodyPr rtlCol="0" anchor="ctr"/>
+          <a:lstStyle/>
+          <a:p>
+            <a:pPr algn="ctr"/>
+          </a:p>
+        </p:txBody>
+      </p:sp>
+      <p:sp>
+        <p:nvSpPr>
+          <p:cNvPr id="10" name="TextBox 9"/>
+          <p:cNvSpPr txBox="1"/>
+          <p:nvPr/>
+        </p:nvSpPr>
+        <p:spPr>
+          <a:xfrm>
+            <a:off x="6446520" y="1344168"/>
+            <a:ext cx="4983480" cy="1664208"/>
+          </a:xfrm>
+          <a:prstGeom prst="rect">
+            <a:avLst/>
+          </a:prstGeom>
+          <a:noFill/>
+        </p:spPr>
+        <p:txBody>
+          <a:bodyPr wrap="square" lIns="0" rIns="0">
+            <a:spAutoFit/>
+          </a:bodyPr>
+          <a:lstStyle/>
+          <a:p>
+            <a:pPr>
+              <a:defRPr b="1" sz="1500">
+                <a:solidFill>
+                  <a:srgbClr val="1E2761"/>
+                </a:solidFill>
+                <a:latin typeface="Aptos Display"/>
+              </a:defRPr>
+            </a:pPr>
+            <a:r>
+              <a:t>Why it helps</a:t>
             </a:r>
           </a:p>
           <a:p>
@@ -13868,29 +13292,25 @@
               </a:defRPr>
             </a:pPr>
             <a:r>
-              <a:t>• On-premises data gateway</a:t>
+              <a:t>• Cloud connections</a:t>
             </a:r>
             <a:br/>
             <a:r>
-              <a:t>• Gateway clusters</a:t>
-            </a:r>
-            <a:br/>
-            <a:r>
-              <a:t>• Data source mappings</a:t>
-            </a:r>
-          </a:p>
-        </p:txBody>
-      </p:sp>
-      <p:sp>
-        <p:nvSpPr>
-          <p:cNvPr id="8" name="Rounded Rectangle 7"/>
+              <a:t>• Gov validation</a:t>
+            </a:r>
+          </a:p>
+        </p:txBody>
+      </p:sp>
+      <p:sp>
+        <p:nvSpPr>
+          <p:cNvPr id="11" name="Rounded Rectangle 10"/>
           <p:cNvSpPr/>
           <p:nvPr/>
         </p:nvSpPr>
         <p:spPr>
           <a:xfrm>
-            <a:off x="6263640" y="1234440"/>
-            <a:ext cx="5303520" cy="1828800"/>
+            <a:off x="822960" y="4160520"/>
+            <a:ext cx="10424160" cy="868680"/>
           </a:xfrm>
           <a:prstGeom prst="roundRect">
             <a:avLst/>
@@ -13928,20 +13348,20 @@
       </p:sp>
       <p:sp>
         <p:nvSpPr>
-          <p:cNvPr id="9" name="Rectangle 8"/>
+          <p:cNvPr id="12" name="Rectangle 11"/>
           <p:cNvSpPr/>
           <p:nvPr/>
         </p:nvSpPr>
         <p:spPr>
           <a:xfrm>
-            <a:off x="6263640" y="1234440"/>
-            <a:ext cx="91440" cy="1828800"/>
+            <a:off x="822960" y="4160520"/>
+            <a:ext cx="91440" cy="868680"/>
           </a:xfrm>
           <a:prstGeom prst="rect">
             <a:avLst/>
           </a:prstGeom>
           <a:solidFill>
-            <a:srgbClr val="02C39A"/>
+            <a:srgbClr val="F9B700"/>
           </a:solidFill>
           <a:ln>
             <a:noFill/>
@@ -13971,14 +13391,14 @@
       </p:sp>
       <p:sp>
         <p:nvSpPr>
-          <p:cNvPr id="10" name="TextBox 9"/>
+          <p:cNvPr id="13" name="TextBox 12"/>
           <p:cNvSpPr txBox="1"/>
           <p:nvPr/>
         </p:nvSpPr>
         <p:spPr>
           <a:xfrm>
-            <a:off x="6446520" y="1344168"/>
-            <a:ext cx="4983480" cy="1664208"/>
+            <a:off x="1005840" y="4270248"/>
+            <a:ext cx="10104120" cy="704088"/>
           </a:xfrm>
           <a:prstGeom prst="rect">
             <a:avLst/>
@@ -14000,167 +13420,7 @@
               </a:defRPr>
             </a:pPr>
             <a:r>
-              <a:t>Why it helps</a:t>
-            </a:r>
-          </a:p>
-          <a:p>
-            <a:pPr>
-              <a:spcBef>
-                <a:spcPts val="400"/>
-              </a:spcBef>
-              <a:defRPr sz="1050">
-                <a:solidFill>
-                  <a:srgbClr val="242424"/>
-                </a:solidFill>
-                <a:latin typeface="Aptos"/>
-              </a:defRPr>
-            </a:pPr>
-            <a:r>
-              <a:t>• Cloud connections</a:t>
-            </a:r>
-            <a:br/>
-            <a:r>
-              <a:t>• Gov validation</a:t>
-            </a:r>
-          </a:p>
-        </p:txBody>
-      </p:sp>
-      <p:sp>
-        <p:nvSpPr>
-          <p:cNvPr id="11" name="Rounded Rectangle 10"/>
-          <p:cNvSpPr/>
-          <p:nvPr/>
-        </p:nvSpPr>
-        <p:spPr>
-          <a:xfrm>
-            <a:off x="822960" y="4160520"/>
-            <a:ext cx="10424160" cy="868680"/>
-          </a:xfrm>
-          <a:prstGeom prst="roundRect">
-            <a:avLst/>
-          </a:prstGeom>
-          <a:solidFill>
-            <a:srgbClr val="FFFFFF"/>
-          </a:solidFill>
-          <a:ln>
-            <a:solidFill>
-              <a:srgbClr val="DCDCDC"/>
-            </a:solidFill>
-          </a:ln>
-        </p:spPr>
-        <p:style>
-          <a:lnRef idx="1">
-            <a:schemeClr val="accent1"/>
-          </a:lnRef>
-          <a:fillRef idx="3">
-            <a:schemeClr val="accent1"/>
-          </a:fillRef>
-          <a:effectRef idx="2">
-            <a:schemeClr val="accent1"/>
-          </a:effectRef>
-          <a:fontRef idx="minor">
-            <a:schemeClr val="lt1"/>
-          </a:fontRef>
-        </p:style>
-        <p:txBody>
-          <a:bodyPr rtlCol="0" anchor="ctr"/>
-          <a:lstStyle/>
-          <a:p>
-            <a:pPr algn="ctr"/>
-          </a:p>
-        </p:txBody>
-      </p:sp>
-      <p:sp>
-        <p:nvSpPr>
-          <p:cNvPr id="12" name="Rectangle 11"/>
-          <p:cNvSpPr/>
-          <p:nvPr/>
-        </p:nvSpPr>
-        <p:spPr>
-          <a:xfrm>
-            <a:off x="822960" y="4160520"/>
-            <a:ext cx="91440" cy="868680"/>
-          </a:xfrm>
-          <a:prstGeom prst="rect">
-            <a:avLst/>
-          </a:prstGeom>
-          <a:solidFill>
-            <a:srgbClr val="F9B700"/>
-          </a:solidFill>
-          <a:ln>
-            <a:noFill/>
-          </a:ln>
-        </p:spPr>
-        <p:style>
-          <a:lnRef idx="1">
-            <a:schemeClr val="accent1"/>
-          </a:lnRef>
-          <a:fillRef idx="3">
-            <a:schemeClr val="accent1"/>
-          </a:fillRef>
-          <a:effectRef idx="2">
-            <a:schemeClr val="accent1"/>
-          </a:effectRef>
-          <a:fontRef idx="minor">
-            <a:schemeClr val="lt1"/>
-          </a:fontRef>
-        </p:style>
-        <p:txBody>
-          <a:bodyPr rtlCol="0" anchor="ctr"/>
-          <a:lstStyle/>
-          <a:p>
-            <a:pPr algn="ctr"/>
-          </a:p>
-        </p:txBody>
-      </p:sp>
-      <p:sp>
-        <p:nvSpPr>
-          <p:cNvPr id="13" name="TextBox 12"/>
-          <p:cNvSpPr txBox="1"/>
-          <p:nvPr/>
-        </p:nvSpPr>
-        <p:spPr>
-          <a:xfrm>
-            <a:off x="1005840" y="4270248"/>
-            <a:ext cx="10104120" cy="704088"/>
-          </a:xfrm>
-          <a:prstGeom prst="rect">
-            <a:avLst/>
-          </a:prstGeom>
-          <a:noFill/>
-        </p:spPr>
-        <p:txBody>
-          <a:bodyPr wrap="square" lIns="0" rIns="0">
-            <a:spAutoFit/>
-          </a:bodyPr>
-          <a:lstStyle/>
-          <a:p>
-            <a:pPr>
-              <a:defRPr b="1" sz="1500">
-                <a:solidFill>
-                  <a:srgbClr val="1E2761"/>
-                </a:solidFill>
-                <a:latin typeface="Aptos Display"/>
-              </a:defRPr>
-            </a:pPr>
-            <a:r>
-              <a:t>Lab connection</a:t>
-            </a:r>
-          </a:p>
-          <a:p>
-            <a:pPr>
-              <a:spcBef>
-                <a:spcPts val="400"/>
-              </a:spcBef>
-              <a:defRPr sz="1050">
-                <a:solidFill>
-                  <a:srgbClr val="242424"/>
-                </a:solidFill>
-                <a:latin typeface="Aptos"/>
-              </a:defRPr>
-            </a:pPr>
-            <a:r>
-              <a:t>Coverage: Covered. Use the lab README to demonstrate or discuss this topic. Review terms: clusters, mappings, premises.</a:t>
+              <a:t>In the lab, you will apply this pattern, validate the expected behavior, and discuss where it fits in a real Power BI solution.</a:t>
             </a:r>
           </a:p>
         </p:txBody>
@@ -14299,42 +13559,6 @@
       </p:sp>
       <p:sp>
         <p:nvSpPr>
-          <p:cNvPr id="4" name="TextBox 3"/>
-          <p:cNvSpPr txBox="1"/>
-          <p:nvPr/>
-        </p:nvSpPr>
-        <p:spPr>
-          <a:xfrm>
-            <a:off x="530352" y="914400"/>
-            <a:ext cx="10515600" cy="320040"/>
-          </a:xfrm>
-          <a:prstGeom prst="rect">
-            <a:avLst/>
-          </a:prstGeom>
-          <a:noFill/>
-        </p:spPr>
-        <p:txBody>
-          <a:bodyPr wrap="none">
-            <a:spAutoFit/>
-          </a:bodyPr>
-          <a:lstStyle/>
-          <a:p>
-            <a:pPr>
-              <a:defRPr sz="1200">
-                <a:solidFill>
-                  <a:srgbClr val="5C5C5C"/>
-                </a:solidFill>
-                <a:latin typeface="Aptos"/>
-              </a:defRPr>
-            </a:pPr>
-            <a:r>
-              <a:t>Talking points, learner value, and lab connection</a:t>
-            </a:r>
-          </a:p>
-        </p:txBody>
-      </p:sp>
-      <p:sp>
-        <p:nvSpPr>
           <p:cNvPr id="5" name="Rounded Rectangle 4"/>
           <p:cNvSpPr/>
           <p:nvPr/>
@@ -14452,7 +13676,139 @@
               </a:defRPr>
             </a:pPr>
             <a:r>
-              <a:t>Talking points</a:t>
+              <a:t>Key ideas</a:t>
+            </a:r>
+            <a:br/>
+            <a:r>
+              <a:t>• Reuse pattern</a:t>
+            </a:r>
+            <a:br/>
+            <a:r>
+              <a:t>• Build permission</a:t>
+            </a:r>
+          </a:p>
+        </p:txBody>
+      </p:sp>
+      <p:sp>
+        <p:nvSpPr>
+          <p:cNvPr id="8" name="Rounded Rectangle 7"/>
+          <p:cNvSpPr/>
+          <p:nvPr/>
+        </p:nvSpPr>
+        <p:spPr>
+          <a:xfrm>
+            <a:off x="6263640" y="1234440"/>
+            <a:ext cx="5303520" cy="1828800"/>
+          </a:xfrm>
+          <a:prstGeom prst="roundRect">
+            <a:avLst/>
+          </a:prstGeom>
+          <a:solidFill>
+            <a:srgbClr val="FFFFFF"/>
+          </a:solidFill>
+          <a:ln>
+            <a:solidFill>
+              <a:srgbClr val="DCDCDC"/>
+            </a:solidFill>
+          </a:ln>
+        </p:spPr>
+        <p:style>
+          <a:lnRef idx="1">
+            <a:schemeClr val="accent1"/>
+          </a:lnRef>
+          <a:fillRef idx="3">
+            <a:schemeClr val="accent1"/>
+          </a:fillRef>
+          <a:effectRef idx="2">
+            <a:schemeClr val="accent1"/>
+          </a:effectRef>
+          <a:fontRef idx="minor">
+            <a:schemeClr val="lt1"/>
+          </a:fontRef>
+        </p:style>
+        <p:txBody>
+          <a:bodyPr rtlCol="0" anchor="ctr"/>
+          <a:lstStyle/>
+          <a:p>
+            <a:pPr algn="ctr"/>
+          </a:p>
+        </p:txBody>
+      </p:sp>
+      <p:sp>
+        <p:nvSpPr>
+          <p:cNvPr id="9" name="Rectangle 8"/>
+          <p:cNvSpPr/>
+          <p:nvPr/>
+        </p:nvSpPr>
+        <p:spPr>
+          <a:xfrm>
+            <a:off x="6263640" y="1234440"/>
+            <a:ext cx="91440" cy="1828800"/>
+          </a:xfrm>
+          <a:prstGeom prst="rect">
+            <a:avLst/>
+          </a:prstGeom>
+          <a:solidFill>
+            <a:srgbClr val="02C39A"/>
+          </a:solidFill>
+          <a:ln>
+            <a:noFill/>
+          </a:ln>
+        </p:spPr>
+        <p:style>
+          <a:lnRef idx="1">
+            <a:schemeClr val="accent1"/>
+          </a:lnRef>
+          <a:fillRef idx="3">
+            <a:schemeClr val="accent1"/>
+          </a:fillRef>
+          <a:effectRef idx="2">
+            <a:schemeClr val="accent1"/>
+          </a:effectRef>
+          <a:fontRef idx="minor">
+            <a:schemeClr val="lt1"/>
+          </a:fontRef>
+        </p:style>
+        <p:txBody>
+          <a:bodyPr rtlCol="0" anchor="ctr"/>
+          <a:lstStyle/>
+          <a:p>
+            <a:pPr algn="ctr"/>
+          </a:p>
+        </p:txBody>
+      </p:sp>
+      <p:sp>
+        <p:nvSpPr>
+          <p:cNvPr id="10" name="TextBox 9"/>
+          <p:cNvSpPr txBox="1"/>
+          <p:nvPr/>
+        </p:nvSpPr>
+        <p:spPr>
+          <a:xfrm>
+            <a:off x="6446520" y="1344168"/>
+            <a:ext cx="4983480" cy="1664208"/>
+          </a:xfrm>
+          <a:prstGeom prst="rect">
+            <a:avLst/>
+          </a:prstGeom>
+          <a:noFill/>
+        </p:spPr>
+        <p:txBody>
+          <a:bodyPr wrap="square" lIns="0" rIns="0">
+            <a:spAutoFit/>
+          </a:bodyPr>
+          <a:lstStyle/>
+          <a:p>
+            <a:pPr>
+              <a:defRPr b="1" sz="1500">
+                <a:solidFill>
+                  <a:srgbClr val="1E2761"/>
+                </a:solidFill>
+                <a:latin typeface="Aptos Display"/>
+              </a:defRPr>
+            </a:pPr>
+            <a:r>
+              <a:t>Why it helps</a:t>
             </a:r>
           </a:p>
           <a:p>
@@ -14468,25 +13824,25 @@
               </a:defRPr>
             </a:pPr>
             <a:r>
-              <a:t>• Reuse pattern</a:t>
+              <a:t>• Certified semantic models</a:t>
             </a:r>
             <a:br/>
             <a:r>
-              <a:t>• Build permission</a:t>
-            </a:r>
-          </a:p>
-        </p:txBody>
-      </p:sp>
-      <p:sp>
-        <p:nvSpPr>
-          <p:cNvPr id="8" name="Rounded Rectangle 7"/>
+              <a:t>• Impact analysis</a:t>
+            </a:r>
+          </a:p>
+        </p:txBody>
+      </p:sp>
+      <p:sp>
+        <p:nvSpPr>
+          <p:cNvPr id="11" name="Rounded Rectangle 10"/>
           <p:cNvSpPr/>
           <p:nvPr/>
         </p:nvSpPr>
         <p:spPr>
           <a:xfrm>
-            <a:off x="6263640" y="1234440"/>
-            <a:ext cx="5303520" cy="1828800"/>
+            <a:off x="822960" y="4160520"/>
+            <a:ext cx="10424160" cy="868680"/>
           </a:xfrm>
           <a:prstGeom prst="roundRect">
             <a:avLst/>
@@ -14524,20 +13880,20 @@
       </p:sp>
       <p:sp>
         <p:nvSpPr>
-          <p:cNvPr id="9" name="Rectangle 8"/>
+          <p:cNvPr id="12" name="Rectangle 11"/>
           <p:cNvSpPr/>
           <p:nvPr/>
         </p:nvSpPr>
         <p:spPr>
           <a:xfrm>
-            <a:off x="6263640" y="1234440"/>
-            <a:ext cx="91440" cy="1828800"/>
+            <a:off x="822960" y="4160520"/>
+            <a:ext cx="91440" cy="868680"/>
           </a:xfrm>
           <a:prstGeom prst="rect">
             <a:avLst/>
           </a:prstGeom>
           <a:solidFill>
-            <a:srgbClr val="02C39A"/>
+            <a:srgbClr val="F9B700"/>
           </a:solidFill>
           <a:ln>
             <a:noFill/>
@@ -14567,14 +13923,14 @@
       </p:sp>
       <p:sp>
         <p:nvSpPr>
-          <p:cNvPr id="10" name="TextBox 9"/>
+          <p:cNvPr id="13" name="TextBox 12"/>
           <p:cNvSpPr txBox="1"/>
           <p:nvPr/>
         </p:nvSpPr>
         <p:spPr>
           <a:xfrm>
-            <a:off x="6446520" y="1344168"/>
-            <a:ext cx="4983480" cy="1664208"/>
+            <a:off x="1005840" y="4270248"/>
+            <a:ext cx="10104120" cy="704088"/>
           </a:xfrm>
           <a:prstGeom prst="rect">
             <a:avLst/>
@@ -14596,167 +13952,7 @@
               </a:defRPr>
             </a:pPr>
             <a:r>
-              <a:t>Why it helps</a:t>
-            </a:r>
-          </a:p>
-          <a:p>
-            <a:pPr>
-              <a:spcBef>
-                <a:spcPts val="400"/>
-              </a:spcBef>
-              <a:defRPr sz="1050">
-                <a:solidFill>
-                  <a:srgbClr val="242424"/>
-                </a:solidFill>
-                <a:latin typeface="Aptos"/>
-              </a:defRPr>
-            </a:pPr>
-            <a:r>
-              <a:t>• Certified semantic models</a:t>
-            </a:r>
-            <a:br/>
-            <a:r>
-              <a:t>• Impact analysis</a:t>
-            </a:r>
-          </a:p>
-        </p:txBody>
-      </p:sp>
-      <p:sp>
-        <p:nvSpPr>
-          <p:cNvPr id="11" name="Rounded Rectangle 10"/>
-          <p:cNvSpPr/>
-          <p:nvPr/>
-        </p:nvSpPr>
-        <p:spPr>
-          <a:xfrm>
-            <a:off x="822960" y="4160520"/>
-            <a:ext cx="10424160" cy="868680"/>
-          </a:xfrm>
-          <a:prstGeom prst="roundRect">
-            <a:avLst/>
-          </a:prstGeom>
-          <a:solidFill>
-            <a:srgbClr val="FFFFFF"/>
-          </a:solidFill>
-          <a:ln>
-            <a:solidFill>
-              <a:srgbClr val="DCDCDC"/>
-            </a:solidFill>
-          </a:ln>
-        </p:spPr>
-        <p:style>
-          <a:lnRef idx="1">
-            <a:schemeClr val="accent1"/>
-          </a:lnRef>
-          <a:fillRef idx="3">
-            <a:schemeClr val="accent1"/>
-          </a:fillRef>
-          <a:effectRef idx="2">
-            <a:schemeClr val="accent1"/>
-          </a:effectRef>
-          <a:fontRef idx="minor">
-            <a:schemeClr val="lt1"/>
-          </a:fontRef>
-        </p:style>
-        <p:txBody>
-          <a:bodyPr rtlCol="0" anchor="ctr"/>
-          <a:lstStyle/>
-          <a:p>
-            <a:pPr algn="ctr"/>
-          </a:p>
-        </p:txBody>
-      </p:sp>
-      <p:sp>
-        <p:nvSpPr>
-          <p:cNvPr id="12" name="Rectangle 11"/>
-          <p:cNvSpPr/>
-          <p:nvPr/>
-        </p:nvSpPr>
-        <p:spPr>
-          <a:xfrm>
-            <a:off x="822960" y="4160520"/>
-            <a:ext cx="91440" cy="868680"/>
-          </a:xfrm>
-          <a:prstGeom prst="rect">
-            <a:avLst/>
-          </a:prstGeom>
-          <a:solidFill>
-            <a:srgbClr val="F9B700"/>
-          </a:solidFill>
-          <a:ln>
-            <a:noFill/>
-          </a:ln>
-        </p:spPr>
-        <p:style>
-          <a:lnRef idx="1">
-            <a:schemeClr val="accent1"/>
-          </a:lnRef>
-          <a:fillRef idx="3">
-            <a:schemeClr val="accent1"/>
-          </a:fillRef>
-          <a:effectRef idx="2">
-            <a:schemeClr val="accent1"/>
-          </a:effectRef>
-          <a:fontRef idx="minor">
-            <a:schemeClr val="lt1"/>
-          </a:fontRef>
-        </p:style>
-        <p:txBody>
-          <a:bodyPr rtlCol="0" anchor="ctr"/>
-          <a:lstStyle/>
-          <a:p>
-            <a:pPr algn="ctr"/>
-          </a:p>
-        </p:txBody>
-      </p:sp>
-      <p:sp>
-        <p:nvSpPr>
-          <p:cNvPr id="13" name="TextBox 12"/>
-          <p:cNvSpPr txBox="1"/>
-          <p:nvPr/>
-        </p:nvSpPr>
-        <p:spPr>
-          <a:xfrm>
-            <a:off x="1005840" y="4270248"/>
-            <a:ext cx="10104120" cy="704088"/>
-          </a:xfrm>
-          <a:prstGeom prst="rect">
-            <a:avLst/>
-          </a:prstGeom>
-          <a:noFill/>
-        </p:spPr>
-        <p:txBody>
-          <a:bodyPr wrap="square" lIns="0" rIns="0">
-            <a:spAutoFit/>
-          </a:bodyPr>
-          <a:lstStyle/>
-          <a:p>
-            <a:pPr>
-              <a:defRPr b="1" sz="1500">
-                <a:solidFill>
-                  <a:srgbClr val="1E2761"/>
-                </a:solidFill>
-                <a:latin typeface="Aptos Display"/>
-              </a:defRPr>
-            </a:pPr>
-            <a:r>
-              <a:t>Lab connection</a:t>
-            </a:r>
-          </a:p>
-          <a:p>
-            <a:pPr>
-              <a:spcBef>
-                <a:spcPts val="400"/>
-              </a:spcBef>
-              <a:defRPr sz="1050">
-                <a:solidFill>
-                  <a:srgbClr val="242424"/>
-                </a:solidFill>
-                <a:latin typeface="Aptos"/>
-              </a:defRPr>
-            </a:pPr>
-            <a:r>
-              <a:t>Coverage: Covered. Use the lab README to demonstrate or discuss this topic. Review terms: analysis, impact, pattern.</a:t>
+              <a:t>In the lab, you will apply this pattern, validate the expected behavior, and discuss where it fits in a real Power BI solution.</a:t>
             </a:r>
           </a:p>
         </p:txBody>
